--- a/docs/slides.pptx
+++ b/docs/slides.pptx
@@ -155,22 +155,18 @@
   <p:extLst>
     <p:ext uri="{521415D9-36F7-43E2-AB2F-B90AF26B5E84}">
       <p14:sectionLst xmlns:p14="http://schemas.microsoft.com/office/powerpoint/2010/main">
-        <p14:section name="Opening" id="{fd7d1a03-9d7e-a15a-9e1e-4c272ae3c013}">
+        <p14:section name="Opening" id="{b6602d46-0267-8fda-0317-0a559c09bc3d}">
           <p14:sldIdLst>
             <p14:sldId id="256"/>
-          </p14:sldIdLst>
-        </p14:section>
-        <p14:section name="The road here · Heroku" id="{fa7b98a6-5305-c5ad-5558-7c02b5cd51bd}">
-          <p14:sldIdLst>
             <p14:sldId id="257"/>
           </p14:sldIdLst>
         </p14:section>
-        <p14:section name="Following along" id="{ae81b61d-2cd7-100a-1719-13871a57e0e4}">
+        <p14:section name="The road here · Heroku" id="{5d870eb4-c6a0-4940-8701-8849e7743fcf}">
           <p14:sldIdLst>
             <p14:sldId id="258"/>
           </p14:sldIdLst>
         </p14:section>
-        <p14:section name="The road here" id="{9b99e0d0-f705-9ba0-67f7-9767d6f0a62f}">
+        <p14:section name="The road here" id="{bbec8642-0d05-01f7-6e82-b0d0f3f02edd}">
           <p14:sldIdLst>
             <p14:sldId id="259"/>
             <p14:sldId id="260"/>
@@ -181,7 +177,7 @@
             <p14:sldId id="265"/>
           </p14:sldIdLst>
         </p14:section>
-        <p14:section name="Terraform on a laptop" id="{25a47e78-f23a-747c-8ccb-80e69fe0bb1c}">
+        <p14:section name="Terraform on a laptop" id="{b6f1dd6a-d44d-4b46-a7b8-095c010a75fe}">
           <p14:sldIdLst>
             <p14:sldId id="266"/>
             <p14:sldId id="267"/>
@@ -189,7 +185,7 @@
             <p14:sldId id="269"/>
           </p14:sldIdLst>
         </p14:section>
-        <p14:section name="Stack 1 · Static site" id="{a6e97336-bb74-cbae-17b0-20afbee9babd}">
+        <p14:section name="Stack 1 · Static site" id="{4cf97543-fd68-c972-9606-3d60f4c7e1fb}">
           <p14:sldIdLst>
             <p14:sldId id="270"/>
             <p14:sldId id="271"/>
@@ -201,7 +197,7 @@
             <p14:sldId id="277"/>
           </p14:sldIdLst>
         </p14:section>
-        <p14:section name="Stack 2 · Lambda + DynamoDB" id="{f330752c-acc8-bf8e-33ae-91bcd8a79242}">
+        <p14:section name="Stack 2 · Lambda + DynamoDB" id="{76b93679-c23f-a61b-b35d-65f96941d360}">
           <p14:sldIdLst>
             <p14:sldId id="278"/>
             <p14:sldId id="279"/>
@@ -211,7 +207,7 @@
             <p14:sldId id="283"/>
           </p14:sldIdLst>
         </p14:section>
-        <p14:section name="Stack 3 · Rails + Postgres + S3" id="{a74cb888-955e-1693-ce9e-7c5e63622a5e}">
+        <p14:section name="Stack 3 · Rails + Postgres + S3" id="{c8111656-65fe-a51f-c916-009a10935824}">
           <p14:sldIdLst>
             <p14:sldId id="284"/>
             <p14:sldId id="285"/>
@@ -221,7 +217,7 @@
             <p14:sldId id="289"/>
           </p14:sldIdLst>
         </p14:section>
-        <p14:section name="Stack 4 · TanStack Start" id="{ab2a4bc3-12c7-0bc7-0c98-c319cc260c4d}">
+        <p14:section name="Stack 4 · TanStack Start" id="{b4739d6e-4c4a-d56c-28a1-76cbbe82e21a}">
           <p14:sldIdLst>
             <p14:sldId id="290"/>
             <p14:sldId id="291"/>
@@ -230,32 +226,32 @@
             <p14:sldId id="294"/>
           </p14:sldIdLst>
         </p14:section>
-        <p14:section name="Four shapes" id="{b1904d2a-729a-b1c9-d8a1-155395ff3c65}">
+        <p14:section name="Four shapes" id="{055c639b-7557-19f8-972d-479605c2098f}">
           <p14:sldIdLst>
             <p14:sldId id="295"/>
             <p14:sldId id="296"/>
           </p14:sldIdLst>
         </p14:section>
-        <p14:section name="The front door" id="{52f949e0-3895-5555-4c56-34b96f338515}">
+        <p14:section name="The front door" id="{59d00768-38c9-f02e-00f2-9976e48cdbac}">
           <p14:sldIdLst>
             <p14:sldId id="297"/>
             <p14:sldId id="298"/>
           </p14:sldIdLst>
         </p14:section>
-        <p14:section name="When stacks share" id="{6ed9eaf7-f6b0-9f1b-98ae-d9a22bdf6f55}">
+        <p14:section name="When stacks share" id="{5ec2540a-79c5-3aaf-1569-112a4ec52e8b}">
           <p14:sldIdLst>
             <p14:sldId id="299"/>
             <p14:sldId id="300"/>
             <p14:sldId id="301"/>
           </p14:sldIdLst>
         </p14:section>
-        <p14:section name="Close" id="{e59be28c-3924-cb8d-fad3-6c05dcea9e33}">
+        <p14:section name="Close" id="{7a7747b3-d947-b2d8-c7e0-e4e1b97b0dc7}">
           <p14:sldIdLst>
             <p14:sldId id="302"/>
             <p14:sldId id="303"/>
           </p14:sldIdLst>
         </p14:section>
-        <p14:section name="Backup" id="{38b9262b-5f82-d5cf-6fc2-0023d0d9914f}">
+        <p14:section name="Backup" id="{ef73aaa6-22a2-b166-4c1a-d9c641601e09}">
           <p14:sldIdLst>
             <p14:sldId id="304"/>
           </p14:sldIdLst>
@@ -664,7 +660,7 @@
           <a:p>
             <a:r>
               <a:rPr lang="en-US" dirty="0"/>
-              <a:t>Welcome. The whole talk runs live against a local AWS emulator. Nobody in this room needs an account to follow along; the repo link is on the last slide.
+              <a:t>Welcome. The whole talk runs live against a local AWS emulator. Nobody in this room needs an account to follow along; the repo link and QR code are on the next slide.
 The colored bar is the key for every slide: teal is CDN, indigo is network, plum is compute, ochre is data, brick is access and IAM.</a:t>
             </a:r>
             <a:endParaRPr lang="en-US" dirty="0"/>
@@ -1664,7 +1660,11 @@
           <a:p>
             <a:r>
               <a:rPr lang="en-US" dirty="0"/>
-              <a:t>About 30 seconds. I'm a full-stack developer who learned the infrastructure underneath the apps I maintained. Most of my background is Rails and small agency environments. The examples include Rails, but the deployment and infrastructure questions apply to JavaScript too.</a:t>
+              <a:t>About 45 seconds within the opening budget. Show this before the background story so people can scan the QR or open https://github.com/raysapida/terraform_demo, clone the code, and start make prepare. Watching is enough; do not pause for installations.
+Make up starts only Floci, pulling its image if missing. Make prepare explicitly pulls the Compose image, starts Floci, and pulls the Lambda runtime, Postgres, Node, Ruby, Docker CLI, registry, Kamal proxy, BuildKit, Ubuntu EC2 image, and Dockerfile frontend. Participants can leave it running in a terminal during the deployment story. It does not provision Terraform resources or deploy the apps.
+Make doctor is read-only and lists missing prerequisites. Every stack needs Docker with Compose v2, Terraform, make, and curl. Stack 1's sync also needs AWS CLI. Stack 3's usual route needs host Ruby 4.0.5 and Bundler, Docker Buildx, SSH tools, and OpenSSL; participants can skip it. Stack 4 uses host Node when available and otherwise node:24-slim.
+This is image preparation, not a fully offline installation. Terraform providers, npm packages, gems, apt/apk packages, and build layers can still download later. BuildKit has its own cache and can fetch base images again. Download time depends on the connection and existing caches; send make prepare to attendees ahead of the event when possible.
+Ports must be free: 4566, 7001–7010, 3020, 3443, 2222, and 5555. Tested on macOS with Apple Silicon; Rails is configured for arm64. The QR on the later Floci slide links to Floci itself, not this repository.</a:t>
             </a:r>
             <a:endParaRPr lang="en-US" dirty="0"/>
           </a:p>
@@ -2680,10 +2680,7 @@
           <a:p>
             <a:r>
               <a:rPr lang="en-US" dirty="0"/>
-              <a:t>Under a minute. Following along is optional; watching is enough. Downloads can run during the seven-slide deployment story, but do not stop the talk for installations. Send the full prerequisite list before the event if possible.
-Run make doctor from the repo to see what is missing. Every stack needs Docker with Compose v2, Terraform, make, and curl. Stack 1's sync also needs AWS CLI; stack 3 runs Kamal with host Ruby 4.0.5 and Bundler, plus Docker Buildx. Stack 4 uses host Node if available and otherwise builds in node:24-slim. No AWS account or credentials are needed.
-Images total roughly 2.8 GB as measured on 2026-10-12, plus provider and package downloads. Ports must be free: 4566, 7001–7010, 3020, 3443, 2222, and 5555. Tested on macOS with Apple Silicon; the Rails builder is configured for arm64.
-Before presenting: the repo is private until sanitization is resolved. Add a repo link when publication is cleared, or arrange an approved copy ahead of the talk. The QR on the Floci slide is a reference, not the demo repository.</a:t>
+              <a:t>About 30 seconds. I'm a full-stack developer who learned the infrastructure underneath the apps I maintained. Most of my background is Rails and small agency environments. The examples include Rails, but the deployment and infrastructure questions apply to JavaScript too.</a:t>
             </a:r>
             <a:endParaRPr lang="en-US" dirty="0"/>
           </a:p>
@@ -4506,7 +4503,8 @@
           <a:p>
             <a:r>
               <a:rPr lang="en-US" dirty="0"/>
-              <a:t>Add the public repo URL here once the repository is sanitized and made public. It's still private: client and project names aren't scrubbed yet.</a:t>
+              <a:t>Leave https://github.com/raysapida/terraform_demo on screen for questions. The opening follow-along slide also has a QR code for the same repository.
+Further watching: Better Stack, "This Tool Runs Real AWS Services on Your Laptop For Free (Floci)" — https://youtu.be/7s462S-qRY4 ; AwesomeFOSS, "Floci: The Drop-In LocalStack Replacement That Stays Free Forever" — https://youtu.be/brHYpf4yKKI .</a:t>
             </a:r>
             <a:endParaRPr lang="en-US" dirty="0"/>
           </a:p>
@@ -19934,7 +19932,7 @@
                 <a:ea typeface="Courier New" pitchFamily="34" charset="-122"/>
                 <a:cs typeface="Courier New" pitchFamily="34" charset="-120"/>
               </a:rPr>
-              <a:t>THE ROAD HERE</a:t>
+              <a:t>OPTIONAL · YOU CAN JUST WATCH · NO AWS ACCOUNT NEEDED</a:t>
             </a:r>
             <a:endParaRPr lang="en-US" sz="1100" dirty="0"/>
           </a:p>
@@ -19975,7 +19973,7 @@
                 <a:ea typeface="Arial" pitchFamily="34" charset="-122"/>
                 <a:cs typeface="Arial" pitchFamily="34" charset="-120"/>
               </a:rPr>
-              <a:t>Where I'm coming from</a:t>
+              <a:t>Get the slides and follow along</a:t>
             </a:r>
             <a:endParaRPr lang="en-US" sz="3600" dirty="0"/>
           </a:p>
@@ -19983,14 +19981,14 @@
       </p:sp>
       <p:sp>
         <p:nvSpPr>
-          <p:cNvPr id="5" name="Bullets"/>
+          <p:cNvPr id="5" name="Statement"/>
           <p:cNvSpPr txBox="1"/>
           <p:nvPr/>
         </p:nvSpPr>
         <p:spPr>
           <a:xfrm>
             <a:off x="685800" y="1645920"/>
-            <a:ext cx="10820400" cy="1801368"/>
+            <a:ext cx="8595360" cy="457200"/>
           </a:xfrm>
           <a:prstGeom prst="rect">
             <a:avLst/>
@@ -20002,100 +20000,6162 @@
           <a:bodyPr wrap="square" lIns="0" tIns="0" rIns="0" bIns="0" rtlCol="0" anchor="t"/>
           <a:lstStyle/>
           <a:p>
-            <a:pPr marL="279400" indent="-279400">
+            <a:pPr indent="0" marL="0">
               <a:lnSpc>
                 <a:spcPct val="100000"/>
               </a:lnSpc>
-              <a:spcAft>
-                <a:spcPts val="1300"/>
-              </a:spcAft>
-              <a:buSzPct val="100000"/>
-              <a:buChar char="–"/>
-            </a:pPr>
-            <a:r>
-              <a:rPr lang="en-US" sz="1950" dirty="0">
+              <a:buNone/>
+            </a:pPr>
+            <a:r>
+              <a:rPr lang="en-US" sz="3000" u="sng" dirty="0">
                 <a:solidFill>
                   <a:schemeClr val="tx1"/>
                 </a:solidFill>
                 <a:latin typeface="Arial" pitchFamily="34" charset="0"/>
                 <a:ea typeface="Arial" pitchFamily="34" charset="-122"/>
                 <a:cs typeface="Arial" pitchFamily="34" charset="-120"/>
-              </a:rPr>
-              <a:t>Full-stack developer who had to learn the infrastructure underneath my apps.</a:t>
-            </a:r>
-            <a:endParaRPr lang="en-US" sz="1950" dirty="0"/>
-          </a:p>
-          <a:p>
-            <a:pPr marL="279400" indent="-279400">
+                <a:hlinkClick r:id="rId1" invalidUrl="" action="" tgtFrame="" tooltip="" history="1" highlightClick="0" endSnd="0">
+                  <a:extLst>
+                    <a:ext uri="{A12FA001-AC4F-418D-AE19-62706E023703}">
+                      <ahyp:hlinkClr xmlns:ahyp="http://schemas.microsoft.com/office/drawing/2018/hyperlinkcolor" val="tx"/>
+                    </a:ext>
+                  </a:extLst>
+                </a:hlinkClick>
+              </a:rPr>
+              <a:t>https://github.com/raysapida/terraform_demo</a:t>
+            </a:r>
+            <a:endParaRPr lang="en-US" sz="3000" dirty="0"/>
+          </a:p>
+        </p:txBody>
+      </p:sp>
+      <p:sp>
+        <p:nvSpPr>
+          <p:cNvPr id="6" name="Shape 3"/>
+          <p:cNvSpPr/>
+          <p:nvPr/>
+        </p:nvSpPr>
+        <p:spPr>
+          <a:xfrm>
+            <a:off x="1773880" y="2286000"/>
+            <a:ext cx="2977383" cy="2977383"/>
+          </a:xfrm>
+          <a:prstGeom prst="rect">
+            <a:avLst/>
+          </a:prstGeom>
+          <a:solidFill>
+            <a:srgbClr val="FFFFFF"/>
+          </a:solidFill>
+          <a:ln/>
+        </p:spPr>
+      </p:sp>
+      <p:sp>
+        <p:nvSpPr>
+          <p:cNvPr id="7" name="Shape 4"/>
+          <p:cNvSpPr/>
+          <p:nvPr/>
+        </p:nvSpPr>
+        <p:spPr>
+          <a:xfrm>
+            <a:off x="2120088" y="2632207"/>
+            <a:ext cx="484690" cy="69241"/>
+          </a:xfrm>
+          <a:prstGeom prst="rect">
+            <a:avLst/>
+          </a:prstGeom>
+          <a:solidFill>
+            <a:srgbClr val="000000"/>
+          </a:solidFill>
+          <a:ln/>
+        </p:spPr>
+      </p:sp>
+      <p:sp>
+        <p:nvSpPr>
+          <p:cNvPr id="8" name="Shape 5"/>
+          <p:cNvSpPr/>
+          <p:nvPr/>
+        </p:nvSpPr>
+        <p:spPr>
+          <a:xfrm>
+            <a:off x="2743261" y="2632207"/>
+            <a:ext cx="276966" cy="69241"/>
+          </a:xfrm>
+          <a:prstGeom prst="rect">
+            <a:avLst/>
+          </a:prstGeom>
+          <a:solidFill>
+            <a:srgbClr val="000000"/>
+          </a:solidFill>
+          <a:ln/>
+        </p:spPr>
+      </p:sp>
+      <p:sp>
+        <p:nvSpPr>
+          <p:cNvPr id="9" name="Shape 6"/>
+          <p:cNvSpPr/>
+          <p:nvPr/>
+        </p:nvSpPr>
+        <p:spPr>
+          <a:xfrm>
+            <a:off x="3089468" y="2632207"/>
+            <a:ext cx="69241" cy="69241"/>
+          </a:xfrm>
+          <a:prstGeom prst="rect">
+            <a:avLst/>
+          </a:prstGeom>
+          <a:solidFill>
+            <a:srgbClr val="000000"/>
+          </a:solidFill>
+          <a:ln/>
+        </p:spPr>
+      </p:sp>
+      <p:sp>
+        <p:nvSpPr>
+          <p:cNvPr id="10" name="Shape 7"/>
+          <p:cNvSpPr/>
+          <p:nvPr/>
+        </p:nvSpPr>
+        <p:spPr>
+          <a:xfrm>
+            <a:off x="3227951" y="2632207"/>
+            <a:ext cx="69241" cy="69241"/>
+          </a:xfrm>
+          <a:prstGeom prst="rect">
+            <a:avLst/>
+          </a:prstGeom>
+          <a:solidFill>
+            <a:srgbClr val="000000"/>
+          </a:solidFill>
+          <a:ln/>
+        </p:spPr>
+      </p:sp>
+      <p:sp>
+        <p:nvSpPr>
+          <p:cNvPr id="11" name="Shape 8"/>
+          <p:cNvSpPr/>
+          <p:nvPr/>
+        </p:nvSpPr>
+        <p:spPr>
+          <a:xfrm>
+            <a:off x="3435676" y="2632207"/>
+            <a:ext cx="207724" cy="69241"/>
+          </a:xfrm>
+          <a:prstGeom prst="rect">
+            <a:avLst/>
+          </a:prstGeom>
+          <a:solidFill>
+            <a:srgbClr val="000000"/>
+          </a:solidFill>
+          <a:ln/>
+        </p:spPr>
+      </p:sp>
+      <p:sp>
+        <p:nvSpPr>
+          <p:cNvPr id="12" name="Shape 9"/>
+          <p:cNvSpPr/>
+          <p:nvPr/>
+        </p:nvSpPr>
+        <p:spPr>
+          <a:xfrm>
+            <a:off x="3712642" y="2632207"/>
+            <a:ext cx="69241" cy="69241"/>
+          </a:xfrm>
+          <a:prstGeom prst="rect">
+            <a:avLst/>
+          </a:prstGeom>
+          <a:solidFill>
+            <a:srgbClr val="000000"/>
+          </a:solidFill>
+          <a:ln/>
+        </p:spPr>
+      </p:sp>
+      <p:sp>
+        <p:nvSpPr>
+          <p:cNvPr id="13" name="Shape 10"/>
+          <p:cNvSpPr/>
+          <p:nvPr/>
+        </p:nvSpPr>
+        <p:spPr>
+          <a:xfrm>
+            <a:off x="3920366" y="2632207"/>
+            <a:ext cx="484690" cy="69241"/>
+          </a:xfrm>
+          <a:prstGeom prst="rect">
+            <a:avLst/>
+          </a:prstGeom>
+          <a:solidFill>
+            <a:srgbClr val="000000"/>
+          </a:solidFill>
+          <a:ln/>
+        </p:spPr>
+      </p:sp>
+      <p:sp>
+        <p:nvSpPr>
+          <p:cNvPr id="14" name="Shape 11"/>
+          <p:cNvSpPr/>
+          <p:nvPr/>
+        </p:nvSpPr>
+        <p:spPr>
+          <a:xfrm>
+            <a:off x="2120088" y="2701449"/>
+            <a:ext cx="69241" cy="69241"/>
+          </a:xfrm>
+          <a:prstGeom prst="rect">
+            <a:avLst/>
+          </a:prstGeom>
+          <a:solidFill>
+            <a:srgbClr val="000000"/>
+          </a:solidFill>
+          <a:ln/>
+        </p:spPr>
+      </p:sp>
+      <p:sp>
+        <p:nvSpPr>
+          <p:cNvPr id="15" name="Shape 12"/>
+          <p:cNvSpPr/>
+          <p:nvPr/>
+        </p:nvSpPr>
+        <p:spPr>
+          <a:xfrm>
+            <a:off x="2535537" y="2701449"/>
+            <a:ext cx="69241" cy="69241"/>
+          </a:xfrm>
+          <a:prstGeom prst="rect">
+            <a:avLst/>
+          </a:prstGeom>
+          <a:solidFill>
+            <a:srgbClr val="000000"/>
+          </a:solidFill>
+          <a:ln/>
+        </p:spPr>
+      </p:sp>
+      <p:sp>
+        <p:nvSpPr>
+          <p:cNvPr id="16" name="Shape 13"/>
+          <p:cNvSpPr/>
+          <p:nvPr/>
+        </p:nvSpPr>
+        <p:spPr>
+          <a:xfrm>
+            <a:off x="3158710" y="2701449"/>
+            <a:ext cx="138483" cy="69241"/>
+          </a:xfrm>
+          <a:prstGeom prst="rect">
+            <a:avLst/>
+          </a:prstGeom>
+          <a:solidFill>
+            <a:srgbClr val="000000"/>
+          </a:solidFill>
+          <a:ln/>
+        </p:spPr>
+      </p:sp>
+      <p:sp>
+        <p:nvSpPr>
+          <p:cNvPr id="17" name="Shape 14"/>
+          <p:cNvSpPr/>
+          <p:nvPr/>
+        </p:nvSpPr>
+        <p:spPr>
+          <a:xfrm>
+            <a:off x="3366434" y="2701449"/>
+            <a:ext cx="69241" cy="69241"/>
+          </a:xfrm>
+          <a:prstGeom prst="rect">
+            <a:avLst/>
+          </a:prstGeom>
+          <a:solidFill>
+            <a:srgbClr val="000000"/>
+          </a:solidFill>
+          <a:ln/>
+        </p:spPr>
+      </p:sp>
+      <p:sp>
+        <p:nvSpPr>
+          <p:cNvPr id="18" name="Shape 15"/>
+          <p:cNvSpPr/>
+          <p:nvPr/>
+        </p:nvSpPr>
+        <p:spPr>
+          <a:xfrm>
+            <a:off x="3504917" y="2701449"/>
+            <a:ext cx="138483" cy="69241"/>
+          </a:xfrm>
+          <a:prstGeom prst="rect">
+            <a:avLst/>
+          </a:prstGeom>
+          <a:solidFill>
+            <a:srgbClr val="000000"/>
+          </a:solidFill>
+          <a:ln/>
+        </p:spPr>
+      </p:sp>
+      <p:sp>
+        <p:nvSpPr>
+          <p:cNvPr id="19" name="Shape 16"/>
+          <p:cNvSpPr/>
+          <p:nvPr/>
+        </p:nvSpPr>
+        <p:spPr>
+          <a:xfrm>
+            <a:off x="3920366" y="2701449"/>
+            <a:ext cx="69241" cy="69241"/>
+          </a:xfrm>
+          <a:prstGeom prst="rect">
+            <a:avLst/>
+          </a:prstGeom>
+          <a:solidFill>
+            <a:srgbClr val="000000"/>
+          </a:solidFill>
+          <a:ln/>
+        </p:spPr>
+      </p:sp>
+      <p:sp>
+        <p:nvSpPr>
+          <p:cNvPr id="20" name="Shape 17"/>
+          <p:cNvSpPr/>
+          <p:nvPr/>
+        </p:nvSpPr>
+        <p:spPr>
+          <a:xfrm>
+            <a:off x="4335815" y="2701449"/>
+            <a:ext cx="69241" cy="69241"/>
+          </a:xfrm>
+          <a:prstGeom prst="rect">
+            <a:avLst/>
+          </a:prstGeom>
+          <a:solidFill>
+            <a:srgbClr val="000000"/>
+          </a:solidFill>
+          <a:ln/>
+        </p:spPr>
+      </p:sp>
+      <p:sp>
+        <p:nvSpPr>
+          <p:cNvPr id="21" name="Shape 18"/>
+          <p:cNvSpPr/>
+          <p:nvPr/>
+        </p:nvSpPr>
+        <p:spPr>
+          <a:xfrm>
+            <a:off x="2120088" y="2770690"/>
+            <a:ext cx="69241" cy="69241"/>
+          </a:xfrm>
+          <a:prstGeom prst="rect">
+            <a:avLst/>
+          </a:prstGeom>
+          <a:solidFill>
+            <a:srgbClr val="000000"/>
+          </a:solidFill>
+          <a:ln/>
+        </p:spPr>
+      </p:sp>
+      <p:sp>
+        <p:nvSpPr>
+          <p:cNvPr id="22" name="Shape 19"/>
+          <p:cNvSpPr/>
+          <p:nvPr/>
+        </p:nvSpPr>
+        <p:spPr>
+          <a:xfrm>
+            <a:off x="2258571" y="2770690"/>
+            <a:ext cx="207724" cy="69241"/>
+          </a:xfrm>
+          <a:prstGeom prst="rect">
+            <a:avLst/>
+          </a:prstGeom>
+          <a:solidFill>
+            <a:srgbClr val="000000"/>
+          </a:solidFill>
+          <a:ln/>
+        </p:spPr>
+      </p:sp>
+      <p:sp>
+        <p:nvSpPr>
+          <p:cNvPr id="23" name="Shape 20"/>
+          <p:cNvSpPr/>
+          <p:nvPr/>
+        </p:nvSpPr>
+        <p:spPr>
+          <a:xfrm>
+            <a:off x="2535537" y="2770690"/>
+            <a:ext cx="69241" cy="69241"/>
+          </a:xfrm>
+          <a:prstGeom prst="rect">
+            <a:avLst/>
+          </a:prstGeom>
+          <a:solidFill>
+            <a:srgbClr val="000000"/>
+          </a:solidFill>
+          <a:ln/>
+        </p:spPr>
+      </p:sp>
+      <p:sp>
+        <p:nvSpPr>
+          <p:cNvPr id="24" name="Shape 21"/>
+          <p:cNvSpPr/>
+          <p:nvPr/>
+        </p:nvSpPr>
+        <p:spPr>
+          <a:xfrm>
+            <a:off x="2674019" y="2770690"/>
+            <a:ext cx="138483" cy="69241"/>
+          </a:xfrm>
+          <a:prstGeom prst="rect">
+            <a:avLst/>
+          </a:prstGeom>
+          <a:solidFill>
+            <a:srgbClr val="000000"/>
+          </a:solidFill>
+          <a:ln/>
+        </p:spPr>
+      </p:sp>
+      <p:sp>
+        <p:nvSpPr>
+          <p:cNvPr id="25" name="Shape 22"/>
+          <p:cNvSpPr/>
+          <p:nvPr/>
+        </p:nvSpPr>
+        <p:spPr>
+          <a:xfrm>
+            <a:off x="3089468" y="2770690"/>
+            <a:ext cx="69241" cy="69241"/>
+          </a:xfrm>
+          <a:prstGeom prst="rect">
+            <a:avLst/>
+          </a:prstGeom>
+          <a:solidFill>
+            <a:srgbClr val="000000"/>
+          </a:solidFill>
+          <a:ln/>
+        </p:spPr>
+      </p:sp>
+      <p:sp>
+        <p:nvSpPr>
+          <p:cNvPr id="26" name="Shape 23"/>
+          <p:cNvSpPr/>
+          <p:nvPr/>
+        </p:nvSpPr>
+        <p:spPr>
+          <a:xfrm>
+            <a:off x="3227951" y="2770690"/>
+            <a:ext cx="69241" cy="69241"/>
+          </a:xfrm>
+          <a:prstGeom prst="rect">
+            <a:avLst/>
+          </a:prstGeom>
+          <a:solidFill>
+            <a:srgbClr val="000000"/>
+          </a:solidFill>
+          <a:ln/>
+        </p:spPr>
+      </p:sp>
+      <p:sp>
+        <p:nvSpPr>
+          <p:cNvPr id="27" name="Shape 24"/>
+          <p:cNvSpPr/>
+          <p:nvPr/>
+        </p:nvSpPr>
+        <p:spPr>
+          <a:xfrm>
+            <a:off x="3574159" y="2770690"/>
+            <a:ext cx="138483" cy="69241"/>
+          </a:xfrm>
+          <a:prstGeom prst="rect">
+            <a:avLst/>
+          </a:prstGeom>
+          <a:solidFill>
+            <a:srgbClr val="000000"/>
+          </a:solidFill>
+          <a:ln/>
+        </p:spPr>
+      </p:sp>
+      <p:sp>
+        <p:nvSpPr>
+          <p:cNvPr id="28" name="Shape 25"/>
+          <p:cNvSpPr/>
+          <p:nvPr/>
+        </p:nvSpPr>
+        <p:spPr>
+          <a:xfrm>
+            <a:off x="3920366" y="2770690"/>
+            <a:ext cx="69241" cy="69241"/>
+          </a:xfrm>
+          <a:prstGeom prst="rect">
+            <a:avLst/>
+          </a:prstGeom>
+          <a:solidFill>
+            <a:srgbClr val="000000"/>
+          </a:solidFill>
+          <a:ln/>
+        </p:spPr>
+      </p:sp>
+      <p:sp>
+        <p:nvSpPr>
+          <p:cNvPr id="29" name="Shape 26"/>
+          <p:cNvSpPr/>
+          <p:nvPr/>
+        </p:nvSpPr>
+        <p:spPr>
+          <a:xfrm>
+            <a:off x="4058849" y="2770690"/>
+            <a:ext cx="207724" cy="69241"/>
+          </a:xfrm>
+          <a:prstGeom prst="rect">
+            <a:avLst/>
+          </a:prstGeom>
+          <a:solidFill>
+            <a:srgbClr val="000000"/>
+          </a:solidFill>
+          <a:ln/>
+        </p:spPr>
+      </p:sp>
+      <p:sp>
+        <p:nvSpPr>
+          <p:cNvPr id="30" name="Shape 27"/>
+          <p:cNvSpPr/>
+          <p:nvPr/>
+        </p:nvSpPr>
+        <p:spPr>
+          <a:xfrm>
+            <a:off x="4335815" y="2770690"/>
+            <a:ext cx="69241" cy="69241"/>
+          </a:xfrm>
+          <a:prstGeom prst="rect">
+            <a:avLst/>
+          </a:prstGeom>
+          <a:solidFill>
+            <a:srgbClr val="000000"/>
+          </a:solidFill>
+          <a:ln/>
+        </p:spPr>
+      </p:sp>
+      <p:sp>
+        <p:nvSpPr>
+          <p:cNvPr id="31" name="Shape 28"/>
+          <p:cNvSpPr/>
+          <p:nvPr/>
+        </p:nvSpPr>
+        <p:spPr>
+          <a:xfrm>
+            <a:off x="2120088" y="2839932"/>
+            <a:ext cx="69241" cy="69241"/>
+          </a:xfrm>
+          <a:prstGeom prst="rect">
+            <a:avLst/>
+          </a:prstGeom>
+          <a:solidFill>
+            <a:srgbClr val="000000"/>
+          </a:solidFill>
+          <a:ln/>
+        </p:spPr>
+      </p:sp>
+      <p:sp>
+        <p:nvSpPr>
+          <p:cNvPr id="32" name="Shape 29"/>
+          <p:cNvSpPr/>
+          <p:nvPr/>
+        </p:nvSpPr>
+        <p:spPr>
+          <a:xfrm>
+            <a:off x="2258571" y="2839932"/>
+            <a:ext cx="207724" cy="69241"/>
+          </a:xfrm>
+          <a:prstGeom prst="rect">
+            <a:avLst/>
+          </a:prstGeom>
+          <a:solidFill>
+            <a:srgbClr val="000000"/>
+          </a:solidFill>
+          <a:ln/>
+        </p:spPr>
+      </p:sp>
+      <p:sp>
+        <p:nvSpPr>
+          <p:cNvPr id="33" name="Shape 30"/>
+          <p:cNvSpPr/>
+          <p:nvPr/>
+        </p:nvSpPr>
+        <p:spPr>
+          <a:xfrm>
+            <a:off x="2535537" y="2839932"/>
+            <a:ext cx="69241" cy="69241"/>
+          </a:xfrm>
+          <a:prstGeom prst="rect">
+            <a:avLst/>
+          </a:prstGeom>
+          <a:solidFill>
+            <a:srgbClr val="000000"/>
+          </a:solidFill>
+          <a:ln/>
+        </p:spPr>
+      </p:sp>
+      <p:sp>
+        <p:nvSpPr>
+          <p:cNvPr id="34" name="Shape 31"/>
+          <p:cNvSpPr/>
+          <p:nvPr/>
+        </p:nvSpPr>
+        <p:spPr>
+          <a:xfrm>
+            <a:off x="2674019" y="2839932"/>
+            <a:ext cx="69241" cy="69241"/>
+          </a:xfrm>
+          <a:prstGeom prst="rect">
+            <a:avLst/>
+          </a:prstGeom>
+          <a:solidFill>
+            <a:srgbClr val="000000"/>
+          </a:solidFill>
+          <a:ln/>
+        </p:spPr>
+      </p:sp>
+      <p:sp>
+        <p:nvSpPr>
+          <p:cNvPr id="35" name="Shape 32"/>
+          <p:cNvSpPr/>
+          <p:nvPr/>
+        </p:nvSpPr>
+        <p:spPr>
+          <a:xfrm>
+            <a:off x="2881744" y="2839932"/>
+            <a:ext cx="69241" cy="69241"/>
+          </a:xfrm>
+          <a:prstGeom prst="rect">
+            <a:avLst/>
+          </a:prstGeom>
+          <a:solidFill>
+            <a:srgbClr val="000000"/>
+          </a:solidFill>
+          <a:ln/>
+        </p:spPr>
+      </p:sp>
+      <p:sp>
+        <p:nvSpPr>
+          <p:cNvPr id="36" name="Shape 33"/>
+          <p:cNvSpPr/>
+          <p:nvPr/>
+        </p:nvSpPr>
+        <p:spPr>
+          <a:xfrm>
+            <a:off x="3366434" y="2839932"/>
+            <a:ext cx="69241" cy="69241"/>
+          </a:xfrm>
+          <a:prstGeom prst="rect">
+            <a:avLst/>
+          </a:prstGeom>
+          <a:solidFill>
+            <a:srgbClr val="000000"/>
+          </a:solidFill>
+          <a:ln/>
+        </p:spPr>
+      </p:sp>
+      <p:sp>
+        <p:nvSpPr>
+          <p:cNvPr id="37" name="Shape 34"/>
+          <p:cNvSpPr/>
+          <p:nvPr/>
+        </p:nvSpPr>
+        <p:spPr>
+          <a:xfrm>
+            <a:off x="3574159" y="2839932"/>
+            <a:ext cx="69241" cy="69241"/>
+          </a:xfrm>
+          <a:prstGeom prst="rect">
+            <a:avLst/>
+          </a:prstGeom>
+          <a:solidFill>
+            <a:srgbClr val="000000"/>
+          </a:solidFill>
+          <a:ln/>
+        </p:spPr>
+      </p:sp>
+      <p:sp>
+        <p:nvSpPr>
+          <p:cNvPr id="38" name="Shape 35"/>
+          <p:cNvSpPr/>
+          <p:nvPr/>
+        </p:nvSpPr>
+        <p:spPr>
+          <a:xfrm>
+            <a:off x="3781883" y="2839932"/>
+            <a:ext cx="69241" cy="69241"/>
+          </a:xfrm>
+          <a:prstGeom prst="rect">
+            <a:avLst/>
+          </a:prstGeom>
+          <a:solidFill>
+            <a:srgbClr val="000000"/>
+          </a:solidFill>
+          <a:ln/>
+        </p:spPr>
+      </p:sp>
+      <p:sp>
+        <p:nvSpPr>
+          <p:cNvPr id="39" name="Shape 36"/>
+          <p:cNvSpPr/>
+          <p:nvPr/>
+        </p:nvSpPr>
+        <p:spPr>
+          <a:xfrm>
+            <a:off x="3920366" y="2839932"/>
+            <a:ext cx="69241" cy="69241"/>
+          </a:xfrm>
+          <a:prstGeom prst="rect">
+            <a:avLst/>
+          </a:prstGeom>
+          <a:solidFill>
+            <a:srgbClr val="000000"/>
+          </a:solidFill>
+          <a:ln/>
+        </p:spPr>
+      </p:sp>
+      <p:sp>
+        <p:nvSpPr>
+          <p:cNvPr id="40" name="Shape 37"/>
+          <p:cNvSpPr/>
+          <p:nvPr/>
+        </p:nvSpPr>
+        <p:spPr>
+          <a:xfrm>
+            <a:off x="4058849" y="2839932"/>
+            <a:ext cx="207724" cy="69241"/>
+          </a:xfrm>
+          <a:prstGeom prst="rect">
+            <a:avLst/>
+          </a:prstGeom>
+          <a:solidFill>
+            <a:srgbClr val="000000"/>
+          </a:solidFill>
+          <a:ln/>
+        </p:spPr>
+      </p:sp>
+      <p:sp>
+        <p:nvSpPr>
+          <p:cNvPr id="41" name="Shape 38"/>
+          <p:cNvSpPr/>
+          <p:nvPr/>
+        </p:nvSpPr>
+        <p:spPr>
+          <a:xfrm>
+            <a:off x="4335815" y="2839932"/>
+            <a:ext cx="69241" cy="69241"/>
+          </a:xfrm>
+          <a:prstGeom prst="rect">
+            <a:avLst/>
+          </a:prstGeom>
+          <a:solidFill>
+            <a:srgbClr val="000000"/>
+          </a:solidFill>
+          <a:ln/>
+        </p:spPr>
+      </p:sp>
+      <p:sp>
+        <p:nvSpPr>
+          <p:cNvPr id="42" name="Shape 39"/>
+          <p:cNvSpPr/>
+          <p:nvPr/>
+        </p:nvSpPr>
+        <p:spPr>
+          <a:xfrm>
+            <a:off x="2120088" y="2909173"/>
+            <a:ext cx="69241" cy="69241"/>
+          </a:xfrm>
+          <a:prstGeom prst="rect">
+            <a:avLst/>
+          </a:prstGeom>
+          <a:solidFill>
+            <a:srgbClr val="000000"/>
+          </a:solidFill>
+          <a:ln/>
+        </p:spPr>
+      </p:sp>
+      <p:sp>
+        <p:nvSpPr>
+          <p:cNvPr id="43" name="Shape 40"/>
+          <p:cNvSpPr/>
+          <p:nvPr/>
+        </p:nvSpPr>
+        <p:spPr>
+          <a:xfrm>
+            <a:off x="2258571" y="2909173"/>
+            <a:ext cx="207724" cy="69241"/>
+          </a:xfrm>
+          <a:prstGeom prst="rect">
+            <a:avLst/>
+          </a:prstGeom>
+          <a:solidFill>
+            <a:srgbClr val="000000"/>
+          </a:solidFill>
+          <a:ln/>
+        </p:spPr>
+      </p:sp>
+      <p:sp>
+        <p:nvSpPr>
+          <p:cNvPr id="44" name="Shape 41"/>
+          <p:cNvSpPr/>
+          <p:nvPr/>
+        </p:nvSpPr>
+        <p:spPr>
+          <a:xfrm>
+            <a:off x="2535537" y="2909173"/>
+            <a:ext cx="69241" cy="69241"/>
+          </a:xfrm>
+          <a:prstGeom prst="rect">
+            <a:avLst/>
+          </a:prstGeom>
+          <a:solidFill>
+            <a:srgbClr val="000000"/>
+          </a:solidFill>
+          <a:ln/>
+        </p:spPr>
+      </p:sp>
+      <p:sp>
+        <p:nvSpPr>
+          <p:cNvPr id="45" name="Shape 42"/>
+          <p:cNvSpPr/>
+          <p:nvPr/>
+        </p:nvSpPr>
+        <p:spPr>
+          <a:xfrm>
+            <a:off x="2674019" y="2909173"/>
+            <a:ext cx="69241" cy="69241"/>
+          </a:xfrm>
+          <a:prstGeom prst="rect">
+            <a:avLst/>
+          </a:prstGeom>
+          <a:solidFill>
+            <a:srgbClr val="000000"/>
+          </a:solidFill>
+          <a:ln/>
+        </p:spPr>
+      </p:sp>
+      <p:sp>
+        <p:nvSpPr>
+          <p:cNvPr id="46" name="Shape 43"/>
+          <p:cNvSpPr/>
+          <p:nvPr/>
+        </p:nvSpPr>
+        <p:spPr>
+          <a:xfrm>
+            <a:off x="2812502" y="2909173"/>
+            <a:ext cx="207724" cy="69241"/>
+          </a:xfrm>
+          <a:prstGeom prst="rect">
+            <a:avLst/>
+          </a:prstGeom>
+          <a:solidFill>
+            <a:srgbClr val="000000"/>
+          </a:solidFill>
+          <a:ln/>
+        </p:spPr>
+      </p:sp>
+      <p:sp>
+        <p:nvSpPr>
+          <p:cNvPr id="47" name="Shape 44"/>
+          <p:cNvSpPr/>
+          <p:nvPr/>
+        </p:nvSpPr>
+        <p:spPr>
+          <a:xfrm>
+            <a:off x="3089468" y="2909173"/>
+            <a:ext cx="276966" cy="69241"/>
+          </a:xfrm>
+          <a:prstGeom prst="rect">
+            <a:avLst/>
+          </a:prstGeom>
+          <a:solidFill>
+            <a:srgbClr val="000000"/>
+          </a:solidFill>
+          <a:ln/>
+        </p:spPr>
+      </p:sp>
+      <p:sp>
+        <p:nvSpPr>
+          <p:cNvPr id="48" name="Shape 45"/>
+          <p:cNvSpPr/>
+          <p:nvPr/>
+        </p:nvSpPr>
+        <p:spPr>
+          <a:xfrm>
+            <a:off x="3504917" y="2909173"/>
+            <a:ext cx="207724" cy="69241"/>
+          </a:xfrm>
+          <a:prstGeom prst="rect">
+            <a:avLst/>
+          </a:prstGeom>
+          <a:solidFill>
+            <a:srgbClr val="000000"/>
+          </a:solidFill>
+          <a:ln/>
+        </p:spPr>
+      </p:sp>
+      <p:sp>
+        <p:nvSpPr>
+          <p:cNvPr id="49" name="Shape 46"/>
+          <p:cNvSpPr/>
+          <p:nvPr/>
+        </p:nvSpPr>
+        <p:spPr>
+          <a:xfrm>
+            <a:off x="3920366" y="2909173"/>
+            <a:ext cx="69241" cy="69241"/>
+          </a:xfrm>
+          <a:prstGeom prst="rect">
+            <a:avLst/>
+          </a:prstGeom>
+          <a:solidFill>
+            <a:srgbClr val="000000"/>
+          </a:solidFill>
+          <a:ln/>
+        </p:spPr>
+      </p:sp>
+      <p:sp>
+        <p:nvSpPr>
+          <p:cNvPr id="50" name="Shape 47"/>
+          <p:cNvSpPr/>
+          <p:nvPr/>
+        </p:nvSpPr>
+        <p:spPr>
+          <a:xfrm>
+            <a:off x="4058849" y="2909173"/>
+            <a:ext cx="207724" cy="69241"/>
+          </a:xfrm>
+          <a:prstGeom prst="rect">
+            <a:avLst/>
+          </a:prstGeom>
+          <a:solidFill>
+            <a:srgbClr val="000000"/>
+          </a:solidFill>
+          <a:ln/>
+        </p:spPr>
+      </p:sp>
+      <p:sp>
+        <p:nvSpPr>
+          <p:cNvPr id="51" name="Shape 48"/>
+          <p:cNvSpPr/>
+          <p:nvPr/>
+        </p:nvSpPr>
+        <p:spPr>
+          <a:xfrm>
+            <a:off x="4335815" y="2909173"/>
+            <a:ext cx="69241" cy="69241"/>
+          </a:xfrm>
+          <a:prstGeom prst="rect">
+            <a:avLst/>
+          </a:prstGeom>
+          <a:solidFill>
+            <a:srgbClr val="000000"/>
+          </a:solidFill>
+          <a:ln/>
+        </p:spPr>
+      </p:sp>
+      <p:sp>
+        <p:nvSpPr>
+          <p:cNvPr id="52" name="Shape 49"/>
+          <p:cNvSpPr/>
+          <p:nvPr/>
+        </p:nvSpPr>
+        <p:spPr>
+          <a:xfrm>
+            <a:off x="2120088" y="2978415"/>
+            <a:ext cx="69241" cy="69241"/>
+          </a:xfrm>
+          <a:prstGeom prst="rect">
+            <a:avLst/>
+          </a:prstGeom>
+          <a:solidFill>
+            <a:srgbClr val="000000"/>
+          </a:solidFill>
+          <a:ln/>
+        </p:spPr>
+      </p:sp>
+      <p:sp>
+        <p:nvSpPr>
+          <p:cNvPr id="53" name="Shape 50"/>
+          <p:cNvSpPr/>
+          <p:nvPr/>
+        </p:nvSpPr>
+        <p:spPr>
+          <a:xfrm>
+            <a:off x="2535537" y="2978415"/>
+            <a:ext cx="69241" cy="69241"/>
+          </a:xfrm>
+          <a:prstGeom prst="rect">
+            <a:avLst/>
+          </a:prstGeom>
+          <a:solidFill>
+            <a:srgbClr val="000000"/>
+          </a:solidFill>
+          <a:ln/>
+        </p:spPr>
+      </p:sp>
+      <p:sp>
+        <p:nvSpPr>
+          <p:cNvPr id="54" name="Shape 51"/>
+          <p:cNvSpPr/>
+          <p:nvPr/>
+        </p:nvSpPr>
+        <p:spPr>
+          <a:xfrm>
+            <a:off x="2674019" y="2978415"/>
+            <a:ext cx="69241" cy="69241"/>
+          </a:xfrm>
+          <a:prstGeom prst="rect">
+            <a:avLst/>
+          </a:prstGeom>
+          <a:solidFill>
+            <a:srgbClr val="000000"/>
+          </a:solidFill>
+          <a:ln/>
+        </p:spPr>
+      </p:sp>
+      <p:sp>
+        <p:nvSpPr>
+          <p:cNvPr id="55" name="Shape 52"/>
+          <p:cNvSpPr/>
+          <p:nvPr/>
+        </p:nvSpPr>
+        <p:spPr>
+          <a:xfrm>
+            <a:off x="3089468" y="2978415"/>
+            <a:ext cx="69241" cy="69241"/>
+          </a:xfrm>
+          <a:prstGeom prst="rect">
+            <a:avLst/>
+          </a:prstGeom>
+          <a:solidFill>
+            <a:srgbClr val="000000"/>
+          </a:solidFill>
+          <a:ln/>
+        </p:spPr>
+      </p:sp>
+      <p:sp>
+        <p:nvSpPr>
+          <p:cNvPr id="56" name="Shape 53"/>
+          <p:cNvSpPr/>
+          <p:nvPr/>
+        </p:nvSpPr>
+        <p:spPr>
+          <a:xfrm>
+            <a:off x="3366434" y="2978415"/>
+            <a:ext cx="138483" cy="69241"/>
+          </a:xfrm>
+          <a:prstGeom prst="rect">
+            <a:avLst/>
+          </a:prstGeom>
+          <a:solidFill>
+            <a:srgbClr val="000000"/>
+          </a:solidFill>
+          <a:ln/>
+        </p:spPr>
+      </p:sp>
+      <p:sp>
+        <p:nvSpPr>
+          <p:cNvPr id="57" name="Shape 54"/>
+          <p:cNvSpPr/>
+          <p:nvPr/>
+        </p:nvSpPr>
+        <p:spPr>
+          <a:xfrm>
+            <a:off x="3712642" y="2978415"/>
+            <a:ext cx="138483" cy="69241"/>
+          </a:xfrm>
+          <a:prstGeom prst="rect">
+            <a:avLst/>
+          </a:prstGeom>
+          <a:solidFill>
+            <a:srgbClr val="000000"/>
+          </a:solidFill>
+          <a:ln/>
+        </p:spPr>
+      </p:sp>
+      <p:sp>
+        <p:nvSpPr>
+          <p:cNvPr id="58" name="Shape 55"/>
+          <p:cNvSpPr/>
+          <p:nvPr/>
+        </p:nvSpPr>
+        <p:spPr>
+          <a:xfrm>
+            <a:off x="3920366" y="2978415"/>
+            <a:ext cx="69241" cy="69241"/>
+          </a:xfrm>
+          <a:prstGeom prst="rect">
+            <a:avLst/>
+          </a:prstGeom>
+          <a:solidFill>
+            <a:srgbClr val="000000"/>
+          </a:solidFill>
+          <a:ln/>
+        </p:spPr>
+      </p:sp>
+      <p:sp>
+        <p:nvSpPr>
+          <p:cNvPr id="59" name="Shape 56"/>
+          <p:cNvSpPr/>
+          <p:nvPr/>
+        </p:nvSpPr>
+        <p:spPr>
+          <a:xfrm>
+            <a:off x="4335815" y="2978415"/>
+            <a:ext cx="69241" cy="69241"/>
+          </a:xfrm>
+          <a:prstGeom prst="rect">
+            <a:avLst/>
+          </a:prstGeom>
+          <a:solidFill>
+            <a:srgbClr val="000000"/>
+          </a:solidFill>
+          <a:ln/>
+        </p:spPr>
+      </p:sp>
+      <p:sp>
+        <p:nvSpPr>
+          <p:cNvPr id="60" name="Shape 57"/>
+          <p:cNvSpPr/>
+          <p:nvPr/>
+        </p:nvSpPr>
+        <p:spPr>
+          <a:xfrm>
+            <a:off x="2120088" y="3047656"/>
+            <a:ext cx="484690" cy="69241"/>
+          </a:xfrm>
+          <a:prstGeom prst="rect">
+            <a:avLst/>
+          </a:prstGeom>
+          <a:solidFill>
+            <a:srgbClr val="000000"/>
+          </a:solidFill>
+          <a:ln/>
+        </p:spPr>
+      </p:sp>
+      <p:sp>
+        <p:nvSpPr>
+          <p:cNvPr id="61" name="Shape 58"/>
+          <p:cNvSpPr/>
+          <p:nvPr/>
+        </p:nvSpPr>
+        <p:spPr>
+          <a:xfrm>
+            <a:off x="2674019" y="3047656"/>
+            <a:ext cx="69241" cy="69241"/>
+          </a:xfrm>
+          <a:prstGeom prst="rect">
+            <a:avLst/>
+          </a:prstGeom>
+          <a:solidFill>
+            <a:srgbClr val="000000"/>
+          </a:solidFill>
+          <a:ln/>
+        </p:spPr>
+      </p:sp>
+      <p:sp>
+        <p:nvSpPr>
+          <p:cNvPr id="62" name="Shape 59"/>
+          <p:cNvSpPr/>
+          <p:nvPr/>
+        </p:nvSpPr>
+        <p:spPr>
+          <a:xfrm>
+            <a:off x="2812502" y="3047656"/>
+            <a:ext cx="69241" cy="69241"/>
+          </a:xfrm>
+          <a:prstGeom prst="rect">
+            <a:avLst/>
+          </a:prstGeom>
+          <a:solidFill>
+            <a:srgbClr val="000000"/>
+          </a:solidFill>
+          <a:ln/>
+        </p:spPr>
+      </p:sp>
+      <p:sp>
+        <p:nvSpPr>
+          <p:cNvPr id="63" name="Shape 60"/>
+          <p:cNvSpPr/>
+          <p:nvPr/>
+        </p:nvSpPr>
+        <p:spPr>
+          <a:xfrm>
+            <a:off x="2950985" y="3047656"/>
+            <a:ext cx="69241" cy="69241"/>
+          </a:xfrm>
+          <a:prstGeom prst="rect">
+            <a:avLst/>
+          </a:prstGeom>
+          <a:solidFill>
+            <a:srgbClr val="000000"/>
+          </a:solidFill>
+          <a:ln/>
+        </p:spPr>
+      </p:sp>
+      <p:sp>
+        <p:nvSpPr>
+          <p:cNvPr id="64" name="Shape 61"/>
+          <p:cNvSpPr/>
+          <p:nvPr/>
+        </p:nvSpPr>
+        <p:spPr>
+          <a:xfrm>
+            <a:off x="3089468" y="3047656"/>
+            <a:ext cx="69241" cy="69241"/>
+          </a:xfrm>
+          <a:prstGeom prst="rect">
+            <a:avLst/>
+          </a:prstGeom>
+          <a:solidFill>
+            <a:srgbClr val="000000"/>
+          </a:solidFill>
+          <a:ln/>
+        </p:spPr>
+      </p:sp>
+      <p:sp>
+        <p:nvSpPr>
+          <p:cNvPr id="65" name="Shape 62"/>
+          <p:cNvSpPr/>
+          <p:nvPr/>
+        </p:nvSpPr>
+        <p:spPr>
+          <a:xfrm>
+            <a:off x="3227951" y="3047656"/>
+            <a:ext cx="69241" cy="69241"/>
+          </a:xfrm>
+          <a:prstGeom prst="rect">
+            <a:avLst/>
+          </a:prstGeom>
+          <a:solidFill>
+            <a:srgbClr val="000000"/>
+          </a:solidFill>
+          <a:ln/>
+        </p:spPr>
+      </p:sp>
+      <p:sp>
+        <p:nvSpPr>
+          <p:cNvPr id="66" name="Shape 63"/>
+          <p:cNvSpPr/>
+          <p:nvPr/>
+        </p:nvSpPr>
+        <p:spPr>
+          <a:xfrm>
+            <a:off x="3366434" y="3047656"/>
+            <a:ext cx="69241" cy="69241"/>
+          </a:xfrm>
+          <a:prstGeom prst="rect">
+            <a:avLst/>
+          </a:prstGeom>
+          <a:solidFill>
+            <a:srgbClr val="000000"/>
+          </a:solidFill>
+          <a:ln/>
+        </p:spPr>
+      </p:sp>
+      <p:sp>
+        <p:nvSpPr>
+          <p:cNvPr id="67" name="Shape 64"/>
+          <p:cNvSpPr/>
+          <p:nvPr/>
+        </p:nvSpPr>
+        <p:spPr>
+          <a:xfrm>
+            <a:off x="3504917" y="3047656"/>
+            <a:ext cx="69241" cy="69241"/>
+          </a:xfrm>
+          <a:prstGeom prst="rect">
+            <a:avLst/>
+          </a:prstGeom>
+          <a:solidFill>
+            <a:srgbClr val="000000"/>
+          </a:solidFill>
+          <a:ln/>
+        </p:spPr>
+      </p:sp>
+      <p:sp>
+        <p:nvSpPr>
+          <p:cNvPr id="68" name="Shape 65"/>
+          <p:cNvSpPr/>
+          <p:nvPr/>
+        </p:nvSpPr>
+        <p:spPr>
+          <a:xfrm>
+            <a:off x="3643400" y="3047656"/>
+            <a:ext cx="69241" cy="69241"/>
+          </a:xfrm>
+          <a:prstGeom prst="rect">
+            <a:avLst/>
+          </a:prstGeom>
+          <a:solidFill>
+            <a:srgbClr val="000000"/>
+          </a:solidFill>
+          <a:ln/>
+        </p:spPr>
+      </p:sp>
+      <p:sp>
+        <p:nvSpPr>
+          <p:cNvPr id="69" name="Shape 66"/>
+          <p:cNvSpPr/>
+          <p:nvPr/>
+        </p:nvSpPr>
+        <p:spPr>
+          <a:xfrm>
+            <a:off x="3781883" y="3047656"/>
+            <a:ext cx="69241" cy="69241"/>
+          </a:xfrm>
+          <a:prstGeom prst="rect">
+            <a:avLst/>
+          </a:prstGeom>
+          <a:solidFill>
+            <a:srgbClr val="000000"/>
+          </a:solidFill>
+          <a:ln/>
+        </p:spPr>
+      </p:sp>
+      <p:sp>
+        <p:nvSpPr>
+          <p:cNvPr id="70" name="Shape 67"/>
+          <p:cNvSpPr/>
+          <p:nvPr/>
+        </p:nvSpPr>
+        <p:spPr>
+          <a:xfrm>
+            <a:off x="3920366" y="3047656"/>
+            <a:ext cx="484690" cy="69241"/>
+          </a:xfrm>
+          <a:prstGeom prst="rect">
+            <a:avLst/>
+          </a:prstGeom>
+          <a:solidFill>
+            <a:srgbClr val="000000"/>
+          </a:solidFill>
+          <a:ln/>
+        </p:spPr>
+      </p:sp>
+      <p:sp>
+        <p:nvSpPr>
+          <p:cNvPr id="71" name="Shape 68"/>
+          <p:cNvSpPr/>
+          <p:nvPr/>
+        </p:nvSpPr>
+        <p:spPr>
+          <a:xfrm>
+            <a:off x="2674019" y="3116898"/>
+            <a:ext cx="69241" cy="69241"/>
+          </a:xfrm>
+          <a:prstGeom prst="rect">
+            <a:avLst/>
+          </a:prstGeom>
+          <a:solidFill>
+            <a:srgbClr val="000000"/>
+          </a:solidFill>
+          <a:ln/>
+        </p:spPr>
+      </p:sp>
+      <p:sp>
+        <p:nvSpPr>
+          <p:cNvPr id="72" name="Shape 69"/>
+          <p:cNvSpPr/>
+          <p:nvPr/>
+        </p:nvSpPr>
+        <p:spPr>
+          <a:xfrm>
+            <a:off x="2812502" y="3116898"/>
+            <a:ext cx="138483" cy="69241"/>
+          </a:xfrm>
+          <a:prstGeom prst="rect">
+            <a:avLst/>
+          </a:prstGeom>
+          <a:solidFill>
+            <a:srgbClr val="000000"/>
+          </a:solidFill>
+          <a:ln/>
+        </p:spPr>
+      </p:sp>
+      <p:sp>
+        <p:nvSpPr>
+          <p:cNvPr id="73" name="Shape 70"/>
+          <p:cNvSpPr/>
+          <p:nvPr/>
+        </p:nvSpPr>
+        <p:spPr>
+          <a:xfrm>
+            <a:off x="3227951" y="3116898"/>
+            <a:ext cx="69241" cy="69241"/>
+          </a:xfrm>
+          <a:prstGeom prst="rect">
+            <a:avLst/>
+          </a:prstGeom>
+          <a:solidFill>
+            <a:srgbClr val="000000"/>
+          </a:solidFill>
+          <a:ln/>
+        </p:spPr>
+      </p:sp>
+      <p:sp>
+        <p:nvSpPr>
+          <p:cNvPr id="74" name="Shape 71"/>
+          <p:cNvSpPr/>
+          <p:nvPr/>
+        </p:nvSpPr>
+        <p:spPr>
+          <a:xfrm>
+            <a:off x="3435676" y="3116898"/>
+            <a:ext cx="207724" cy="69241"/>
+          </a:xfrm>
+          <a:prstGeom prst="rect">
+            <a:avLst/>
+          </a:prstGeom>
+          <a:solidFill>
+            <a:srgbClr val="000000"/>
+          </a:solidFill>
+          <a:ln/>
+        </p:spPr>
+      </p:sp>
+      <p:sp>
+        <p:nvSpPr>
+          <p:cNvPr id="75" name="Shape 72"/>
+          <p:cNvSpPr/>
+          <p:nvPr/>
+        </p:nvSpPr>
+        <p:spPr>
+          <a:xfrm>
+            <a:off x="3712642" y="3116898"/>
+            <a:ext cx="69241" cy="69241"/>
+          </a:xfrm>
+          <a:prstGeom prst="rect">
+            <a:avLst/>
+          </a:prstGeom>
+          <a:solidFill>
+            <a:srgbClr val="000000"/>
+          </a:solidFill>
+          <a:ln/>
+        </p:spPr>
+      </p:sp>
+      <p:sp>
+        <p:nvSpPr>
+          <p:cNvPr id="76" name="Shape 73"/>
+          <p:cNvSpPr/>
+          <p:nvPr/>
+        </p:nvSpPr>
+        <p:spPr>
+          <a:xfrm>
+            <a:off x="2120088" y="3186139"/>
+            <a:ext cx="69241" cy="69241"/>
+          </a:xfrm>
+          <a:prstGeom prst="rect">
+            <a:avLst/>
+          </a:prstGeom>
+          <a:solidFill>
+            <a:srgbClr val="000000"/>
+          </a:solidFill>
+          <a:ln/>
+        </p:spPr>
+      </p:sp>
+      <p:sp>
+        <p:nvSpPr>
+          <p:cNvPr id="77" name="Shape 74"/>
+          <p:cNvSpPr/>
+          <p:nvPr/>
+        </p:nvSpPr>
+        <p:spPr>
+          <a:xfrm>
+            <a:off x="2258571" y="3186139"/>
+            <a:ext cx="346207" cy="69241"/>
+          </a:xfrm>
+          <a:prstGeom prst="rect">
+            <a:avLst/>
+          </a:prstGeom>
+          <a:solidFill>
+            <a:srgbClr val="000000"/>
+          </a:solidFill>
+          <a:ln/>
+        </p:spPr>
+      </p:sp>
+      <p:sp>
+        <p:nvSpPr>
+          <p:cNvPr id="78" name="Shape 75"/>
+          <p:cNvSpPr/>
+          <p:nvPr/>
+        </p:nvSpPr>
+        <p:spPr>
+          <a:xfrm>
+            <a:off x="3020227" y="3186139"/>
+            <a:ext cx="138483" cy="69241"/>
+          </a:xfrm>
+          <a:prstGeom prst="rect">
+            <a:avLst/>
+          </a:prstGeom>
+          <a:solidFill>
+            <a:srgbClr val="000000"/>
+          </a:solidFill>
+          <a:ln/>
+        </p:spPr>
+      </p:sp>
+      <p:sp>
+        <p:nvSpPr>
+          <p:cNvPr id="79" name="Shape 76"/>
+          <p:cNvSpPr/>
+          <p:nvPr/>
+        </p:nvSpPr>
+        <p:spPr>
+          <a:xfrm>
+            <a:off x="3297193" y="3186139"/>
+            <a:ext cx="69241" cy="69241"/>
+          </a:xfrm>
+          <a:prstGeom prst="rect">
+            <a:avLst/>
+          </a:prstGeom>
+          <a:solidFill>
+            <a:srgbClr val="000000"/>
+          </a:solidFill>
+          <a:ln/>
+        </p:spPr>
+      </p:sp>
+      <p:sp>
+        <p:nvSpPr>
+          <p:cNvPr id="80" name="Shape 77"/>
+          <p:cNvSpPr/>
+          <p:nvPr/>
+        </p:nvSpPr>
+        <p:spPr>
+          <a:xfrm>
+            <a:off x="3435676" y="3186139"/>
+            <a:ext cx="69241" cy="69241"/>
+          </a:xfrm>
+          <a:prstGeom prst="rect">
+            <a:avLst/>
+          </a:prstGeom>
+          <a:solidFill>
+            <a:srgbClr val="000000"/>
+          </a:solidFill>
+          <a:ln/>
+        </p:spPr>
+      </p:sp>
+      <p:sp>
+        <p:nvSpPr>
+          <p:cNvPr id="81" name="Shape 78"/>
+          <p:cNvSpPr/>
+          <p:nvPr/>
+        </p:nvSpPr>
+        <p:spPr>
+          <a:xfrm>
+            <a:off x="3712642" y="3186139"/>
+            <a:ext cx="69241" cy="69241"/>
+          </a:xfrm>
+          <a:prstGeom prst="rect">
+            <a:avLst/>
+          </a:prstGeom>
+          <a:solidFill>
+            <a:srgbClr val="000000"/>
+          </a:solidFill>
+          <a:ln/>
+        </p:spPr>
+      </p:sp>
+      <p:sp>
+        <p:nvSpPr>
+          <p:cNvPr id="82" name="Shape 79"/>
+          <p:cNvSpPr/>
+          <p:nvPr/>
+        </p:nvSpPr>
+        <p:spPr>
+          <a:xfrm>
+            <a:off x="3920366" y="3186139"/>
+            <a:ext cx="346207" cy="69241"/>
+          </a:xfrm>
+          <a:prstGeom prst="rect">
+            <a:avLst/>
+          </a:prstGeom>
+          <a:solidFill>
+            <a:srgbClr val="000000"/>
+          </a:solidFill>
+          <a:ln/>
+        </p:spPr>
+      </p:sp>
+      <p:sp>
+        <p:nvSpPr>
+          <p:cNvPr id="83" name="Shape 80"/>
+          <p:cNvSpPr/>
+          <p:nvPr/>
+        </p:nvSpPr>
+        <p:spPr>
+          <a:xfrm>
+            <a:off x="2258571" y="3255381"/>
+            <a:ext cx="138483" cy="69241"/>
+          </a:xfrm>
+          <a:prstGeom prst="rect">
+            <a:avLst/>
+          </a:prstGeom>
+          <a:solidFill>
+            <a:srgbClr val="000000"/>
+          </a:solidFill>
+          <a:ln/>
+        </p:spPr>
+      </p:sp>
+      <p:sp>
+        <p:nvSpPr>
+          <p:cNvPr id="84" name="Shape 81"/>
+          <p:cNvSpPr/>
+          <p:nvPr/>
+        </p:nvSpPr>
+        <p:spPr>
+          <a:xfrm>
+            <a:off x="2466295" y="3255381"/>
+            <a:ext cx="69241" cy="69241"/>
+          </a:xfrm>
+          <a:prstGeom prst="rect">
+            <a:avLst/>
+          </a:prstGeom>
+          <a:solidFill>
+            <a:srgbClr val="000000"/>
+          </a:solidFill>
+          <a:ln/>
+        </p:spPr>
+      </p:sp>
+      <p:sp>
+        <p:nvSpPr>
+          <p:cNvPr id="85" name="Shape 82"/>
+          <p:cNvSpPr/>
+          <p:nvPr/>
+        </p:nvSpPr>
+        <p:spPr>
+          <a:xfrm>
+            <a:off x="2743261" y="3255381"/>
+            <a:ext cx="69241" cy="69241"/>
+          </a:xfrm>
+          <a:prstGeom prst="rect">
+            <a:avLst/>
+          </a:prstGeom>
+          <a:solidFill>
+            <a:srgbClr val="000000"/>
+          </a:solidFill>
+          <a:ln/>
+        </p:spPr>
+      </p:sp>
+      <p:sp>
+        <p:nvSpPr>
+          <p:cNvPr id="86" name="Shape 83"/>
+          <p:cNvSpPr/>
+          <p:nvPr/>
+        </p:nvSpPr>
+        <p:spPr>
+          <a:xfrm>
+            <a:off x="3020227" y="3255381"/>
+            <a:ext cx="69241" cy="69241"/>
+          </a:xfrm>
+          <a:prstGeom prst="rect">
+            <a:avLst/>
+          </a:prstGeom>
+          <a:solidFill>
+            <a:srgbClr val="000000"/>
+          </a:solidFill>
+          <a:ln/>
+        </p:spPr>
+      </p:sp>
+      <p:sp>
+        <p:nvSpPr>
+          <p:cNvPr id="87" name="Shape 84"/>
+          <p:cNvSpPr/>
+          <p:nvPr/>
+        </p:nvSpPr>
+        <p:spPr>
+          <a:xfrm>
+            <a:off x="3297193" y="3255381"/>
+            <a:ext cx="69241" cy="69241"/>
+          </a:xfrm>
+          <a:prstGeom prst="rect">
+            <a:avLst/>
+          </a:prstGeom>
+          <a:solidFill>
+            <a:srgbClr val="000000"/>
+          </a:solidFill>
+          <a:ln/>
+        </p:spPr>
+      </p:sp>
+      <p:sp>
+        <p:nvSpPr>
+          <p:cNvPr id="88" name="Shape 85"/>
+          <p:cNvSpPr/>
+          <p:nvPr/>
+        </p:nvSpPr>
+        <p:spPr>
+          <a:xfrm>
+            <a:off x="3435676" y="3255381"/>
+            <a:ext cx="138483" cy="69241"/>
+          </a:xfrm>
+          <a:prstGeom prst="rect">
+            <a:avLst/>
+          </a:prstGeom>
+          <a:solidFill>
+            <a:srgbClr val="000000"/>
+          </a:solidFill>
+          <a:ln/>
+        </p:spPr>
+      </p:sp>
+      <p:sp>
+        <p:nvSpPr>
+          <p:cNvPr id="89" name="Shape 86"/>
+          <p:cNvSpPr/>
+          <p:nvPr/>
+        </p:nvSpPr>
+        <p:spPr>
+          <a:xfrm>
+            <a:off x="3712642" y="3255381"/>
+            <a:ext cx="69241" cy="69241"/>
+          </a:xfrm>
+          <a:prstGeom prst="rect">
+            <a:avLst/>
+          </a:prstGeom>
+          <a:solidFill>
+            <a:srgbClr val="000000"/>
+          </a:solidFill>
+          <a:ln/>
+        </p:spPr>
+      </p:sp>
+      <p:sp>
+        <p:nvSpPr>
+          <p:cNvPr id="90" name="Shape 87"/>
+          <p:cNvSpPr/>
+          <p:nvPr/>
+        </p:nvSpPr>
+        <p:spPr>
+          <a:xfrm>
+            <a:off x="3920366" y="3255381"/>
+            <a:ext cx="138483" cy="69241"/>
+          </a:xfrm>
+          <a:prstGeom prst="rect">
+            <a:avLst/>
+          </a:prstGeom>
+          <a:solidFill>
+            <a:srgbClr val="000000"/>
+          </a:solidFill>
+          <a:ln/>
+        </p:spPr>
+      </p:sp>
+      <p:sp>
+        <p:nvSpPr>
+          <p:cNvPr id="91" name="Shape 88"/>
+          <p:cNvSpPr/>
+          <p:nvPr/>
+        </p:nvSpPr>
+        <p:spPr>
+          <a:xfrm>
+            <a:off x="4128090" y="3255381"/>
+            <a:ext cx="138483" cy="69241"/>
+          </a:xfrm>
+          <a:prstGeom prst="rect">
+            <a:avLst/>
+          </a:prstGeom>
+          <a:solidFill>
+            <a:srgbClr val="000000"/>
+          </a:solidFill>
+          <a:ln/>
+        </p:spPr>
+      </p:sp>
+      <p:sp>
+        <p:nvSpPr>
+          <p:cNvPr id="92" name="Shape 89"/>
+          <p:cNvSpPr/>
+          <p:nvPr/>
+        </p:nvSpPr>
+        <p:spPr>
+          <a:xfrm>
+            <a:off x="4335815" y="3255381"/>
+            <a:ext cx="69241" cy="69241"/>
+          </a:xfrm>
+          <a:prstGeom prst="rect">
+            <a:avLst/>
+          </a:prstGeom>
+          <a:solidFill>
+            <a:srgbClr val="000000"/>
+          </a:solidFill>
+          <a:ln/>
+        </p:spPr>
+      </p:sp>
+      <p:sp>
+        <p:nvSpPr>
+          <p:cNvPr id="93" name="Shape 90"/>
+          <p:cNvSpPr/>
+          <p:nvPr/>
+        </p:nvSpPr>
+        <p:spPr>
+          <a:xfrm>
+            <a:off x="2466295" y="3324622"/>
+            <a:ext cx="900139" cy="69241"/>
+          </a:xfrm>
+          <a:prstGeom prst="rect">
+            <a:avLst/>
+          </a:prstGeom>
+          <a:solidFill>
+            <a:srgbClr val="000000"/>
+          </a:solidFill>
+          <a:ln/>
+        </p:spPr>
+      </p:sp>
+      <p:sp>
+        <p:nvSpPr>
+          <p:cNvPr id="94" name="Shape 91"/>
+          <p:cNvSpPr/>
+          <p:nvPr/>
+        </p:nvSpPr>
+        <p:spPr>
+          <a:xfrm>
+            <a:off x="3643400" y="3324622"/>
+            <a:ext cx="69241" cy="69241"/>
+          </a:xfrm>
+          <a:prstGeom prst="rect">
+            <a:avLst/>
+          </a:prstGeom>
+          <a:solidFill>
+            <a:srgbClr val="000000"/>
+          </a:solidFill>
+          <a:ln/>
+        </p:spPr>
+      </p:sp>
+      <p:sp>
+        <p:nvSpPr>
+          <p:cNvPr id="95" name="Shape 92"/>
+          <p:cNvSpPr/>
+          <p:nvPr/>
+        </p:nvSpPr>
+        <p:spPr>
+          <a:xfrm>
+            <a:off x="3781883" y="3324622"/>
+            <a:ext cx="207724" cy="69241"/>
+          </a:xfrm>
+          <a:prstGeom prst="rect">
+            <a:avLst/>
+          </a:prstGeom>
+          <a:solidFill>
+            <a:srgbClr val="000000"/>
+          </a:solidFill>
+          <a:ln/>
+        </p:spPr>
+      </p:sp>
+      <p:sp>
+        <p:nvSpPr>
+          <p:cNvPr id="96" name="Shape 93"/>
+          <p:cNvSpPr/>
+          <p:nvPr/>
+        </p:nvSpPr>
+        <p:spPr>
+          <a:xfrm>
+            <a:off x="4058849" y="3324622"/>
+            <a:ext cx="69241" cy="69241"/>
+          </a:xfrm>
+          <a:prstGeom prst="rect">
+            <a:avLst/>
+          </a:prstGeom>
+          <a:solidFill>
+            <a:srgbClr val="000000"/>
+          </a:solidFill>
+          <a:ln/>
+        </p:spPr>
+      </p:sp>
+      <p:sp>
+        <p:nvSpPr>
+          <p:cNvPr id="97" name="Shape 94"/>
+          <p:cNvSpPr/>
+          <p:nvPr/>
+        </p:nvSpPr>
+        <p:spPr>
+          <a:xfrm>
+            <a:off x="4197332" y="3324622"/>
+            <a:ext cx="138483" cy="69241"/>
+          </a:xfrm>
+          <a:prstGeom prst="rect">
+            <a:avLst/>
+          </a:prstGeom>
+          <a:solidFill>
+            <a:srgbClr val="000000"/>
+          </a:solidFill>
+          <a:ln/>
+        </p:spPr>
+      </p:sp>
+      <p:sp>
+        <p:nvSpPr>
+          <p:cNvPr id="98" name="Shape 95"/>
+          <p:cNvSpPr/>
+          <p:nvPr/>
+        </p:nvSpPr>
+        <p:spPr>
+          <a:xfrm>
+            <a:off x="2189329" y="3393864"/>
+            <a:ext cx="138483" cy="69241"/>
+          </a:xfrm>
+          <a:prstGeom prst="rect">
+            <a:avLst/>
+          </a:prstGeom>
+          <a:solidFill>
+            <a:srgbClr val="000000"/>
+          </a:solidFill>
+          <a:ln/>
+        </p:spPr>
+      </p:sp>
+      <p:sp>
+        <p:nvSpPr>
+          <p:cNvPr id="99" name="Shape 96"/>
+          <p:cNvSpPr/>
+          <p:nvPr/>
+        </p:nvSpPr>
+        <p:spPr>
+          <a:xfrm>
+            <a:off x="2397054" y="3393864"/>
+            <a:ext cx="69241" cy="69241"/>
+          </a:xfrm>
+          <a:prstGeom prst="rect">
+            <a:avLst/>
+          </a:prstGeom>
+          <a:solidFill>
+            <a:srgbClr val="000000"/>
+          </a:solidFill>
+          <a:ln/>
+        </p:spPr>
+      </p:sp>
+      <p:sp>
+        <p:nvSpPr>
+          <p:cNvPr id="100" name="Shape 97"/>
+          <p:cNvSpPr/>
+          <p:nvPr/>
+        </p:nvSpPr>
+        <p:spPr>
+          <a:xfrm>
+            <a:off x="2604778" y="3393864"/>
+            <a:ext cx="138483" cy="69241"/>
+          </a:xfrm>
+          <a:prstGeom prst="rect">
+            <a:avLst/>
+          </a:prstGeom>
+          <a:solidFill>
+            <a:srgbClr val="000000"/>
+          </a:solidFill>
+          <a:ln/>
+        </p:spPr>
+      </p:sp>
+      <p:sp>
+        <p:nvSpPr>
+          <p:cNvPr id="101" name="Shape 98"/>
+          <p:cNvSpPr/>
+          <p:nvPr/>
+        </p:nvSpPr>
+        <p:spPr>
+          <a:xfrm>
+            <a:off x="2812502" y="3393864"/>
+            <a:ext cx="69241" cy="69241"/>
+          </a:xfrm>
+          <a:prstGeom prst="rect">
+            <a:avLst/>
+          </a:prstGeom>
+          <a:solidFill>
+            <a:srgbClr val="000000"/>
+          </a:solidFill>
+          <a:ln/>
+        </p:spPr>
+      </p:sp>
+      <p:sp>
+        <p:nvSpPr>
+          <p:cNvPr id="102" name="Shape 99"/>
+          <p:cNvSpPr/>
+          <p:nvPr/>
+        </p:nvSpPr>
+        <p:spPr>
+          <a:xfrm>
+            <a:off x="2950985" y="3393864"/>
+            <a:ext cx="138483" cy="69241"/>
+          </a:xfrm>
+          <a:prstGeom prst="rect">
+            <a:avLst/>
+          </a:prstGeom>
+          <a:solidFill>
+            <a:srgbClr val="000000"/>
+          </a:solidFill>
+          <a:ln/>
+        </p:spPr>
+      </p:sp>
+      <p:sp>
+        <p:nvSpPr>
+          <p:cNvPr id="103" name="Shape 100"/>
+          <p:cNvSpPr/>
+          <p:nvPr/>
+        </p:nvSpPr>
+        <p:spPr>
+          <a:xfrm>
+            <a:off x="3158710" y="3393864"/>
+            <a:ext cx="69241" cy="69241"/>
+          </a:xfrm>
+          <a:prstGeom prst="rect">
+            <a:avLst/>
+          </a:prstGeom>
+          <a:solidFill>
+            <a:srgbClr val="000000"/>
+          </a:solidFill>
+          <a:ln/>
+        </p:spPr>
+      </p:sp>
+      <p:sp>
+        <p:nvSpPr>
+          <p:cNvPr id="104" name="Shape 101"/>
+          <p:cNvSpPr/>
+          <p:nvPr/>
+        </p:nvSpPr>
+        <p:spPr>
+          <a:xfrm>
+            <a:off x="3297193" y="3393864"/>
+            <a:ext cx="207724" cy="69241"/>
+          </a:xfrm>
+          <a:prstGeom prst="rect">
+            <a:avLst/>
+          </a:prstGeom>
+          <a:solidFill>
+            <a:srgbClr val="000000"/>
+          </a:solidFill>
+          <a:ln/>
+        </p:spPr>
+      </p:sp>
+      <p:sp>
+        <p:nvSpPr>
+          <p:cNvPr id="105" name="Shape 102"/>
+          <p:cNvSpPr/>
+          <p:nvPr/>
+        </p:nvSpPr>
+        <p:spPr>
+          <a:xfrm>
+            <a:off x="3781883" y="3393864"/>
+            <a:ext cx="207724" cy="69241"/>
+          </a:xfrm>
+          <a:prstGeom prst="rect">
+            <a:avLst/>
+          </a:prstGeom>
+          <a:solidFill>
+            <a:srgbClr val="000000"/>
+          </a:solidFill>
+          <a:ln/>
+        </p:spPr>
+      </p:sp>
+      <p:sp>
+        <p:nvSpPr>
+          <p:cNvPr id="106" name="Shape 103"/>
+          <p:cNvSpPr/>
+          <p:nvPr/>
+        </p:nvSpPr>
+        <p:spPr>
+          <a:xfrm>
+            <a:off x="4058849" y="3393864"/>
+            <a:ext cx="207724" cy="69241"/>
+          </a:xfrm>
+          <a:prstGeom prst="rect">
+            <a:avLst/>
+          </a:prstGeom>
+          <a:solidFill>
+            <a:srgbClr val="000000"/>
+          </a:solidFill>
+          <a:ln/>
+        </p:spPr>
+      </p:sp>
+      <p:sp>
+        <p:nvSpPr>
+          <p:cNvPr id="107" name="Shape 104"/>
+          <p:cNvSpPr/>
+          <p:nvPr/>
+        </p:nvSpPr>
+        <p:spPr>
+          <a:xfrm>
+            <a:off x="4335815" y="3393864"/>
+            <a:ext cx="69241" cy="69241"/>
+          </a:xfrm>
+          <a:prstGeom prst="rect">
+            <a:avLst/>
+          </a:prstGeom>
+          <a:solidFill>
+            <a:srgbClr val="000000"/>
+          </a:solidFill>
+          <a:ln/>
+        </p:spPr>
+      </p:sp>
+      <p:sp>
+        <p:nvSpPr>
+          <p:cNvPr id="108" name="Shape 105"/>
+          <p:cNvSpPr/>
+          <p:nvPr/>
+        </p:nvSpPr>
+        <p:spPr>
+          <a:xfrm>
+            <a:off x="2120088" y="3463105"/>
+            <a:ext cx="69241" cy="69241"/>
+          </a:xfrm>
+          <a:prstGeom prst="rect">
+            <a:avLst/>
+          </a:prstGeom>
+          <a:solidFill>
+            <a:srgbClr val="000000"/>
+          </a:solidFill>
+          <a:ln/>
+        </p:spPr>
+      </p:sp>
+      <p:sp>
+        <p:nvSpPr>
+          <p:cNvPr id="109" name="Shape 106"/>
+          <p:cNvSpPr/>
+          <p:nvPr/>
+        </p:nvSpPr>
+        <p:spPr>
+          <a:xfrm>
+            <a:off x="2535537" y="3463105"/>
+            <a:ext cx="207724" cy="69241"/>
+          </a:xfrm>
+          <a:prstGeom prst="rect">
+            <a:avLst/>
+          </a:prstGeom>
+          <a:solidFill>
+            <a:srgbClr val="000000"/>
+          </a:solidFill>
+          <a:ln/>
+        </p:spPr>
+      </p:sp>
+      <p:sp>
+        <p:nvSpPr>
+          <p:cNvPr id="110" name="Shape 107"/>
+          <p:cNvSpPr/>
+          <p:nvPr/>
+        </p:nvSpPr>
+        <p:spPr>
+          <a:xfrm>
+            <a:off x="2881744" y="3463105"/>
+            <a:ext cx="69241" cy="69241"/>
+          </a:xfrm>
+          <a:prstGeom prst="rect">
+            <a:avLst/>
+          </a:prstGeom>
+          <a:solidFill>
+            <a:srgbClr val="000000"/>
+          </a:solidFill>
+          <a:ln/>
+        </p:spPr>
+      </p:sp>
+      <p:sp>
+        <p:nvSpPr>
+          <p:cNvPr id="111" name="Shape 108"/>
+          <p:cNvSpPr/>
+          <p:nvPr/>
+        </p:nvSpPr>
+        <p:spPr>
+          <a:xfrm>
+            <a:off x="3089468" y="3463105"/>
+            <a:ext cx="207724" cy="69241"/>
+          </a:xfrm>
+          <a:prstGeom prst="rect">
+            <a:avLst/>
+          </a:prstGeom>
+          <a:solidFill>
+            <a:srgbClr val="000000"/>
+          </a:solidFill>
+          <a:ln/>
+        </p:spPr>
+      </p:sp>
+      <p:sp>
+        <p:nvSpPr>
+          <p:cNvPr id="112" name="Shape 109"/>
+          <p:cNvSpPr/>
+          <p:nvPr/>
+        </p:nvSpPr>
+        <p:spPr>
+          <a:xfrm>
+            <a:off x="3504917" y="3463105"/>
+            <a:ext cx="415449" cy="69241"/>
+          </a:xfrm>
+          <a:prstGeom prst="rect">
+            <a:avLst/>
+          </a:prstGeom>
+          <a:solidFill>
+            <a:srgbClr val="000000"/>
+          </a:solidFill>
+          <a:ln/>
+        </p:spPr>
+      </p:sp>
+      <p:sp>
+        <p:nvSpPr>
+          <p:cNvPr id="113" name="Shape 110"/>
+          <p:cNvSpPr/>
+          <p:nvPr/>
+        </p:nvSpPr>
+        <p:spPr>
+          <a:xfrm>
+            <a:off x="4128090" y="3463105"/>
+            <a:ext cx="69241" cy="69241"/>
+          </a:xfrm>
+          <a:prstGeom prst="rect">
+            <a:avLst/>
+          </a:prstGeom>
+          <a:solidFill>
+            <a:srgbClr val="000000"/>
+          </a:solidFill>
+          <a:ln/>
+        </p:spPr>
+      </p:sp>
+      <p:sp>
+        <p:nvSpPr>
+          <p:cNvPr id="114" name="Shape 111"/>
+          <p:cNvSpPr/>
+          <p:nvPr/>
+        </p:nvSpPr>
+        <p:spPr>
+          <a:xfrm>
+            <a:off x="2120088" y="3532347"/>
+            <a:ext cx="69241" cy="69241"/>
+          </a:xfrm>
+          <a:prstGeom prst="rect">
+            <a:avLst/>
+          </a:prstGeom>
+          <a:solidFill>
+            <a:srgbClr val="000000"/>
+          </a:solidFill>
+          <a:ln/>
+        </p:spPr>
+      </p:sp>
+      <p:sp>
+        <p:nvSpPr>
+          <p:cNvPr id="115" name="Shape 112"/>
+          <p:cNvSpPr/>
+          <p:nvPr/>
+        </p:nvSpPr>
+        <p:spPr>
+          <a:xfrm>
+            <a:off x="2674019" y="3532347"/>
+            <a:ext cx="138483" cy="69241"/>
+          </a:xfrm>
+          <a:prstGeom prst="rect">
+            <a:avLst/>
+          </a:prstGeom>
+          <a:solidFill>
+            <a:srgbClr val="000000"/>
+          </a:solidFill>
+          <a:ln/>
+        </p:spPr>
+      </p:sp>
+      <p:sp>
+        <p:nvSpPr>
+          <p:cNvPr id="116" name="Shape 113"/>
+          <p:cNvSpPr/>
+          <p:nvPr/>
+        </p:nvSpPr>
+        <p:spPr>
+          <a:xfrm>
+            <a:off x="2881744" y="3532347"/>
+            <a:ext cx="69241" cy="69241"/>
+          </a:xfrm>
+          <a:prstGeom prst="rect">
+            <a:avLst/>
+          </a:prstGeom>
+          <a:solidFill>
+            <a:srgbClr val="000000"/>
+          </a:solidFill>
+          <a:ln/>
+        </p:spPr>
+      </p:sp>
+      <p:sp>
+        <p:nvSpPr>
+          <p:cNvPr id="117" name="Shape 114"/>
+          <p:cNvSpPr/>
+          <p:nvPr/>
+        </p:nvSpPr>
+        <p:spPr>
+          <a:xfrm>
+            <a:off x="3020227" y="3532347"/>
+            <a:ext cx="69241" cy="69241"/>
+          </a:xfrm>
+          <a:prstGeom prst="rect">
+            <a:avLst/>
+          </a:prstGeom>
+          <a:solidFill>
+            <a:srgbClr val="000000"/>
+          </a:solidFill>
+          <a:ln/>
+        </p:spPr>
+      </p:sp>
+      <p:sp>
+        <p:nvSpPr>
+          <p:cNvPr id="118" name="Shape 115"/>
+          <p:cNvSpPr/>
+          <p:nvPr/>
+        </p:nvSpPr>
+        <p:spPr>
+          <a:xfrm>
+            <a:off x="3158710" y="3532347"/>
+            <a:ext cx="69241" cy="69241"/>
+          </a:xfrm>
+          <a:prstGeom prst="rect">
+            <a:avLst/>
+          </a:prstGeom>
+          <a:solidFill>
+            <a:srgbClr val="000000"/>
+          </a:solidFill>
+          <a:ln/>
+        </p:spPr>
+      </p:sp>
+      <p:sp>
+        <p:nvSpPr>
+          <p:cNvPr id="119" name="Shape 116"/>
+          <p:cNvSpPr/>
+          <p:nvPr/>
+        </p:nvSpPr>
+        <p:spPr>
+          <a:xfrm>
+            <a:off x="3366434" y="3532347"/>
+            <a:ext cx="69241" cy="69241"/>
+          </a:xfrm>
+          <a:prstGeom prst="rect">
+            <a:avLst/>
+          </a:prstGeom>
+          <a:solidFill>
+            <a:srgbClr val="000000"/>
+          </a:solidFill>
+          <a:ln/>
+        </p:spPr>
+      </p:sp>
+      <p:sp>
+        <p:nvSpPr>
+          <p:cNvPr id="120" name="Shape 117"/>
+          <p:cNvSpPr/>
+          <p:nvPr/>
+        </p:nvSpPr>
+        <p:spPr>
+          <a:xfrm>
+            <a:off x="3781883" y="3532347"/>
+            <a:ext cx="69241" cy="69241"/>
+          </a:xfrm>
+          <a:prstGeom prst="rect">
+            <a:avLst/>
+          </a:prstGeom>
+          <a:solidFill>
+            <a:srgbClr val="000000"/>
+          </a:solidFill>
+          <a:ln/>
+        </p:spPr>
+      </p:sp>
+      <p:sp>
+        <p:nvSpPr>
+          <p:cNvPr id="121" name="Shape 118"/>
+          <p:cNvSpPr/>
+          <p:nvPr/>
+        </p:nvSpPr>
+        <p:spPr>
+          <a:xfrm>
+            <a:off x="3920366" y="3532347"/>
+            <a:ext cx="69241" cy="69241"/>
+          </a:xfrm>
+          <a:prstGeom prst="rect">
+            <a:avLst/>
+          </a:prstGeom>
+          <a:solidFill>
+            <a:srgbClr val="000000"/>
+          </a:solidFill>
+          <a:ln/>
+        </p:spPr>
+      </p:sp>
+      <p:sp>
+        <p:nvSpPr>
+          <p:cNvPr id="122" name="Shape 119"/>
+          <p:cNvSpPr/>
+          <p:nvPr/>
+        </p:nvSpPr>
+        <p:spPr>
+          <a:xfrm>
+            <a:off x="4197332" y="3532347"/>
+            <a:ext cx="207724" cy="69241"/>
+          </a:xfrm>
+          <a:prstGeom prst="rect">
+            <a:avLst/>
+          </a:prstGeom>
+          <a:solidFill>
+            <a:srgbClr val="000000"/>
+          </a:solidFill>
+          <a:ln/>
+        </p:spPr>
+      </p:sp>
+      <p:sp>
+        <p:nvSpPr>
+          <p:cNvPr id="123" name="Shape 120"/>
+          <p:cNvSpPr/>
+          <p:nvPr/>
+        </p:nvSpPr>
+        <p:spPr>
+          <a:xfrm>
+            <a:off x="2189329" y="3601588"/>
+            <a:ext cx="69241" cy="69241"/>
+          </a:xfrm>
+          <a:prstGeom prst="rect">
+            <a:avLst/>
+          </a:prstGeom>
+          <a:solidFill>
+            <a:srgbClr val="000000"/>
+          </a:solidFill>
+          <a:ln/>
+        </p:spPr>
+      </p:sp>
+      <p:sp>
+        <p:nvSpPr>
+          <p:cNvPr id="124" name="Shape 121"/>
+          <p:cNvSpPr/>
+          <p:nvPr/>
+        </p:nvSpPr>
+        <p:spPr>
+          <a:xfrm>
+            <a:off x="2327812" y="3601588"/>
+            <a:ext cx="346207" cy="69241"/>
+          </a:xfrm>
+          <a:prstGeom prst="rect">
+            <a:avLst/>
+          </a:prstGeom>
+          <a:solidFill>
+            <a:srgbClr val="000000"/>
+          </a:solidFill>
+          <a:ln/>
+        </p:spPr>
+      </p:sp>
+      <p:sp>
+        <p:nvSpPr>
+          <p:cNvPr id="125" name="Shape 122"/>
+          <p:cNvSpPr/>
+          <p:nvPr/>
+        </p:nvSpPr>
+        <p:spPr>
+          <a:xfrm>
+            <a:off x="2812502" y="3601588"/>
+            <a:ext cx="138483" cy="69241"/>
+          </a:xfrm>
+          <a:prstGeom prst="rect">
+            <a:avLst/>
+          </a:prstGeom>
+          <a:solidFill>
+            <a:srgbClr val="000000"/>
+          </a:solidFill>
+          <a:ln/>
+        </p:spPr>
+      </p:sp>
+      <p:sp>
+        <p:nvSpPr>
+          <p:cNvPr id="126" name="Shape 123"/>
+          <p:cNvSpPr/>
+          <p:nvPr/>
+        </p:nvSpPr>
+        <p:spPr>
+          <a:xfrm>
+            <a:off x="3020227" y="3601588"/>
+            <a:ext cx="415449" cy="69241"/>
+          </a:xfrm>
+          <a:prstGeom prst="rect">
+            <a:avLst/>
+          </a:prstGeom>
+          <a:solidFill>
+            <a:srgbClr val="000000"/>
+          </a:solidFill>
+          <a:ln/>
+        </p:spPr>
+      </p:sp>
+      <p:sp>
+        <p:nvSpPr>
+          <p:cNvPr id="127" name="Shape 124"/>
+          <p:cNvSpPr/>
+          <p:nvPr/>
+        </p:nvSpPr>
+        <p:spPr>
+          <a:xfrm>
+            <a:off x="3504917" y="3601588"/>
+            <a:ext cx="69241" cy="69241"/>
+          </a:xfrm>
+          <a:prstGeom prst="rect">
+            <a:avLst/>
+          </a:prstGeom>
+          <a:solidFill>
+            <a:srgbClr val="000000"/>
+          </a:solidFill>
+          <a:ln/>
+        </p:spPr>
+      </p:sp>
+      <p:sp>
+        <p:nvSpPr>
+          <p:cNvPr id="128" name="Shape 125"/>
+          <p:cNvSpPr/>
+          <p:nvPr/>
+        </p:nvSpPr>
+        <p:spPr>
+          <a:xfrm>
+            <a:off x="3643400" y="3601588"/>
+            <a:ext cx="69241" cy="69241"/>
+          </a:xfrm>
+          <a:prstGeom prst="rect">
+            <a:avLst/>
+          </a:prstGeom>
+          <a:solidFill>
+            <a:srgbClr val="000000"/>
+          </a:solidFill>
+          <a:ln/>
+        </p:spPr>
+      </p:sp>
+      <p:sp>
+        <p:nvSpPr>
+          <p:cNvPr id="129" name="Shape 126"/>
+          <p:cNvSpPr/>
+          <p:nvPr/>
+        </p:nvSpPr>
+        <p:spPr>
+          <a:xfrm>
+            <a:off x="3851125" y="3601588"/>
+            <a:ext cx="138483" cy="69241"/>
+          </a:xfrm>
+          <a:prstGeom prst="rect">
+            <a:avLst/>
+          </a:prstGeom>
+          <a:solidFill>
+            <a:srgbClr val="000000"/>
+          </a:solidFill>
+          <a:ln/>
+        </p:spPr>
+      </p:sp>
+      <p:sp>
+        <p:nvSpPr>
+          <p:cNvPr id="130" name="Shape 127"/>
+          <p:cNvSpPr/>
+          <p:nvPr/>
+        </p:nvSpPr>
+        <p:spPr>
+          <a:xfrm>
+            <a:off x="4128090" y="3601588"/>
+            <a:ext cx="207724" cy="69241"/>
+          </a:xfrm>
+          <a:prstGeom prst="rect">
+            <a:avLst/>
+          </a:prstGeom>
+          <a:solidFill>
+            <a:srgbClr val="000000"/>
+          </a:solidFill>
+          <a:ln/>
+        </p:spPr>
+      </p:sp>
+      <p:sp>
+        <p:nvSpPr>
+          <p:cNvPr id="131" name="Shape 128"/>
+          <p:cNvSpPr/>
+          <p:nvPr/>
+        </p:nvSpPr>
+        <p:spPr>
+          <a:xfrm>
+            <a:off x="2120088" y="3670829"/>
+            <a:ext cx="207724" cy="69241"/>
+          </a:xfrm>
+          <a:prstGeom prst="rect">
+            <a:avLst/>
+          </a:prstGeom>
+          <a:solidFill>
+            <a:srgbClr val="000000"/>
+          </a:solidFill>
+          <a:ln/>
+        </p:spPr>
+      </p:sp>
+      <p:sp>
+        <p:nvSpPr>
+          <p:cNvPr id="132" name="Shape 129"/>
+          <p:cNvSpPr/>
+          <p:nvPr/>
+        </p:nvSpPr>
+        <p:spPr>
+          <a:xfrm>
+            <a:off x="2397054" y="3670829"/>
+            <a:ext cx="69241" cy="69241"/>
+          </a:xfrm>
+          <a:prstGeom prst="rect">
+            <a:avLst/>
+          </a:prstGeom>
+          <a:solidFill>
+            <a:srgbClr val="000000"/>
+          </a:solidFill>
+          <a:ln/>
+        </p:spPr>
+      </p:sp>
+      <p:sp>
+        <p:nvSpPr>
+          <p:cNvPr id="133" name="Shape 130"/>
+          <p:cNvSpPr/>
+          <p:nvPr/>
+        </p:nvSpPr>
+        <p:spPr>
+          <a:xfrm>
+            <a:off x="2674019" y="3670829"/>
+            <a:ext cx="138483" cy="69241"/>
+          </a:xfrm>
+          <a:prstGeom prst="rect">
+            <a:avLst/>
+          </a:prstGeom>
+          <a:solidFill>
+            <a:srgbClr val="000000"/>
+          </a:solidFill>
+          <a:ln/>
+        </p:spPr>
+      </p:sp>
+      <p:sp>
+        <p:nvSpPr>
+          <p:cNvPr id="134" name="Shape 131"/>
+          <p:cNvSpPr/>
+          <p:nvPr/>
+        </p:nvSpPr>
+        <p:spPr>
+          <a:xfrm>
+            <a:off x="3158710" y="3670829"/>
+            <a:ext cx="69241" cy="69241"/>
+          </a:xfrm>
+          <a:prstGeom prst="rect">
+            <a:avLst/>
+          </a:prstGeom>
+          <a:solidFill>
+            <a:srgbClr val="000000"/>
+          </a:solidFill>
+          <a:ln/>
+        </p:spPr>
+      </p:sp>
+      <p:sp>
+        <p:nvSpPr>
+          <p:cNvPr id="135" name="Shape 132"/>
+          <p:cNvSpPr/>
+          <p:nvPr/>
+        </p:nvSpPr>
+        <p:spPr>
+          <a:xfrm>
+            <a:off x="3574159" y="3670829"/>
+            <a:ext cx="69241" cy="69241"/>
+          </a:xfrm>
+          <a:prstGeom prst="rect">
+            <a:avLst/>
+          </a:prstGeom>
+          <a:solidFill>
+            <a:srgbClr val="000000"/>
+          </a:solidFill>
+          <a:ln/>
+        </p:spPr>
+      </p:sp>
+      <p:sp>
+        <p:nvSpPr>
+          <p:cNvPr id="136" name="Shape 133"/>
+          <p:cNvSpPr/>
+          <p:nvPr/>
+        </p:nvSpPr>
+        <p:spPr>
+          <a:xfrm>
+            <a:off x="3712642" y="3670829"/>
+            <a:ext cx="69241" cy="69241"/>
+          </a:xfrm>
+          <a:prstGeom prst="rect">
+            <a:avLst/>
+          </a:prstGeom>
+          <a:solidFill>
+            <a:srgbClr val="000000"/>
+          </a:solidFill>
+          <a:ln/>
+        </p:spPr>
+      </p:sp>
+      <p:sp>
+        <p:nvSpPr>
+          <p:cNvPr id="137" name="Shape 134"/>
+          <p:cNvSpPr/>
+          <p:nvPr/>
+        </p:nvSpPr>
+        <p:spPr>
+          <a:xfrm>
+            <a:off x="3851125" y="3670829"/>
+            <a:ext cx="138483" cy="69241"/>
+          </a:xfrm>
+          <a:prstGeom prst="rect">
+            <a:avLst/>
+          </a:prstGeom>
+          <a:solidFill>
+            <a:srgbClr val="000000"/>
+          </a:solidFill>
+          <a:ln/>
+        </p:spPr>
+      </p:sp>
+      <p:sp>
+        <p:nvSpPr>
+          <p:cNvPr id="138" name="Shape 135"/>
+          <p:cNvSpPr/>
+          <p:nvPr/>
+        </p:nvSpPr>
+        <p:spPr>
+          <a:xfrm>
+            <a:off x="4058849" y="3670829"/>
+            <a:ext cx="207724" cy="69241"/>
+          </a:xfrm>
+          <a:prstGeom prst="rect">
+            <a:avLst/>
+          </a:prstGeom>
+          <a:solidFill>
+            <a:srgbClr val="000000"/>
+          </a:solidFill>
+          <a:ln/>
+        </p:spPr>
+      </p:sp>
+      <p:sp>
+        <p:nvSpPr>
+          <p:cNvPr id="139" name="Shape 136"/>
+          <p:cNvSpPr/>
+          <p:nvPr/>
+        </p:nvSpPr>
+        <p:spPr>
+          <a:xfrm>
+            <a:off x="2120088" y="3740071"/>
+            <a:ext cx="207724" cy="69241"/>
+          </a:xfrm>
+          <a:prstGeom prst="rect">
+            <a:avLst/>
+          </a:prstGeom>
+          <a:solidFill>
+            <a:srgbClr val="000000"/>
+          </a:solidFill>
+          <a:ln/>
+        </p:spPr>
+      </p:sp>
+      <p:sp>
+        <p:nvSpPr>
+          <p:cNvPr id="140" name="Shape 137"/>
+          <p:cNvSpPr/>
+          <p:nvPr/>
+        </p:nvSpPr>
+        <p:spPr>
+          <a:xfrm>
+            <a:off x="2397054" y="3740071"/>
+            <a:ext cx="69241" cy="69241"/>
+          </a:xfrm>
+          <a:prstGeom prst="rect">
+            <a:avLst/>
+          </a:prstGeom>
+          <a:solidFill>
+            <a:srgbClr val="000000"/>
+          </a:solidFill>
+          <a:ln/>
+        </p:spPr>
+      </p:sp>
+      <p:sp>
+        <p:nvSpPr>
+          <p:cNvPr id="141" name="Shape 138"/>
+          <p:cNvSpPr/>
+          <p:nvPr/>
+        </p:nvSpPr>
+        <p:spPr>
+          <a:xfrm>
+            <a:off x="2535537" y="3740071"/>
+            <a:ext cx="69241" cy="69241"/>
+          </a:xfrm>
+          <a:prstGeom prst="rect">
+            <a:avLst/>
+          </a:prstGeom>
+          <a:solidFill>
+            <a:srgbClr val="000000"/>
+          </a:solidFill>
+          <a:ln/>
+        </p:spPr>
+      </p:sp>
+      <p:sp>
+        <p:nvSpPr>
+          <p:cNvPr id="142" name="Shape 139"/>
+          <p:cNvSpPr/>
+          <p:nvPr/>
+        </p:nvSpPr>
+        <p:spPr>
+          <a:xfrm>
+            <a:off x="2674019" y="3740071"/>
+            <a:ext cx="69241" cy="69241"/>
+          </a:xfrm>
+          <a:prstGeom prst="rect">
+            <a:avLst/>
+          </a:prstGeom>
+          <a:solidFill>
+            <a:srgbClr val="000000"/>
+          </a:solidFill>
+          <a:ln/>
+        </p:spPr>
+      </p:sp>
+      <p:sp>
+        <p:nvSpPr>
+          <p:cNvPr id="143" name="Shape 140"/>
+          <p:cNvSpPr/>
+          <p:nvPr/>
+        </p:nvSpPr>
+        <p:spPr>
+          <a:xfrm>
+            <a:off x="2881744" y="3740071"/>
+            <a:ext cx="207724" cy="69241"/>
+          </a:xfrm>
+          <a:prstGeom prst="rect">
+            <a:avLst/>
+          </a:prstGeom>
+          <a:solidFill>
+            <a:srgbClr val="000000"/>
+          </a:solidFill>
+          <a:ln/>
+        </p:spPr>
+      </p:sp>
+      <p:sp>
+        <p:nvSpPr>
+          <p:cNvPr id="144" name="Shape 141"/>
+          <p:cNvSpPr/>
+          <p:nvPr/>
+        </p:nvSpPr>
+        <p:spPr>
+          <a:xfrm>
+            <a:off x="3158710" y="3740071"/>
+            <a:ext cx="69241" cy="69241"/>
+          </a:xfrm>
+          <a:prstGeom prst="rect">
+            <a:avLst/>
+          </a:prstGeom>
+          <a:solidFill>
+            <a:srgbClr val="000000"/>
+          </a:solidFill>
+          <a:ln/>
+        </p:spPr>
+      </p:sp>
+      <p:sp>
+        <p:nvSpPr>
+          <p:cNvPr id="145" name="Shape 142"/>
+          <p:cNvSpPr/>
+          <p:nvPr/>
+        </p:nvSpPr>
+        <p:spPr>
+          <a:xfrm>
+            <a:off x="3297193" y="3740071"/>
+            <a:ext cx="69241" cy="69241"/>
+          </a:xfrm>
+          <a:prstGeom prst="rect">
+            <a:avLst/>
+          </a:prstGeom>
+          <a:solidFill>
+            <a:srgbClr val="000000"/>
+          </a:solidFill>
+          <a:ln/>
+        </p:spPr>
+      </p:sp>
+      <p:sp>
+        <p:nvSpPr>
+          <p:cNvPr id="146" name="Shape 143"/>
+          <p:cNvSpPr/>
+          <p:nvPr/>
+        </p:nvSpPr>
+        <p:spPr>
+          <a:xfrm>
+            <a:off x="3504917" y="3740071"/>
+            <a:ext cx="69241" cy="69241"/>
+          </a:xfrm>
+          <a:prstGeom prst="rect">
+            <a:avLst/>
+          </a:prstGeom>
+          <a:solidFill>
+            <a:srgbClr val="000000"/>
+          </a:solidFill>
+          <a:ln/>
+        </p:spPr>
+      </p:sp>
+      <p:sp>
+        <p:nvSpPr>
+          <p:cNvPr id="147" name="Shape 144"/>
+          <p:cNvSpPr/>
+          <p:nvPr/>
+        </p:nvSpPr>
+        <p:spPr>
+          <a:xfrm>
+            <a:off x="3643400" y="3740071"/>
+            <a:ext cx="276966" cy="69241"/>
+          </a:xfrm>
+          <a:prstGeom prst="rect">
+            <a:avLst/>
+          </a:prstGeom>
+          <a:solidFill>
+            <a:srgbClr val="000000"/>
+          </a:solidFill>
+          <a:ln/>
+        </p:spPr>
+      </p:sp>
+      <p:sp>
+        <p:nvSpPr>
+          <p:cNvPr id="148" name="Shape 145"/>
+          <p:cNvSpPr/>
+          <p:nvPr/>
+        </p:nvSpPr>
+        <p:spPr>
+          <a:xfrm>
+            <a:off x="3989608" y="3740071"/>
+            <a:ext cx="138483" cy="69241"/>
+          </a:xfrm>
+          <a:prstGeom prst="rect">
+            <a:avLst/>
+          </a:prstGeom>
+          <a:solidFill>
+            <a:srgbClr val="000000"/>
+          </a:solidFill>
+          <a:ln/>
+        </p:spPr>
+      </p:sp>
+      <p:sp>
+        <p:nvSpPr>
+          <p:cNvPr id="149" name="Shape 146"/>
+          <p:cNvSpPr/>
+          <p:nvPr/>
+        </p:nvSpPr>
+        <p:spPr>
+          <a:xfrm>
+            <a:off x="4335815" y="3740071"/>
+            <a:ext cx="69241" cy="69241"/>
+          </a:xfrm>
+          <a:prstGeom prst="rect">
+            <a:avLst/>
+          </a:prstGeom>
+          <a:solidFill>
+            <a:srgbClr val="000000"/>
+          </a:solidFill>
+          <a:ln/>
+        </p:spPr>
+      </p:sp>
+      <p:sp>
+        <p:nvSpPr>
+          <p:cNvPr id="150" name="Shape 147"/>
+          <p:cNvSpPr/>
+          <p:nvPr/>
+        </p:nvSpPr>
+        <p:spPr>
+          <a:xfrm>
+            <a:off x="2120088" y="3809312"/>
+            <a:ext cx="276966" cy="69241"/>
+          </a:xfrm>
+          <a:prstGeom prst="rect">
+            <a:avLst/>
+          </a:prstGeom>
+          <a:solidFill>
+            <a:srgbClr val="000000"/>
+          </a:solidFill>
+          <a:ln/>
+        </p:spPr>
+      </p:sp>
+      <p:sp>
+        <p:nvSpPr>
+          <p:cNvPr id="151" name="Shape 148"/>
+          <p:cNvSpPr/>
+          <p:nvPr/>
+        </p:nvSpPr>
+        <p:spPr>
+          <a:xfrm>
+            <a:off x="2466295" y="3809312"/>
+            <a:ext cx="69241" cy="69241"/>
+          </a:xfrm>
+          <a:prstGeom prst="rect">
+            <a:avLst/>
+          </a:prstGeom>
+          <a:solidFill>
+            <a:srgbClr val="000000"/>
+          </a:solidFill>
+          <a:ln/>
+        </p:spPr>
+      </p:sp>
+      <p:sp>
+        <p:nvSpPr>
+          <p:cNvPr id="152" name="Shape 149"/>
+          <p:cNvSpPr/>
+          <p:nvPr/>
+        </p:nvSpPr>
+        <p:spPr>
+          <a:xfrm>
+            <a:off x="2674019" y="3809312"/>
+            <a:ext cx="138483" cy="69241"/>
+          </a:xfrm>
+          <a:prstGeom prst="rect">
+            <a:avLst/>
+          </a:prstGeom>
+          <a:solidFill>
+            <a:srgbClr val="000000"/>
+          </a:solidFill>
+          <a:ln/>
+        </p:spPr>
+      </p:sp>
+      <p:sp>
+        <p:nvSpPr>
+          <p:cNvPr id="153" name="Shape 150"/>
+          <p:cNvSpPr/>
+          <p:nvPr/>
+        </p:nvSpPr>
+        <p:spPr>
+          <a:xfrm>
+            <a:off x="2950985" y="3809312"/>
+            <a:ext cx="69241" cy="69241"/>
+          </a:xfrm>
+          <a:prstGeom prst="rect">
+            <a:avLst/>
+          </a:prstGeom>
+          <a:solidFill>
+            <a:srgbClr val="000000"/>
+          </a:solidFill>
+          <a:ln/>
+        </p:spPr>
+      </p:sp>
+      <p:sp>
+        <p:nvSpPr>
+          <p:cNvPr id="154" name="Shape 151"/>
+          <p:cNvSpPr/>
+          <p:nvPr/>
+        </p:nvSpPr>
+        <p:spPr>
+          <a:xfrm>
+            <a:off x="3227951" y="3809312"/>
+            <a:ext cx="69241" cy="69241"/>
+          </a:xfrm>
+          <a:prstGeom prst="rect">
+            <a:avLst/>
+          </a:prstGeom>
+          <a:solidFill>
+            <a:srgbClr val="000000"/>
+          </a:solidFill>
+          <a:ln/>
+        </p:spPr>
+      </p:sp>
+      <p:sp>
+        <p:nvSpPr>
+          <p:cNvPr id="155" name="Shape 152"/>
+          <p:cNvSpPr/>
+          <p:nvPr/>
+        </p:nvSpPr>
+        <p:spPr>
+          <a:xfrm>
+            <a:off x="3366434" y="3809312"/>
+            <a:ext cx="276966" cy="69241"/>
+          </a:xfrm>
+          <a:prstGeom prst="rect">
+            <a:avLst/>
+          </a:prstGeom>
+          <a:solidFill>
+            <a:srgbClr val="000000"/>
+          </a:solidFill>
+          <a:ln/>
+        </p:spPr>
+      </p:sp>
+      <p:sp>
+        <p:nvSpPr>
+          <p:cNvPr id="156" name="Shape 153"/>
+          <p:cNvSpPr/>
+          <p:nvPr/>
+        </p:nvSpPr>
+        <p:spPr>
+          <a:xfrm>
+            <a:off x="3712642" y="3809312"/>
+            <a:ext cx="69241" cy="69241"/>
+          </a:xfrm>
+          <a:prstGeom prst="rect">
+            <a:avLst/>
+          </a:prstGeom>
+          <a:solidFill>
+            <a:srgbClr val="000000"/>
+          </a:solidFill>
+          <a:ln/>
+        </p:spPr>
+      </p:sp>
+      <p:sp>
+        <p:nvSpPr>
+          <p:cNvPr id="157" name="Shape 154"/>
+          <p:cNvSpPr/>
+          <p:nvPr/>
+        </p:nvSpPr>
+        <p:spPr>
+          <a:xfrm>
+            <a:off x="3920366" y="3809312"/>
+            <a:ext cx="138483" cy="69241"/>
+          </a:xfrm>
+          <a:prstGeom prst="rect">
+            <a:avLst/>
+          </a:prstGeom>
+          <a:solidFill>
+            <a:srgbClr val="000000"/>
+          </a:solidFill>
+          <a:ln/>
+        </p:spPr>
+      </p:sp>
+      <p:sp>
+        <p:nvSpPr>
+          <p:cNvPr id="158" name="Shape 155"/>
+          <p:cNvSpPr/>
+          <p:nvPr/>
+        </p:nvSpPr>
+        <p:spPr>
+          <a:xfrm>
+            <a:off x="4128090" y="3809312"/>
+            <a:ext cx="276966" cy="69241"/>
+          </a:xfrm>
+          <a:prstGeom prst="rect">
+            <a:avLst/>
+          </a:prstGeom>
+          <a:solidFill>
+            <a:srgbClr val="000000"/>
+          </a:solidFill>
+          <a:ln/>
+        </p:spPr>
+      </p:sp>
+      <p:sp>
+        <p:nvSpPr>
+          <p:cNvPr id="159" name="Shape 156"/>
+          <p:cNvSpPr/>
+          <p:nvPr/>
+        </p:nvSpPr>
+        <p:spPr>
+          <a:xfrm>
+            <a:off x="2189329" y="3878554"/>
+            <a:ext cx="415449" cy="69241"/>
+          </a:xfrm>
+          <a:prstGeom prst="rect">
+            <a:avLst/>
+          </a:prstGeom>
+          <a:solidFill>
+            <a:srgbClr val="000000"/>
+          </a:solidFill>
+          <a:ln/>
+        </p:spPr>
+      </p:sp>
+      <p:sp>
+        <p:nvSpPr>
+          <p:cNvPr id="160" name="Shape 157"/>
+          <p:cNvSpPr/>
+          <p:nvPr/>
+        </p:nvSpPr>
+        <p:spPr>
+          <a:xfrm>
+            <a:off x="2674019" y="3878554"/>
+            <a:ext cx="138483" cy="69241"/>
+          </a:xfrm>
+          <a:prstGeom prst="rect">
+            <a:avLst/>
+          </a:prstGeom>
+          <a:solidFill>
+            <a:srgbClr val="000000"/>
+          </a:solidFill>
+          <a:ln/>
+        </p:spPr>
+      </p:sp>
+      <p:sp>
+        <p:nvSpPr>
+          <p:cNvPr id="161" name="Shape 158"/>
+          <p:cNvSpPr/>
+          <p:nvPr/>
+        </p:nvSpPr>
+        <p:spPr>
+          <a:xfrm>
+            <a:off x="2881744" y="3878554"/>
+            <a:ext cx="69241" cy="69241"/>
+          </a:xfrm>
+          <a:prstGeom prst="rect">
+            <a:avLst/>
+          </a:prstGeom>
+          <a:solidFill>
+            <a:srgbClr val="000000"/>
+          </a:solidFill>
+          <a:ln/>
+        </p:spPr>
+      </p:sp>
+      <p:sp>
+        <p:nvSpPr>
+          <p:cNvPr id="162" name="Shape 159"/>
+          <p:cNvSpPr/>
+          <p:nvPr/>
+        </p:nvSpPr>
+        <p:spPr>
+          <a:xfrm>
+            <a:off x="3020227" y="3878554"/>
+            <a:ext cx="69241" cy="69241"/>
+          </a:xfrm>
+          <a:prstGeom prst="rect">
+            <a:avLst/>
+          </a:prstGeom>
+          <a:solidFill>
+            <a:srgbClr val="000000"/>
+          </a:solidFill>
+          <a:ln/>
+        </p:spPr>
+      </p:sp>
+      <p:sp>
+        <p:nvSpPr>
+          <p:cNvPr id="163" name="Shape 160"/>
+          <p:cNvSpPr/>
+          <p:nvPr/>
+        </p:nvSpPr>
+        <p:spPr>
+          <a:xfrm>
+            <a:off x="3158710" y="3878554"/>
+            <a:ext cx="69241" cy="69241"/>
+          </a:xfrm>
+          <a:prstGeom prst="rect">
+            <a:avLst/>
+          </a:prstGeom>
+          <a:solidFill>
+            <a:srgbClr val="000000"/>
+          </a:solidFill>
+          <a:ln/>
+        </p:spPr>
+      </p:sp>
+      <p:sp>
+        <p:nvSpPr>
+          <p:cNvPr id="164" name="Shape 161"/>
+          <p:cNvSpPr/>
+          <p:nvPr/>
+        </p:nvSpPr>
+        <p:spPr>
+          <a:xfrm>
+            <a:off x="3366434" y="3878554"/>
+            <a:ext cx="69241" cy="69241"/>
+          </a:xfrm>
+          <a:prstGeom prst="rect">
+            <a:avLst/>
+          </a:prstGeom>
+          <a:solidFill>
+            <a:srgbClr val="000000"/>
+          </a:solidFill>
+          <a:ln/>
+        </p:spPr>
+      </p:sp>
+      <p:sp>
+        <p:nvSpPr>
+          <p:cNvPr id="165" name="Shape 162"/>
+          <p:cNvSpPr/>
+          <p:nvPr/>
+        </p:nvSpPr>
+        <p:spPr>
+          <a:xfrm>
+            <a:off x="3504917" y="3878554"/>
+            <a:ext cx="138483" cy="69241"/>
+          </a:xfrm>
+          <a:prstGeom prst="rect">
+            <a:avLst/>
+          </a:prstGeom>
+          <a:solidFill>
+            <a:srgbClr val="000000"/>
+          </a:solidFill>
+          <a:ln/>
+        </p:spPr>
+      </p:sp>
+      <p:sp>
+        <p:nvSpPr>
+          <p:cNvPr id="166" name="Shape 163"/>
+          <p:cNvSpPr/>
+          <p:nvPr/>
+        </p:nvSpPr>
+        <p:spPr>
+          <a:xfrm>
+            <a:off x="3781883" y="3878554"/>
+            <a:ext cx="138483" cy="69241"/>
+          </a:xfrm>
+          <a:prstGeom prst="rect">
+            <a:avLst/>
+          </a:prstGeom>
+          <a:solidFill>
+            <a:srgbClr val="000000"/>
+          </a:solidFill>
+          <a:ln/>
+        </p:spPr>
+      </p:sp>
+      <p:sp>
+        <p:nvSpPr>
+          <p:cNvPr id="167" name="Shape 164"/>
+          <p:cNvSpPr/>
+          <p:nvPr/>
+        </p:nvSpPr>
+        <p:spPr>
+          <a:xfrm>
+            <a:off x="3989608" y="3878554"/>
+            <a:ext cx="138483" cy="69241"/>
+          </a:xfrm>
+          <a:prstGeom prst="rect">
+            <a:avLst/>
+          </a:prstGeom>
+          <a:solidFill>
+            <a:srgbClr val="000000"/>
+          </a:solidFill>
+          <a:ln/>
+        </p:spPr>
+      </p:sp>
+      <p:sp>
+        <p:nvSpPr>
+          <p:cNvPr id="168" name="Shape 165"/>
+          <p:cNvSpPr/>
+          <p:nvPr/>
+        </p:nvSpPr>
+        <p:spPr>
+          <a:xfrm>
+            <a:off x="4197332" y="3878554"/>
+            <a:ext cx="138483" cy="69241"/>
+          </a:xfrm>
+          <a:prstGeom prst="rect">
+            <a:avLst/>
+          </a:prstGeom>
+          <a:solidFill>
+            <a:srgbClr val="000000"/>
+          </a:solidFill>
+          <a:ln/>
+        </p:spPr>
+      </p:sp>
+      <p:sp>
+        <p:nvSpPr>
+          <p:cNvPr id="169" name="Shape 166"/>
+          <p:cNvSpPr/>
+          <p:nvPr/>
+        </p:nvSpPr>
+        <p:spPr>
+          <a:xfrm>
+            <a:off x="2120088" y="3947795"/>
+            <a:ext cx="69241" cy="69241"/>
+          </a:xfrm>
+          <a:prstGeom prst="rect">
+            <a:avLst/>
+          </a:prstGeom>
+          <a:solidFill>
+            <a:srgbClr val="000000"/>
+          </a:solidFill>
+          <a:ln/>
+        </p:spPr>
+      </p:sp>
+      <p:sp>
+        <p:nvSpPr>
+          <p:cNvPr id="170" name="Shape 167"/>
+          <p:cNvSpPr/>
+          <p:nvPr/>
+        </p:nvSpPr>
+        <p:spPr>
+          <a:xfrm>
+            <a:off x="2258571" y="3947795"/>
+            <a:ext cx="207724" cy="69241"/>
+          </a:xfrm>
+          <a:prstGeom prst="rect">
+            <a:avLst/>
+          </a:prstGeom>
+          <a:solidFill>
+            <a:srgbClr val="000000"/>
+          </a:solidFill>
+          <a:ln/>
+        </p:spPr>
+      </p:sp>
+      <p:sp>
+        <p:nvSpPr>
+          <p:cNvPr id="171" name="Shape 168"/>
+          <p:cNvSpPr/>
+          <p:nvPr/>
+        </p:nvSpPr>
+        <p:spPr>
+          <a:xfrm>
+            <a:off x="2604778" y="3947795"/>
+            <a:ext cx="276966" cy="69241"/>
+          </a:xfrm>
+          <a:prstGeom prst="rect">
+            <a:avLst/>
+          </a:prstGeom>
+          <a:solidFill>
+            <a:srgbClr val="000000"/>
+          </a:solidFill>
+          <a:ln/>
+        </p:spPr>
+      </p:sp>
+      <p:sp>
+        <p:nvSpPr>
+          <p:cNvPr id="172" name="Shape 169"/>
+          <p:cNvSpPr/>
+          <p:nvPr/>
+        </p:nvSpPr>
+        <p:spPr>
+          <a:xfrm>
+            <a:off x="3158710" y="3947795"/>
+            <a:ext cx="138483" cy="69241"/>
+          </a:xfrm>
+          <a:prstGeom prst="rect">
+            <a:avLst/>
+          </a:prstGeom>
+          <a:solidFill>
+            <a:srgbClr val="000000"/>
+          </a:solidFill>
+          <a:ln/>
+        </p:spPr>
+      </p:sp>
+      <p:sp>
+        <p:nvSpPr>
+          <p:cNvPr id="173" name="Shape 170"/>
+          <p:cNvSpPr/>
+          <p:nvPr/>
+        </p:nvSpPr>
+        <p:spPr>
+          <a:xfrm>
+            <a:off x="3435676" y="3947795"/>
+            <a:ext cx="276966" cy="69241"/>
+          </a:xfrm>
+          <a:prstGeom prst="rect">
+            <a:avLst/>
+          </a:prstGeom>
+          <a:solidFill>
+            <a:srgbClr val="000000"/>
+          </a:solidFill>
+          <a:ln/>
+        </p:spPr>
+      </p:sp>
+      <p:sp>
+        <p:nvSpPr>
+          <p:cNvPr id="174" name="Shape 171"/>
+          <p:cNvSpPr/>
+          <p:nvPr/>
+        </p:nvSpPr>
+        <p:spPr>
+          <a:xfrm>
+            <a:off x="3989608" y="3947795"/>
+            <a:ext cx="276966" cy="69241"/>
+          </a:xfrm>
+          <a:prstGeom prst="rect">
+            <a:avLst/>
+          </a:prstGeom>
+          <a:solidFill>
+            <a:srgbClr val="000000"/>
+          </a:solidFill>
+          <a:ln/>
+        </p:spPr>
+      </p:sp>
+      <p:sp>
+        <p:nvSpPr>
+          <p:cNvPr id="175" name="Shape 172"/>
+          <p:cNvSpPr/>
+          <p:nvPr/>
+        </p:nvSpPr>
+        <p:spPr>
+          <a:xfrm>
+            <a:off x="4335815" y="3947795"/>
+            <a:ext cx="69241" cy="69241"/>
+          </a:xfrm>
+          <a:prstGeom prst="rect">
+            <a:avLst/>
+          </a:prstGeom>
+          <a:solidFill>
+            <a:srgbClr val="000000"/>
+          </a:solidFill>
+          <a:ln/>
+        </p:spPr>
+      </p:sp>
+      <p:sp>
+        <p:nvSpPr>
+          <p:cNvPr id="176" name="Shape 173"/>
+          <p:cNvSpPr/>
+          <p:nvPr/>
+        </p:nvSpPr>
+        <p:spPr>
+          <a:xfrm>
+            <a:off x="2120088" y="4017037"/>
+            <a:ext cx="138483" cy="69241"/>
+          </a:xfrm>
+          <a:prstGeom prst="rect">
+            <a:avLst/>
+          </a:prstGeom>
+          <a:solidFill>
+            <a:srgbClr val="000000"/>
+          </a:solidFill>
+          <a:ln/>
+        </p:spPr>
+      </p:sp>
+      <p:sp>
+        <p:nvSpPr>
+          <p:cNvPr id="177" name="Shape 174"/>
+          <p:cNvSpPr/>
+          <p:nvPr/>
+        </p:nvSpPr>
+        <p:spPr>
+          <a:xfrm>
+            <a:off x="2535537" y="4017037"/>
+            <a:ext cx="69241" cy="69241"/>
+          </a:xfrm>
+          <a:prstGeom prst="rect">
+            <a:avLst/>
+          </a:prstGeom>
+          <a:solidFill>
+            <a:srgbClr val="000000"/>
+          </a:solidFill>
+          <a:ln/>
+        </p:spPr>
+      </p:sp>
+      <p:sp>
+        <p:nvSpPr>
+          <p:cNvPr id="178" name="Shape 175"/>
+          <p:cNvSpPr/>
+          <p:nvPr/>
+        </p:nvSpPr>
+        <p:spPr>
+          <a:xfrm>
+            <a:off x="2674019" y="4017037"/>
+            <a:ext cx="138483" cy="69241"/>
+          </a:xfrm>
+          <a:prstGeom prst="rect">
+            <a:avLst/>
+          </a:prstGeom>
+          <a:solidFill>
+            <a:srgbClr val="000000"/>
+          </a:solidFill>
+          <a:ln/>
+        </p:spPr>
+      </p:sp>
+      <p:sp>
+        <p:nvSpPr>
+          <p:cNvPr id="179" name="Shape 176"/>
+          <p:cNvSpPr/>
+          <p:nvPr/>
+        </p:nvSpPr>
+        <p:spPr>
+          <a:xfrm>
+            <a:off x="2881744" y="4017037"/>
+            <a:ext cx="69241" cy="69241"/>
+          </a:xfrm>
+          <a:prstGeom prst="rect">
+            <a:avLst/>
+          </a:prstGeom>
+          <a:solidFill>
+            <a:srgbClr val="000000"/>
+          </a:solidFill>
+          <a:ln/>
+        </p:spPr>
+      </p:sp>
+      <p:sp>
+        <p:nvSpPr>
+          <p:cNvPr id="180" name="Shape 177"/>
+          <p:cNvSpPr/>
+          <p:nvPr/>
+        </p:nvSpPr>
+        <p:spPr>
+          <a:xfrm>
+            <a:off x="3020227" y="4017037"/>
+            <a:ext cx="207724" cy="69241"/>
+          </a:xfrm>
+          <a:prstGeom prst="rect">
+            <a:avLst/>
+          </a:prstGeom>
+          <a:solidFill>
+            <a:srgbClr val="000000"/>
+          </a:solidFill>
+          <a:ln/>
+        </p:spPr>
+      </p:sp>
+      <p:sp>
+        <p:nvSpPr>
+          <p:cNvPr id="181" name="Shape 178"/>
+          <p:cNvSpPr/>
+          <p:nvPr/>
+        </p:nvSpPr>
+        <p:spPr>
+          <a:xfrm>
+            <a:off x="3366434" y="4017037"/>
+            <a:ext cx="138483" cy="69241"/>
+          </a:xfrm>
+          <a:prstGeom prst="rect">
+            <a:avLst/>
+          </a:prstGeom>
+          <a:solidFill>
+            <a:srgbClr val="000000"/>
+          </a:solidFill>
+          <a:ln/>
+        </p:spPr>
+      </p:sp>
+      <p:sp>
+        <p:nvSpPr>
+          <p:cNvPr id="182" name="Shape 179"/>
+          <p:cNvSpPr/>
+          <p:nvPr/>
+        </p:nvSpPr>
+        <p:spPr>
+          <a:xfrm>
+            <a:off x="3574159" y="4017037"/>
+            <a:ext cx="69241" cy="69241"/>
+          </a:xfrm>
+          <a:prstGeom prst="rect">
+            <a:avLst/>
+          </a:prstGeom>
+          <a:solidFill>
+            <a:srgbClr val="000000"/>
+          </a:solidFill>
+          <a:ln/>
+        </p:spPr>
+      </p:sp>
+      <p:sp>
+        <p:nvSpPr>
+          <p:cNvPr id="183" name="Shape 180"/>
+          <p:cNvSpPr/>
+          <p:nvPr/>
+        </p:nvSpPr>
+        <p:spPr>
+          <a:xfrm>
+            <a:off x="3781883" y="4017037"/>
+            <a:ext cx="138483" cy="69241"/>
+          </a:xfrm>
+          <a:prstGeom prst="rect">
+            <a:avLst/>
+          </a:prstGeom>
+          <a:solidFill>
+            <a:srgbClr val="000000"/>
+          </a:solidFill>
+          <a:ln/>
+        </p:spPr>
+      </p:sp>
+      <p:sp>
+        <p:nvSpPr>
+          <p:cNvPr id="184" name="Shape 181"/>
+          <p:cNvSpPr/>
+          <p:nvPr/>
+        </p:nvSpPr>
+        <p:spPr>
+          <a:xfrm>
+            <a:off x="3989608" y="4017037"/>
+            <a:ext cx="207724" cy="69241"/>
+          </a:xfrm>
+          <a:prstGeom prst="rect">
+            <a:avLst/>
+          </a:prstGeom>
+          <a:solidFill>
+            <a:srgbClr val="000000"/>
+          </a:solidFill>
+          <a:ln/>
+        </p:spPr>
+      </p:sp>
+      <p:sp>
+        <p:nvSpPr>
+          <p:cNvPr id="185" name="Shape 182"/>
+          <p:cNvSpPr/>
+          <p:nvPr/>
+        </p:nvSpPr>
+        <p:spPr>
+          <a:xfrm>
+            <a:off x="2120088" y="4086278"/>
+            <a:ext cx="138483" cy="69241"/>
+          </a:xfrm>
+          <a:prstGeom prst="rect">
+            <a:avLst/>
+          </a:prstGeom>
+          <a:solidFill>
+            <a:srgbClr val="000000"/>
+          </a:solidFill>
+          <a:ln/>
+        </p:spPr>
+      </p:sp>
+      <p:sp>
+        <p:nvSpPr>
+          <p:cNvPr id="186" name="Shape 183"/>
+          <p:cNvSpPr/>
+          <p:nvPr/>
+        </p:nvSpPr>
+        <p:spPr>
+          <a:xfrm>
+            <a:off x="2397054" y="4086278"/>
+            <a:ext cx="69241" cy="69241"/>
+          </a:xfrm>
+          <a:prstGeom prst="rect">
+            <a:avLst/>
+          </a:prstGeom>
+          <a:solidFill>
+            <a:srgbClr val="000000"/>
+          </a:solidFill>
+          <a:ln/>
+        </p:spPr>
+      </p:sp>
+      <p:sp>
+        <p:nvSpPr>
+          <p:cNvPr id="187" name="Shape 184"/>
+          <p:cNvSpPr/>
+          <p:nvPr/>
+        </p:nvSpPr>
+        <p:spPr>
+          <a:xfrm>
+            <a:off x="2881744" y="4086278"/>
+            <a:ext cx="69241" cy="69241"/>
+          </a:xfrm>
+          <a:prstGeom prst="rect">
+            <a:avLst/>
+          </a:prstGeom>
+          <a:solidFill>
+            <a:srgbClr val="000000"/>
+          </a:solidFill>
+          <a:ln/>
+        </p:spPr>
+      </p:sp>
+      <p:sp>
+        <p:nvSpPr>
+          <p:cNvPr id="188" name="Shape 185"/>
+          <p:cNvSpPr/>
+          <p:nvPr/>
+        </p:nvSpPr>
+        <p:spPr>
+          <a:xfrm>
+            <a:off x="3158710" y="4086278"/>
+            <a:ext cx="138483" cy="69241"/>
+          </a:xfrm>
+          <a:prstGeom prst="rect">
+            <a:avLst/>
+          </a:prstGeom>
+          <a:solidFill>
+            <a:srgbClr val="000000"/>
+          </a:solidFill>
+          <a:ln/>
+        </p:spPr>
+      </p:sp>
+      <p:sp>
+        <p:nvSpPr>
+          <p:cNvPr id="189" name="Shape 186"/>
+          <p:cNvSpPr/>
+          <p:nvPr/>
+        </p:nvSpPr>
+        <p:spPr>
+          <a:xfrm>
+            <a:off x="3504917" y="4086278"/>
+            <a:ext cx="276966" cy="69241"/>
+          </a:xfrm>
+          <a:prstGeom prst="rect">
+            <a:avLst/>
+          </a:prstGeom>
+          <a:solidFill>
+            <a:srgbClr val="000000"/>
+          </a:solidFill>
+          <a:ln/>
+        </p:spPr>
+      </p:sp>
+      <p:sp>
+        <p:nvSpPr>
+          <p:cNvPr id="190" name="Shape 187"/>
+          <p:cNvSpPr/>
+          <p:nvPr/>
+        </p:nvSpPr>
+        <p:spPr>
+          <a:xfrm>
+            <a:off x="3920366" y="4086278"/>
+            <a:ext cx="69241" cy="69241"/>
+          </a:xfrm>
+          <a:prstGeom prst="rect">
+            <a:avLst/>
+          </a:prstGeom>
+          <a:solidFill>
+            <a:srgbClr val="000000"/>
+          </a:solidFill>
+          <a:ln/>
+        </p:spPr>
+      </p:sp>
+      <p:sp>
+        <p:nvSpPr>
+          <p:cNvPr id="191" name="Shape 188"/>
+          <p:cNvSpPr/>
+          <p:nvPr/>
+        </p:nvSpPr>
+        <p:spPr>
+          <a:xfrm>
+            <a:off x="4128090" y="4086278"/>
+            <a:ext cx="138483" cy="69241"/>
+          </a:xfrm>
+          <a:prstGeom prst="rect">
+            <a:avLst/>
+          </a:prstGeom>
+          <a:solidFill>
+            <a:srgbClr val="000000"/>
+          </a:solidFill>
+          <a:ln/>
+        </p:spPr>
+      </p:sp>
+      <p:sp>
+        <p:nvSpPr>
+          <p:cNvPr id="192" name="Shape 189"/>
+          <p:cNvSpPr/>
+          <p:nvPr/>
+        </p:nvSpPr>
+        <p:spPr>
+          <a:xfrm>
+            <a:off x="4335815" y="4086278"/>
+            <a:ext cx="69241" cy="69241"/>
+          </a:xfrm>
+          <a:prstGeom prst="rect">
+            <a:avLst/>
+          </a:prstGeom>
+          <a:solidFill>
+            <a:srgbClr val="000000"/>
+          </a:solidFill>
+          <a:ln/>
+        </p:spPr>
+      </p:sp>
+      <p:sp>
+        <p:nvSpPr>
+          <p:cNvPr id="193" name="Shape 190"/>
+          <p:cNvSpPr/>
+          <p:nvPr/>
+        </p:nvSpPr>
+        <p:spPr>
+          <a:xfrm>
+            <a:off x="2120088" y="4155520"/>
+            <a:ext cx="69241" cy="69241"/>
+          </a:xfrm>
+          <a:prstGeom prst="rect">
+            <a:avLst/>
+          </a:prstGeom>
+          <a:solidFill>
+            <a:srgbClr val="000000"/>
+          </a:solidFill>
+          <a:ln/>
+        </p:spPr>
+      </p:sp>
+      <p:sp>
+        <p:nvSpPr>
+          <p:cNvPr id="194" name="Shape 191"/>
+          <p:cNvSpPr/>
+          <p:nvPr/>
+        </p:nvSpPr>
+        <p:spPr>
+          <a:xfrm>
+            <a:off x="2258571" y="4155520"/>
+            <a:ext cx="207724" cy="69241"/>
+          </a:xfrm>
+          <a:prstGeom prst="rect">
+            <a:avLst/>
+          </a:prstGeom>
+          <a:solidFill>
+            <a:srgbClr val="000000"/>
+          </a:solidFill>
+          <a:ln/>
+        </p:spPr>
+      </p:sp>
+      <p:sp>
+        <p:nvSpPr>
+          <p:cNvPr id="195" name="Shape 192"/>
+          <p:cNvSpPr/>
+          <p:nvPr/>
+        </p:nvSpPr>
+        <p:spPr>
+          <a:xfrm>
+            <a:off x="2535537" y="4155520"/>
+            <a:ext cx="138483" cy="69241"/>
+          </a:xfrm>
+          <a:prstGeom prst="rect">
+            <a:avLst/>
+          </a:prstGeom>
+          <a:solidFill>
+            <a:srgbClr val="000000"/>
+          </a:solidFill>
+          <a:ln/>
+        </p:spPr>
+      </p:sp>
+      <p:sp>
+        <p:nvSpPr>
+          <p:cNvPr id="196" name="Shape 193"/>
+          <p:cNvSpPr/>
+          <p:nvPr/>
+        </p:nvSpPr>
+        <p:spPr>
+          <a:xfrm>
+            <a:off x="2743261" y="4155520"/>
+            <a:ext cx="276966" cy="69241"/>
+          </a:xfrm>
+          <a:prstGeom prst="rect">
+            <a:avLst/>
+          </a:prstGeom>
+          <a:solidFill>
+            <a:srgbClr val="000000"/>
+          </a:solidFill>
+          <a:ln/>
+        </p:spPr>
+      </p:sp>
+      <p:sp>
+        <p:nvSpPr>
+          <p:cNvPr id="197" name="Shape 194"/>
+          <p:cNvSpPr/>
+          <p:nvPr/>
+        </p:nvSpPr>
+        <p:spPr>
+          <a:xfrm>
+            <a:off x="3089468" y="4155520"/>
+            <a:ext cx="69241" cy="69241"/>
+          </a:xfrm>
+          <a:prstGeom prst="rect">
+            <a:avLst/>
+          </a:prstGeom>
+          <a:solidFill>
+            <a:srgbClr val="000000"/>
+          </a:solidFill>
+          <a:ln/>
+        </p:spPr>
+      </p:sp>
+      <p:sp>
+        <p:nvSpPr>
+          <p:cNvPr id="198" name="Shape 195"/>
+          <p:cNvSpPr/>
+          <p:nvPr/>
+        </p:nvSpPr>
+        <p:spPr>
+          <a:xfrm>
+            <a:off x="3366434" y="4155520"/>
+            <a:ext cx="138483" cy="69241"/>
+          </a:xfrm>
+          <a:prstGeom prst="rect">
+            <a:avLst/>
+          </a:prstGeom>
+          <a:solidFill>
+            <a:srgbClr val="000000"/>
+          </a:solidFill>
+          <a:ln/>
+        </p:spPr>
+      </p:sp>
+      <p:sp>
+        <p:nvSpPr>
+          <p:cNvPr id="199" name="Shape 196"/>
+          <p:cNvSpPr/>
+          <p:nvPr/>
+        </p:nvSpPr>
+        <p:spPr>
+          <a:xfrm>
+            <a:off x="3851125" y="4155520"/>
+            <a:ext cx="69241" cy="69241"/>
+          </a:xfrm>
+          <a:prstGeom prst="rect">
+            <a:avLst/>
+          </a:prstGeom>
+          <a:solidFill>
+            <a:srgbClr val="000000"/>
+          </a:solidFill>
+          <a:ln/>
+        </p:spPr>
+      </p:sp>
+      <p:sp>
+        <p:nvSpPr>
+          <p:cNvPr id="200" name="Shape 197"/>
+          <p:cNvSpPr/>
+          <p:nvPr/>
+        </p:nvSpPr>
+        <p:spPr>
+          <a:xfrm>
+            <a:off x="3989608" y="4155520"/>
+            <a:ext cx="138483" cy="69241"/>
+          </a:xfrm>
+          <a:prstGeom prst="rect">
+            <a:avLst/>
+          </a:prstGeom>
+          <a:solidFill>
+            <a:srgbClr val="000000"/>
+          </a:solidFill>
+          <a:ln/>
+        </p:spPr>
+      </p:sp>
+      <p:sp>
+        <p:nvSpPr>
+          <p:cNvPr id="201" name="Shape 198"/>
+          <p:cNvSpPr/>
+          <p:nvPr/>
+        </p:nvSpPr>
+        <p:spPr>
+          <a:xfrm>
+            <a:off x="4266573" y="4155520"/>
+            <a:ext cx="69241" cy="69241"/>
+          </a:xfrm>
+          <a:prstGeom prst="rect">
+            <a:avLst/>
+          </a:prstGeom>
+          <a:solidFill>
+            <a:srgbClr val="000000"/>
+          </a:solidFill>
+          <a:ln/>
+        </p:spPr>
+      </p:sp>
+      <p:sp>
+        <p:nvSpPr>
+          <p:cNvPr id="202" name="Shape 199"/>
+          <p:cNvSpPr/>
+          <p:nvPr/>
+        </p:nvSpPr>
+        <p:spPr>
+          <a:xfrm>
+            <a:off x="2120088" y="4224761"/>
+            <a:ext cx="69241" cy="69241"/>
+          </a:xfrm>
+          <a:prstGeom prst="rect">
+            <a:avLst/>
+          </a:prstGeom>
+          <a:solidFill>
+            <a:srgbClr val="000000"/>
+          </a:solidFill>
+          <a:ln/>
+        </p:spPr>
+      </p:sp>
+      <p:sp>
+        <p:nvSpPr>
+          <p:cNvPr id="203" name="Shape 200"/>
+          <p:cNvSpPr/>
+          <p:nvPr/>
+        </p:nvSpPr>
+        <p:spPr>
+          <a:xfrm>
+            <a:off x="2466295" y="4224761"/>
+            <a:ext cx="69241" cy="69241"/>
+          </a:xfrm>
+          <a:prstGeom prst="rect">
+            <a:avLst/>
+          </a:prstGeom>
+          <a:solidFill>
+            <a:srgbClr val="000000"/>
+          </a:solidFill>
+          <a:ln/>
+        </p:spPr>
+      </p:sp>
+      <p:sp>
+        <p:nvSpPr>
+          <p:cNvPr id="204" name="Shape 201"/>
+          <p:cNvSpPr/>
+          <p:nvPr/>
+        </p:nvSpPr>
+        <p:spPr>
+          <a:xfrm>
+            <a:off x="2812502" y="4224761"/>
+            <a:ext cx="138483" cy="69241"/>
+          </a:xfrm>
+          <a:prstGeom prst="rect">
+            <a:avLst/>
+          </a:prstGeom>
+          <a:solidFill>
+            <a:srgbClr val="000000"/>
+          </a:solidFill>
+          <a:ln/>
+        </p:spPr>
+      </p:sp>
+      <p:sp>
+        <p:nvSpPr>
+          <p:cNvPr id="205" name="Shape 202"/>
+          <p:cNvSpPr/>
+          <p:nvPr/>
+        </p:nvSpPr>
+        <p:spPr>
+          <a:xfrm>
+            <a:off x="3020227" y="4224761"/>
+            <a:ext cx="138483" cy="69241"/>
+          </a:xfrm>
+          <a:prstGeom prst="rect">
+            <a:avLst/>
+          </a:prstGeom>
+          <a:solidFill>
+            <a:srgbClr val="000000"/>
+          </a:solidFill>
+          <a:ln/>
+        </p:spPr>
+      </p:sp>
+      <p:sp>
+        <p:nvSpPr>
+          <p:cNvPr id="206" name="Shape 203"/>
+          <p:cNvSpPr/>
+          <p:nvPr/>
+        </p:nvSpPr>
+        <p:spPr>
+          <a:xfrm>
+            <a:off x="3227951" y="4224761"/>
+            <a:ext cx="69241" cy="69241"/>
+          </a:xfrm>
+          <a:prstGeom prst="rect">
+            <a:avLst/>
+          </a:prstGeom>
+          <a:solidFill>
+            <a:srgbClr val="000000"/>
+          </a:solidFill>
+          <a:ln/>
+        </p:spPr>
+      </p:sp>
+      <p:sp>
+        <p:nvSpPr>
+          <p:cNvPr id="207" name="Shape 204"/>
+          <p:cNvSpPr/>
+          <p:nvPr/>
+        </p:nvSpPr>
+        <p:spPr>
+          <a:xfrm>
+            <a:off x="3435676" y="4224761"/>
+            <a:ext cx="276966" cy="69241"/>
+          </a:xfrm>
+          <a:prstGeom prst="rect">
+            <a:avLst/>
+          </a:prstGeom>
+          <a:solidFill>
+            <a:srgbClr val="000000"/>
+          </a:solidFill>
+          <a:ln/>
+        </p:spPr>
+      </p:sp>
+      <p:sp>
+        <p:nvSpPr>
+          <p:cNvPr id="208" name="Shape 205"/>
+          <p:cNvSpPr/>
+          <p:nvPr/>
+        </p:nvSpPr>
+        <p:spPr>
+          <a:xfrm>
+            <a:off x="3851125" y="4224761"/>
+            <a:ext cx="207724" cy="69241"/>
+          </a:xfrm>
+          <a:prstGeom prst="rect">
+            <a:avLst/>
+          </a:prstGeom>
+          <a:solidFill>
+            <a:srgbClr val="000000"/>
+          </a:solidFill>
+          <a:ln/>
+        </p:spPr>
+      </p:sp>
+      <p:sp>
+        <p:nvSpPr>
+          <p:cNvPr id="209" name="Shape 206"/>
+          <p:cNvSpPr/>
+          <p:nvPr/>
+        </p:nvSpPr>
+        <p:spPr>
+          <a:xfrm>
+            <a:off x="4128090" y="4224761"/>
+            <a:ext cx="276966" cy="69241"/>
+          </a:xfrm>
+          <a:prstGeom prst="rect">
+            <a:avLst/>
+          </a:prstGeom>
+          <a:solidFill>
+            <a:srgbClr val="000000"/>
+          </a:solidFill>
+          <a:ln/>
+        </p:spPr>
+      </p:sp>
+      <p:sp>
+        <p:nvSpPr>
+          <p:cNvPr id="210" name="Shape 207"/>
+          <p:cNvSpPr/>
+          <p:nvPr/>
+        </p:nvSpPr>
+        <p:spPr>
+          <a:xfrm>
+            <a:off x="2120088" y="4294003"/>
+            <a:ext cx="69241" cy="69241"/>
+          </a:xfrm>
+          <a:prstGeom prst="rect">
+            <a:avLst/>
+          </a:prstGeom>
+          <a:solidFill>
+            <a:srgbClr val="000000"/>
+          </a:solidFill>
+          <a:ln/>
+        </p:spPr>
+      </p:sp>
+      <p:sp>
+        <p:nvSpPr>
+          <p:cNvPr id="211" name="Shape 208"/>
+          <p:cNvSpPr/>
+          <p:nvPr/>
+        </p:nvSpPr>
+        <p:spPr>
+          <a:xfrm>
+            <a:off x="2258571" y="4294003"/>
+            <a:ext cx="69241" cy="69241"/>
+          </a:xfrm>
+          <a:prstGeom prst="rect">
+            <a:avLst/>
+          </a:prstGeom>
+          <a:solidFill>
+            <a:srgbClr val="000000"/>
+          </a:solidFill>
+          <a:ln/>
+        </p:spPr>
+      </p:sp>
+      <p:sp>
+        <p:nvSpPr>
+          <p:cNvPr id="212" name="Shape 209"/>
+          <p:cNvSpPr/>
+          <p:nvPr/>
+        </p:nvSpPr>
+        <p:spPr>
+          <a:xfrm>
+            <a:off x="2397054" y="4294003"/>
+            <a:ext cx="207724" cy="69241"/>
+          </a:xfrm>
+          <a:prstGeom prst="rect">
+            <a:avLst/>
+          </a:prstGeom>
+          <a:solidFill>
+            <a:srgbClr val="000000"/>
+          </a:solidFill>
+          <a:ln/>
+        </p:spPr>
+      </p:sp>
+      <p:sp>
+        <p:nvSpPr>
+          <p:cNvPr id="213" name="Shape 210"/>
+          <p:cNvSpPr/>
+          <p:nvPr/>
+        </p:nvSpPr>
+        <p:spPr>
+          <a:xfrm>
+            <a:off x="2743261" y="4294003"/>
+            <a:ext cx="276966" cy="69241"/>
+          </a:xfrm>
+          <a:prstGeom prst="rect">
+            <a:avLst/>
+          </a:prstGeom>
+          <a:solidFill>
+            <a:srgbClr val="000000"/>
+          </a:solidFill>
+          <a:ln/>
+        </p:spPr>
+      </p:sp>
+      <p:sp>
+        <p:nvSpPr>
+          <p:cNvPr id="214" name="Shape 211"/>
+          <p:cNvSpPr/>
+          <p:nvPr/>
+        </p:nvSpPr>
+        <p:spPr>
+          <a:xfrm>
+            <a:off x="3089468" y="4294003"/>
+            <a:ext cx="69241" cy="69241"/>
+          </a:xfrm>
+          <a:prstGeom prst="rect">
+            <a:avLst/>
+          </a:prstGeom>
+          <a:solidFill>
+            <a:srgbClr val="000000"/>
+          </a:solidFill>
+          <a:ln/>
+        </p:spPr>
+      </p:sp>
+      <p:sp>
+        <p:nvSpPr>
+          <p:cNvPr id="215" name="Shape 212"/>
+          <p:cNvSpPr/>
+          <p:nvPr/>
+        </p:nvSpPr>
+        <p:spPr>
+          <a:xfrm>
+            <a:off x="3297193" y="4294003"/>
+            <a:ext cx="69241" cy="69241"/>
+          </a:xfrm>
+          <a:prstGeom prst="rect">
+            <a:avLst/>
+          </a:prstGeom>
+          <a:solidFill>
+            <a:srgbClr val="000000"/>
+          </a:solidFill>
+          <a:ln/>
+        </p:spPr>
+      </p:sp>
+      <p:sp>
+        <p:nvSpPr>
+          <p:cNvPr id="216" name="Shape 213"/>
+          <p:cNvSpPr/>
+          <p:nvPr/>
+        </p:nvSpPr>
+        <p:spPr>
+          <a:xfrm>
+            <a:off x="3435676" y="4294003"/>
+            <a:ext cx="69241" cy="69241"/>
+          </a:xfrm>
+          <a:prstGeom prst="rect">
+            <a:avLst/>
+          </a:prstGeom>
+          <a:solidFill>
+            <a:srgbClr val="000000"/>
+          </a:solidFill>
+          <a:ln/>
+        </p:spPr>
+      </p:sp>
+      <p:sp>
+        <p:nvSpPr>
+          <p:cNvPr id="217" name="Shape 214"/>
+          <p:cNvSpPr/>
+          <p:nvPr/>
+        </p:nvSpPr>
+        <p:spPr>
+          <a:xfrm>
+            <a:off x="3643400" y="4294003"/>
+            <a:ext cx="484690" cy="69241"/>
+          </a:xfrm>
+          <a:prstGeom prst="rect">
+            <a:avLst/>
+          </a:prstGeom>
+          <a:solidFill>
+            <a:srgbClr val="000000"/>
+          </a:solidFill>
+          <a:ln/>
+        </p:spPr>
+      </p:sp>
+      <p:sp>
+        <p:nvSpPr>
+          <p:cNvPr id="218" name="Shape 215"/>
+          <p:cNvSpPr/>
+          <p:nvPr/>
+        </p:nvSpPr>
+        <p:spPr>
+          <a:xfrm>
+            <a:off x="4335815" y="4294003"/>
+            <a:ext cx="69241" cy="69241"/>
+          </a:xfrm>
+          <a:prstGeom prst="rect">
+            <a:avLst/>
+          </a:prstGeom>
+          <a:solidFill>
+            <a:srgbClr val="000000"/>
+          </a:solidFill>
+          <a:ln/>
+        </p:spPr>
+      </p:sp>
+      <p:sp>
+        <p:nvSpPr>
+          <p:cNvPr id="219" name="Shape 216"/>
+          <p:cNvSpPr/>
+          <p:nvPr/>
+        </p:nvSpPr>
+        <p:spPr>
+          <a:xfrm>
+            <a:off x="2674019" y="4363244"/>
+            <a:ext cx="415449" cy="69241"/>
+          </a:xfrm>
+          <a:prstGeom prst="rect">
+            <a:avLst/>
+          </a:prstGeom>
+          <a:solidFill>
+            <a:srgbClr val="000000"/>
+          </a:solidFill>
+          <a:ln/>
+        </p:spPr>
+      </p:sp>
+      <p:sp>
+        <p:nvSpPr>
+          <p:cNvPr id="220" name="Shape 217"/>
+          <p:cNvSpPr/>
+          <p:nvPr/>
+        </p:nvSpPr>
+        <p:spPr>
+          <a:xfrm>
+            <a:off x="3227951" y="4363244"/>
+            <a:ext cx="138483" cy="69241"/>
+          </a:xfrm>
+          <a:prstGeom prst="rect">
+            <a:avLst/>
+          </a:prstGeom>
+          <a:solidFill>
+            <a:srgbClr val="000000"/>
+          </a:solidFill>
+          <a:ln/>
+        </p:spPr>
+      </p:sp>
+      <p:sp>
+        <p:nvSpPr>
+          <p:cNvPr id="221" name="Shape 218"/>
+          <p:cNvSpPr/>
+          <p:nvPr/>
+        </p:nvSpPr>
+        <p:spPr>
+          <a:xfrm>
+            <a:off x="3435676" y="4363244"/>
+            <a:ext cx="69241" cy="69241"/>
+          </a:xfrm>
+          <a:prstGeom prst="rect">
+            <a:avLst/>
+          </a:prstGeom>
+          <a:solidFill>
+            <a:srgbClr val="000000"/>
+          </a:solidFill>
+          <a:ln/>
+        </p:spPr>
+      </p:sp>
+      <p:sp>
+        <p:nvSpPr>
+          <p:cNvPr id="222" name="Shape 219"/>
+          <p:cNvSpPr/>
+          <p:nvPr/>
+        </p:nvSpPr>
+        <p:spPr>
+          <a:xfrm>
+            <a:off x="3712642" y="4363244"/>
+            <a:ext cx="138483" cy="69241"/>
+          </a:xfrm>
+          <a:prstGeom prst="rect">
+            <a:avLst/>
+          </a:prstGeom>
+          <a:solidFill>
+            <a:srgbClr val="000000"/>
+          </a:solidFill>
+          <a:ln/>
+        </p:spPr>
+      </p:sp>
+      <p:sp>
+        <p:nvSpPr>
+          <p:cNvPr id="223" name="Shape 220"/>
+          <p:cNvSpPr/>
+          <p:nvPr/>
+        </p:nvSpPr>
+        <p:spPr>
+          <a:xfrm>
+            <a:off x="4058849" y="4363244"/>
+            <a:ext cx="69241" cy="69241"/>
+          </a:xfrm>
+          <a:prstGeom prst="rect">
+            <a:avLst/>
+          </a:prstGeom>
+          <a:solidFill>
+            <a:srgbClr val="000000"/>
+          </a:solidFill>
+          <a:ln/>
+        </p:spPr>
+      </p:sp>
+      <p:sp>
+        <p:nvSpPr>
+          <p:cNvPr id="224" name="Shape 221"/>
+          <p:cNvSpPr/>
+          <p:nvPr/>
+        </p:nvSpPr>
+        <p:spPr>
+          <a:xfrm>
+            <a:off x="4197332" y="4363244"/>
+            <a:ext cx="207724" cy="69241"/>
+          </a:xfrm>
+          <a:prstGeom prst="rect">
+            <a:avLst/>
+          </a:prstGeom>
+          <a:solidFill>
+            <a:srgbClr val="000000"/>
+          </a:solidFill>
+          <a:ln/>
+        </p:spPr>
+      </p:sp>
+      <p:sp>
+        <p:nvSpPr>
+          <p:cNvPr id="225" name="Shape 222"/>
+          <p:cNvSpPr/>
+          <p:nvPr/>
+        </p:nvSpPr>
+        <p:spPr>
+          <a:xfrm>
+            <a:off x="2120088" y="4432486"/>
+            <a:ext cx="484690" cy="69241"/>
+          </a:xfrm>
+          <a:prstGeom prst="rect">
+            <a:avLst/>
+          </a:prstGeom>
+          <a:solidFill>
+            <a:srgbClr val="000000"/>
+          </a:solidFill>
+          <a:ln/>
+        </p:spPr>
+      </p:sp>
+      <p:sp>
+        <p:nvSpPr>
+          <p:cNvPr id="226" name="Shape 223"/>
+          <p:cNvSpPr/>
+          <p:nvPr/>
+        </p:nvSpPr>
+        <p:spPr>
+          <a:xfrm>
+            <a:off x="3020227" y="4432486"/>
+            <a:ext cx="346207" cy="69241"/>
+          </a:xfrm>
+          <a:prstGeom prst="rect">
+            <a:avLst/>
+          </a:prstGeom>
+          <a:solidFill>
+            <a:srgbClr val="000000"/>
+          </a:solidFill>
+          <a:ln/>
+        </p:spPr>
+      </p:sp>
+      <p:sp>
+        <p:nvSpPr>
+          <p:cNvPr id="227" name="Shape 224"/>
+          <p:cNvSpPr/>
+          <p:nvPr/>
+        </p:nvSpPr>
+        <p:spPr>
+          <a:xfrm>
+            <a:off x="3504917" y="4432486"/>
+            <a:ext cx="69241" cy="69241"/>
+          </a:xfrm>
+          <a:prstGeom prst="rect">
+            <a:avLst/>
+          </a:prstGeom>
+          <a:solidFill>
+            <a:srgbClr val="000000"/>
+          </a:solidFill>
+          <a:ln/>
+        </p:spPr>
+      </p:sp>
+      <p:sp>
+        <p:nvSpPr>
+          <p:cNvPr id="228" name="Shape 225"/>
+          <p:cNvSpPr/>
+          <p:nvPr/>
+        </p:nvSpPr>
+        <p:spPr>
+          <a:xfrm>
+            <a:off x="3643400" y="4432486"/>
+            <a:ext cx="207724" cy="69241"/>
+          </a:xfrm>
+          <a:prstGeom prst="rect">
+            <a:avLst/>
+          </a:prstGeom>
+          <a:solidFill>
+            <a:srgbClr val="000000"/>
+          </a:solidFill>
+          <a:ln/>
+        </p:spPr>
+      </p:sp>
+      <p:sp>
+        <p:nvSpPr>
+          <p:cNvPr id="229" name="Shape 226"/>
+          <p:cNvSpPr/>
+          <p:nvPr/>
+        </p:nvSpPr>
+        <p:spPr>
+          <a:xfrm>
+            <a:off x="3920366" y="4432486"/>
+            <a:ext cx="69241" cy="69241"/>
+          </a:xfrm>
+          <a:prstGeom prst="rect">
+            <a:avLst/>
+          </a:prstGeom>
+          <a:solidFill>
+            <a:srgbClr val="000000"/>
+          </a:solidFill>
+          <a:ln/>
+        </p:spPr>
+      </p:sp>
+      <p:sp>
+        <p:nvSpPr>
+          <p:cNvPr id="230" name="Shape 227"/>
+          <p:cNvSpPr/>
+          <p:nvPr/>
+        </p:nvSpPr>
+        <p:spPr>
+          <a:xfrm>
+            <a:off x="4058849" y="4432486"/>
+            <a:ext cx="69241" cy="69241"/>
+          </a:xfrm>
+          <a:prstGeom prst="rect">
+            <a:avLst/>
+          </a:prstGeom>
+          <a:solidFill>
+            <a:srgbClr val="000000"/>
+          </a:solidFill>
+          <a:ln/>
+        </p:spPr>
+      </p:sp>
+      <p:sp>
+        <p:nvSpPr>
+          <p:cNvPr id="231" name="Shape 228"/>
+          <p:cNvSpPr/>
+          <p:nvPr/>
+        </p:nvSpPr>
+        <p:spPr>
+          <a:xfrm>
+            <a:off x="4197332" y="4432486"/>
+            <a:ext cx="138483" cy="69241"/>
+          </a:xfrm>
+          <a:prstGeom prst="rect">
+            <a:avLst/>
+          </a:prstGeom>
+          <a:solidFill>
+            <a:srgbClr val="000000"/>
+          </a:solidFill>
+          <a:ln/>
+        </p:spPr>
+      </p:sp>
+      <p:sp>
+        <p:nvSpPr>
+          <p:cNvPr id="232" name="Shape 229"/>
+          <p:cNvSpPr/>
+          <p:nvPr/>
+        </p:nvSpPr>
+        <p:spPr>
+          <a:xfrm>
+            <a:off x="2120088" y="4501727"/>
+            <a:ext cx="69241" cy="69241"/>
+          </a:xfrm>
+          <a:prstGeom prst="rect">
+            <a:avLst/>
+          </a:prstGeom>
+          <a:solidFill>
+            <a:srgbClr val="000000"/>
+          </a:solidFill>
+          <a:ln/>
+        </p:spPr>
+      </p:sp>
+      <p:sp>
+        <p:nvSpPr>
+          <p:cNvPr id="233" name="Shape 230"/>
+          <p:cNvSpPr/>
+          <p:nvPr/>
+        </p:nvSpPr>
+        <p:spPr>
+          <a:xfrm>
+            <a:off x="2535537" y="4501727"/>
+            <a:ext cx="69241" cy="69241"/>
+          </a:xfrm>
+          <a:prstGeom prst="rect">
+            <a:avLst/>
+          </a:prstGeom>
+          <a:solidFill>
+            <a:srgbClr val="000000"/>
+          </a:solidFill>
+          <a:ln/>
+        </p:spPr>
+      </p:sp>
+      <p:sp>
+        <p:nvSpPr>
+          <p:cNvPr id="234" name="Shape 231"/>
+          <p:cNvSpPr/>
+          <p:nvPr/>
+        </p:nvSpPr>
+        <p:spPr>
+          <a:xfrm>
+            <a:off x="2674019" y="4501727"/>
+            <a:ext cx="69241" cy="69241"/>
+          </a:xfrm>
+          <a:prstGeom prst="rect">
+            <a:avLst/>
+          </a:prstGeom>
+          <a:solidFill>
+            <a:srgbClr val="000000"/>
+          </a:solidFill>
+          <a:ln/>
+        </p:spPr>
+      </p:sp>
+      <p:sp>
+        <p:nvSpPr>
+          <p:cNvPr id="235" name="Shape 232"/>
+          <p:cNvSpPr/>
+          <p:nvPr/>
+        </p:nvSpPr>
+        <p:spPr>
+          <a:xfrm>
+            <a:off x="3089468" y="4501727"/>
+            <a:ext cx="138483" cy="69241"/>
+          </a:xfrm>
+          <a:prstGeom prst="rect">
+            <a:avLst/>
+          </a:prstGeom>
+          <a:solidFill>
+            <a:srgbClr val="000000"/>
+          </a:solidFill>
+          <a:ln/>
+        </p:spPr>
+      </p:sp>
+      <p:sp>
+        <p:nvSpPr>
+          <p:cNvPr id="236" name="Shape 233"/>
+          <p:cNvSpPr/>
+          <p:nvPr/>
+        </p:nvSpPr>
+        <p:spPr>
+          <a:xfrm>
+            <a:off x="3297193" y="4501727"/>
+            <a:ext cx="138483" cy="69241"/>
+          </a:xfrm>
+          <a:prstGeom prst="rect">
+            <a:avLst/>
+          </a:prstGeom>
+          <a:solidFill>
+            <a:srgbClr val="000000"/>
+          </a:solidFill>
+          <a:ln/>
+        </p:spPr>
+      </p:sp>
+      <p:sp>
+        <p:nvSpPr>
+          <p:cNvPr id="237" name="Shape 234"/>
+          <p:cNvSpPr/>
+          <p:nvPr/>
+        </p:nvSpPr>
+        <p:spPr>
+          <a:xfrm>
+            <a:off x="3504917" y="4501727"/>
+            <a:ext cx="69241" cy="69241"/>
+          </a:xfrm>
+          <a:prstGeom prst="rect">
+            <a:avLst/>
+          </a:prstGeom>
+          <a:solidFill>
+            <a:srgbClr val="000000"/>
+          </a:solidFill>
+          <a:ln/>
+        </p:spPr>
+      </p:sp>
+      <p:sp>
+        <p:nvSpPr>
+          <p:cNvPr id="238" name="Shape 235"/>
+          <p:cNvSpPr/>
+          <p:nvPr/>
+        </p:nvSpPr>
+        <p:spPr>
+          <a:xfrm>
+            <a:off x="3712642" y="4501727"/>
+            <a:ext cx="138483" cy="69241"/>
+          </a:xfrm>
+          <a:prstGeom prst="rect">
+            <a:avLst/>
+          </a:prstGeom>
+          <a:solidFill>
+            <a:srgbClr val="000000"/>
+          </a:solidFill>
+          <a:ln/>
+        </p:spPr>
+      </p:sp>
+      <p:sp>
+        <p:nvSpPr>
+          <p:cNvPr id="239" name="Shape 236"/>
+          <p:cNvSpPr/>
+          <p:nvPr/>
+        </p:nvSpPr>
+        <p:spPr>
+          <a:xfrm>
+            <a:off x="4058849" y="4501727"/>
+            <a:ext cx="276966" cy="69241"/>
+          </a:xfrm>
+          <a:prstGeom prst="rect">
+            <a:avLst/>
+          </a:prstGeom>
+          <a:solidFill>
+            <a:srgbClr val="000000"/>
+          </a:solidFill>
+          <a:ln/>
+        </p:spPr>
+      </p:sp>
+      <p:sp>
+        <p:nvSpPr>
+          <p:cNvPr id="240" name="Shape 237"/>
+          <p:cNvSpPr/>
+          <p:nvPr/>
+        </p:nvSpPr>
+        <p:spPr>
+          <a:xfrm>
+            <a:off x="2120088" y="4570969"/>
+            <a:ext cx="69241" cy="69241"/>
+          </a:xfrm>
+          <a:prstGeom prst="rect">
+            <a:avLst/>
+          </a:prstGeom>
+          <a:solidFill>
+            <a:srgbClr val="000000"/>
+          </a:solidFill>
+          <a:ln/>
+        </p:spPr>
+      </p:sp>
+      <p:sp>
+        <p:nvSpPr>
+          <p:cNvPr id="241" name="Shape 238"/>
+          <p:cNvSpPr/>
+          <p:nvPr/>
+        </p:nvSpPr>
+        <p:spPr>
+          <a:xfrm>
+            <a:off x="2258571" y="4570969"/>
+            <a:ext cx="207724" cy="69241"/>
+          </a:xfrm>
+          <a:prstGeom prst="rect">
+            <a:avLst/>
+          </a:prstGeom>
+          <a:solidFill>
+            <a:srgbClr val="000000"/>
+          </a:solidFill>
+          <a:ln/>
+        </p:spPr>
+      </p:sp>
+      <p:sp>
+        <p:nvSpPr>
+          <p:cNvPr id="242" name="Shape 239"/>
+          <p:cNvSpPr/>
+          <p:nvPr/>
+        </p:nvSpPr>
+        <p:spPr>
+          <a:xfrm>
+            <a:off x="2535537" y="4570969"/>
+            <a:ext cx="69241" cy="69241"/>
+          </a:xfrm>
+          <a:prstGeom prst="rect">
+            <a:avLst/>
+          </a:prstGeom>
+          <a:solidFill>
+            <a:srgbClr val="000000"/>
+          </a:solidFill>
+          <a:ln/>
+        </p:spPr>
+      </p:sp>
+      <p:sp>
+        <p:nvSpPr>
+          <p:cNvPr id="243" name="Shape 240"/>
+          <p:cNvSpPr/>
+          <p:nvPr/>
+        </p:nvSpPr>
+        <p:spPr>
+          <a:xfrm>
+            <a:off x="2674019" y="4570969"/>
+            <a:ext cx="138483" cy="69241"/>
+          </a:xfrm>
+          <a:prstGeom prst="rect">
+            <a:avLst/>
+          </a:prstGeom>
+          <a:solidFill>
+            <a:srgbClr val="000000"/>
+          </a:solidFill>
+          <a:ln/>
+        </p:spPr>
+      </p:sp>
+      <p:sp>
+        <p:nvSpPr>
+          <p:cNvPr id="244" name="Shape 241"/>
+          <p:cNvSpPr/>
+          <p:nvPr/>
+        </p:nvSpPr>
+        <p:spPr>
+          <a:xfrm>
+            <a:off x="2881744" y="4570969"/>
+            <a:ext cx="69241" cy="69241"/>
+          </a:xfrm>
+          <a:prstGeom prst="rect">
+            <a:avLst/>
+          </a:prstGeom>
+          <a:solidFill>
+            <a:srgbClr val="000000"/>
+          </a:solidFill>
+          <a:ln/>
+        </p:spPr>
+      </p:sp>
+      <p:sp>
+        <p:nvSpPr>
+          <p:cNvPr id="245" name="Shape 242"/>
+          <p:cNvSpPr/>
+          <p:nvPr/>
+        </p:nvSpPr>
+        <p:spPr>
+          <a:xfrm>
+            <a:off x="3089468" y="4570969"/>
+            <a:ext cx="69241" cy="69241"/>
+          </a:xfrm>
+          <a:prstGeom prst="rect">
+            <a:avLst/>
+          </a:prstGeom>
+          <a:solidFill>
+            <a:srgbClr val="000000"/>
+          </a:solidFill>
+          <a:ln/>
+        </p:spPr>
+      </p:sp>
+      <p:sp>
+        <p:nvSpPr>
+          <p:cNvPr id="246" name="Shape 243"/>
+          <p:cNvSpPr/>
+          <p:nvPr/>
+        </p:nvSpPr>
+        <p:spPr>
+          <a:xfrm>
+            <a:off x="3227951" y="4570969"/>
+            <a:ext cx="69241" cy="69241"/>
+          </a:xfrm>
+          <a:prstGeom prst="rect">
+            <a:avLst/>
+          </a:prstGeom>
+          <a:solidFill>
+            <a:srgbClr val="000000"/>
+          </a:solidFill>
+          <a:ln/>
+        </p:spPr>
+      </p:sp>
+      <p:sp>
+        <p:nvSpPr>
+          <p:cNvPr id="247" name="Shape 244"/>
+          <p:cNvSpPr/>
+          <p:nvPr/>
+        </p:nvSpPr>
+        <p:spPr>
+          <a:xfrm>
+            <a:off x="3435676" y="4570969"/>
+            <a:ext cx="276966" cy="69241"/>
+          </a:xfrm>
+          <a:prstGeom prst="rect">
+            <a:avLst/>
+          </a:prstGeom>
+          <a:solidFill>
+            <a:srgbClr val="000000"/>
+          </a:solidFill>
+          <a:ln/>
+        </p:spPr>
+      </p:sp>
+      <p:sp>
+        <p:nvSpPr>
+          <p:cNvPr id="248" name="Shape 245"/>
+          <p:cNvSpPr/>
+          <p:nvPr/>
+        </p:nvSpPr>
+        <p:spPr>
+          <a:xfrm>
+            <a:off x="3781883" y="4570969"/>
+            <a:ext cx="415449" cy="69241"/>
+          </a:xfrm>
+          <a:prstGeom prst="rect">
+            <a:avLst/>
+          </a:prstGeom>
+          <a:solidFill>
+            <a:srgbClr val="000000"/>
+          </a:solidFill>
+          <a:ln/>
+        </p:spPr>
+      </p:sp>
+      <p:sp>
+        <p:nvSpPr>
+          <p:cNvPr id="249" name="Shape 246"/>
+          <p:cNvSpPr/>
+          <p:nvPr/>
+        </p:nvSpPr>
+        <p:spPr>
+          <a:xfrm>
+            <a:off x="4266573" y="4570969"/>
+            <a:ext cx="69241" cy="69241"/>
+          </a:xfrm>
+          <a:prstGeom prst="rect">
+            <a:avLst/>
+          </a:prstGeom>
+          <a:solidFill>
+            <a:srgbClr val="000000"/>
+          </a:solidFill>
+          <a:ln/>
+        </p:spPr>
+      </p:sp>
+      <p:sp>
+        <p:nvSpPr>
+          <p:cNvPr id="250" name="Shape 247"/>
+          <p:cNvSpPr/>
+          <p:nvPr/>
+        </p:nvSpPr>
+        <p:spPr>
+          <a:xfrm>
+            <a:off x="2120088" y="4640210"/>
+            <a:ext cx="69241" cy="69241"/>
+          </a:xfrm>
+          <a:prstGeom prst="rect">
+            <a:avLst/>
+          </a:prstGeom>
+          <a:solidFill>
+            <a:srgbClr val="000000"/>
+          </a:solidFill>
+          <a:ln/>
+        </p:spPr>
+      </p:sp>
+      <p:sp>
+        <p:nvSpPr>
+          <p:cNvPr id="251" name="Shape 248"/>
+          <p:cNvSpPr/>
+          <p:nvPr/>
+        </p:nvSpPr>
+        <p:spPr>
+          <a:xfrm>
+            <a:off x="2258571" y="4640210"/>
+            <a:ext cx="207724" cy="69241"/>
+          </a:xfrm>
+          <a:prstGeom prst="rect">
+            <a:avLst/>
+          </a:prstGeom>
+          <a:solidFill>
+            <a:srgbClr val="000000"/>
+          </a:solidFill>
+          <a:ln/>
+        </p:spPr>
+      </p:sp>
+      <p:sp>
+        <p:nvSpPr>
+          <p:cNvPr id="252" name="Shape 249"/>
+          <p:cNvSpPr/>
+          <p:nvPr/>
+        </p:nvSpPr>
+        <p:spPr>
+          <a:xfrm>
+            <a:off x="2535537" y="4640210"/>
+            <a:ext cx="69241" cy="69241"/>
+          </a:xfrm>
+          <a:prstGeom prst="rect">
+            <a:avLst/>
+          </a:prstGeom>
+          <a:solidFill>
+            <a:srgbClr val="000000"/>
+          </a:solidFill>
+          <a:ln/>
+        </p:spPr>
+      </p:sp>
+      <p:sp>
+        <p:nvSpPr>
+          <p:cNvPr id="253" name="Shape 250"/>
+          <p:cNvSpPr/>
+          <p:nvPr/>
+        </p:nvSpPr>
+        <p:spPr>
+          <a:xfrm>
+            <a:off x="2674019" y="4640210"/>
+            <a:ext cx="415449" cy="69241"/>
+          </a:xfrm>
+          <a:prstGeom prst="rect">
+            <a:avLst/>
+          </a:prstGeom>
+          <a:solidFill>
+            <a:srgbClr val="000000"/>
+          </a:solidFill>
+          <a:ln/>
+        </p:spPr>
+      </p:sp>
+      <p:sp>
+        <p:nvSpPr>
+          <p:cNvPr id="254" name="Shape 251"/>
+          <p:cNvSpPr/>
+          <p:nvPr/>
+        </p:nvSpPr>
+        <p:spPr>
+          <a:xfrm>
+            <a:off x="3158710" y="4640210"/>
+            <a:ext cx="69241" cy="69241"/>
+          </a:xfrm>
+          <a:prstGeom prst="rect">
+            <a:avLst/>
+          </a:prstGeom>
+          <a:solidFill>
+            <a:srgbClr val="000000"/>
+          </a:solidFill>
+          <a:ln/>
+        </p:spPr>
+      </p:sp>
+      <p:sp>
+        <p:nvSpPr>
+          <p:cNvPr id="255" name="Shape 252"/>
+          <p:cNvSpPr/>
+          <p:nvPr/>
+        </p:nvSpPr>
+        <p:spPr>
+          <a:xfrm>
+            <a:off x="3366434" y="4640210"/>
+            <a:ext cx="69241" cy="69241"/>
+          </a:xfrm>
+          <a:prstGeom prst="rect">
+            <a:avLst/>
+          </a:prstGeom>
+          <a:solidFill>
+            <a:srgbClr val="000000"/>
+          </a:solidFill>
+          <a:ln/>
+        </p:spPr>
+      </p:sp>
+      <p:sp>
+        <p:nvSpPr>
+          <p:cNvPr id="256" name="Shape 253"/>
+          <p:cNvSpPr/>
+          <p:nvPr/>
+        </p:nvSpPr>
+        <p:spPr>
+          <a:xfrm>
+            <a:off x="3712642" y="4640210"/>
+            <a:ext cx="207724" cy="69241"/>
+          </a:xfrm>
+          <a:prstGeom prst="rect">
+            <a:avLst/>
+          </a:prstGeom>
+          <a:solidFill>
+            <a:srgbClr val="000000"/>
+          </a:solidFill>
+          <a:ln/>
+        </p:spPr>
+      </p:sp>
+      <p:sp>
+        <p:nvSpPr>
+          <p:cNvPr id="257" name="Shape 254"/>
+          <p:cNvSpPr/>
+          <p:nvPr/>
+        </p:nvSpPr>
+        <p:spPr>
+          <a:xfrm>
+            <a:off x="4058849" y="4640210"/>
+            <a:ext cx="138483" cy="69241"/>
+          </a:xfrm>
+          <a:prstGeom prst="rect">
+            <a:avLst/>
+          </a:prstGeom>
+          <a:solidFill>
+            <a:srgbClr val="000000"/>
+          </a:solidFill>
+          <a:ln/>
+        </p:spPr>
+      </p:sp>
+      <p:sp>
+        <p:nvSpPr>
+          <p:cNvPr id="258" name="Shape 255"/>
+          <p:cNvSpPr/>
+          <p:nvPr/>
+        </p:nvSpPr>
+        <p:spPr>
+          <a:xfrm>
+            <a:off x="4335815" y="4640210"/>
+            <a:ext cx="69241" cy="69241"/>
+          </a:xfrm>
+          <a:prstGeom prst="rect">
+            <a:avLst/>
+          </a:prstGeom>
+          <a:solidFill>
+            <a:srgbClr val="000000"/>
+          </a:solidFill>
+          <a:ln/>
+        </p:spPr>
+      </p:sp>
+      <p:sp>
+        <p:nvSpPr>
+          <p:cNvPr id="259" name="Shape 256"/>
+          <p:cNvSpPr/>
+          <p:nvPr/>
+        </p:nvSpPr>
+        <p:spPr>
+          <a:xfrm>
+            <a:off x="2120088" y="4709452"/>
+            <a:ext cx="69241" cy="69241"/>
+          </a:xfrm>
+          <a:prstGeom prst="rect">
+            <a:avLst/>
+          </a:prstGeom>
+          <a:solidFill>
+            <a:srgbClr val="000000"/>
+          </a:solidFill>
+          <a:ln/>
+        </p:spPr>
+      </p:sp>
+      <p:sp>
+        <p:nvSpPr>
+          <p:cNvPr id="260" name="Shape 257"/>
+          <p:cNvSpPr/>
+          <p:nvPr/>
+        </p:nvSpPr>
+        <p:spPr>
+          <a:xfrm>
+            <a:off x="2258571" y="4709452"/>
+            <a:ext cx="207724" cy="69241"/>
+          </a:xfrm>
+          <a:prstGeom prst="rect">
+            <a:avLst/>
+          </a:prstGeom>
+          <a:solidFill>
+            <a:srgbClr val="000000"/>
+          </a:solidFill>
+          <a:ln/>
+        </p:spPr>
+      </p:sp>
+      <p:sp>
+        <p:nvSpPr>
+          <p:cNvPr id="261" name="Shape 258"/>
+          <p:cNvSpPr/>
+          <p:nvPr/>
+        </p:nvSpPr>
+        <p:spPr>
+          <a:xfrm>
+            <a:off x="2535537" y="4709452"/>
+            <a:ext cx="69241" cy="69241"/>
+          </a:xfrm>
+          <a:prstGeom prst="rect">
+            <a:avLst/>
+          </a:prstGeom>
+          <a:solidFill>
+            <a:srgbClr val="000000"/>
+          </a:solidFill>
+          <a:ln/>
+        </p:spPr>
+      </p:sp>
+      <p:sp>
+        <p:nvSpPr>
+          <p:cNvPr id="262" name="Shape 259"/>
+          <p:cNvSpPr/>
+          <p:nvPr/>
+        </p:nvSpPr>
+        <p:spPr>
+          <a:xfrm>
+            <a:off x="2674019" y="4709452"/>
+            <a:ext cx="69241" cy="69241"/>
+          </a:xfrm>
+          <a:prstGeom prst="rect">
+            <a:avLst/>
+          </a:prstGeom>
+          <a:solidFill>
+            <a:srgbClr val="000000"/>
+          </a:solidFill>
+          <a:ln/>
+        </p:spPr>
+      </p:sp>
+      <p:sp>
+        <p:nvSpPr>
+          <p:cNvPr id="263" name="Shape 260"/>
+          <p:cNvSpPr/>
+          <p:nvPr/>
+        </p:nvSpPr>
+        <p:spPr>
+          <a:xfrm>
+            <a:off x="2812502" y="4709452"/>
+            <a:ext cx="69241" cy="69241"/>
+          </a:xfrm>
+          <a:prstGeom prst="rect">
+            <a:avLst/>
+          </a:prstGeom>
+          <a:solidFill>
+            <a:srgbClr val="000000"/>
+          </a:solidFill>
+          <a:ln/>
+        </p:spPr>
+      </p:sp>
+      <p:sp>
+        <p:nvSpPr>
+          <p:cNvPr id="264" name="Shape 261"/>
+          <p:cNvSpPr/>
+          <p:nvPr/>
+        </p:nvSpPr>
+        <p:spPr>
+          <a:xfrm>
+            <a:off x="3020227" y="4709452"/>
+            <a:ext cx="69241" cy="69241"/>
+          </a:xfrm>
+          <a:prstGeom prst="rect">
+            <a:avLst/>
+          </a:prstGeom>
+          <a:solidFill>
+            <a:srgbClr val="000000"/>
+          </a:solidFill>
+          <a:ln/>
+        </p:spPr>
+      </p:sp>
+      <p:sp>
+        <p:nvSpPr>
+          <p:cNvPr id="265" name="Shape 262"/>
+          <p:cNvSpPr/>
+          <p:nvPr/>
+        </p:nvSpPr>
+        <p:spPr>
+          <a:xfrm>
+            <a:off x="3158710" y="4709452"/>
+            <a:ext cx="138483" cy="69241"/>
+          </a:xfrm>
+          <a:prstGeom prst="rect">
+            <a:avLst/>
+          </a:prstGeom>
+          <a:solidFill>
+            <a:srgbClr val="000000"/>
+          </a:solidFill>
+          <a:ln/>
+        </p:spPr>
+      </p:sp>
+      <p:sp>
+        <p:nvSpPr>
+          <p:cNvPr id="266" name="Shape 263"/>
+          <p:cNvSpPr/>
+          <p:nvPr/>
+        </p:nvSpPr>
+        <p:spPr>
+          <a:xfrm>
+            <a:off x="3366434" y="4709452"/>
+            <a:ext cx="69241" cy="69241"/>
+          </a:xfrm>
+          <a:prstGeom prst="rect">
+            <a:avLst/>
+          </a:prstGeom>
+          <a:solidFill>
+            <a:srgbClr val="000000"/>
+          </a:solidFill>
+          <a:ln/>
+        </p:spPr>
+      </p:sp>
+      <p:sp>
+        <p:nvSpPr>
+          <p:cNvPr id="267" name="Shape 264"/>
+          <p:cNvSpPr/>
+          <p:nvPr/>
+        </p:nvSpPr>
+        <p:spPr>
+          <a:xfrm>
+            <a:off x="3504917" y="4709452"/>
+            <a:ext cx="69241" cy="69241"/>
+          </a:xfrm>
+          <a:prstGeom prst="rect">
+            <a:avLst/>
+          </a:prstGeom>
+          <a:solidFill>
+            <a:srgbClr val="000000"/>
+          </a:solidFill>
+          <a:ln/>
+        </p:spPr>
+      </p:sp>
+      <p:sp>
+        <p:nvSpPr>
+          <p:cNvPr id="268" name="Shape 265"/>
+          <p:cNvSpPr/>
+          <p:nvPr/>
+        </p:nvSpPr>
+        <p:spPr>
+          <a:xfrm>
+            <a:off x="3643400" y="4709452"/>
+            <a:ext cx="69241" cy="69241"/>
+          </a:xfrm>
+          <a:prstGeom prst="rect">
+            <a:avLst/>
+          </a:prstGeom>
+          <a:solidFill>
+            <a:srgbClr val="000000"/>
+          </a:solidFill>
+          <a:ln/>
+        </p:spPr>
+      </p:sp>
+      <p:sp>
+        <p:nvSpPr>
+          <p:cNvPr id="269" name="Shape 266"/>
+          <p:cNvSpPr/>
+          <p:nvPr/>
+        </p:nvSpPr>
+        <p:spPr>
+          <a:xfrm>
+            <a:off x="3920366" y="4709452"/>
+            <a:ext cx="138483" cy="69241"/>
+          </a:xfrm>
+          <a:prstGeom prst="rect">
+            <a:avLst/>
+          </a:prstGeom>
+          <a:solidFill>
+            <a:srgbClr val="000000"/>
+          </a:solidFill>
+          <a:ln/>
+        </p:spPr>
+      </p:sp>
+      <p:sp>
+        <p:nvSpPr>
+          <p:cNvPr id="270" name="Shape 267"/>
+          <p:cNvSpPr/>
+          <p:nvPr/>
+        </p:nvSpPr>
+        <p:spPr>
+          <a:xfrm>
+            <a:off x="4128090" y="4709452"/>
+            <a:ext cx="69241" cy="69241"/>
+          </a:xfrm>
+          <a:prstGeom prst="rect">
+            <a:avLst/>
+          </a:prstGeom>
+          <a:solidFill>
+            <a:srgbClr val="000000"/>
+          </a:solidFill>
+          <a:ln/>
+        </p:spPr>
+      </p:sp>
+      <p:sp>
+        <p:nvSpPr>
+          <p:cNvPr id="271" name="Shape 268"/>
+          <p:cNvSpPr/>
+          <p:nvPr/>
+        </p:nvSpPr>
+        <p:spPr>
+          <a:xfrm>
+            <a:off x="2120088" y="4778693"/>
+            <a:ext cx="69241" cy="69241"/>
+          </a:xfrm>
+          <a:prstGeom prst="rect">
+            <a:avLst/>
+          </a:prstGeom>
+          <a:solidFill>
+            <a:srgbClr val="000000"/>
+          </a:solidFill>
+          <a:ln/>
+        </p:spPr>
+      </p:sp>
+      <p:sp>
+        <p:nvSpPr>
+          <p:cNvPr id="272" name="Shape 269"/>
+          <p:cNvSpPr/>
+          <p:nvPr/>
+        </p:nvSpPr>
+        <p:spPr>
+          <a:xfrm>
+            <a:off x="2535537" y="4778693"/>
+            <a:ext cx="69241" cy="69241"/>
+          </a:xfrm>
+          <a:prstGeom prst="rect">
+            <a:avLst/>
+          </a:prstGeom>
+          <a:solidFill>
+            <a:srgbClr val="000000"/>
+          </a:solidFill>
+          <a:ln/>
+        </p:spPr>
+      </p:sp>
+      <p:sp>
+        <p:nvSpPr>
+          <p:cNvPr id="273" name="Shape 270"/>
+          <p:cNvSpPr/>
+          <p:nvPr/>
+        </p:nvSpPr>
+        <p:spPr>
+          <a:xfrm>
+            <a:off x="2743261" y="4778693"/>
+            <a:ext cx="276966" cy="69241"/>
+          </a:xfrm>
+          <a:prstGeom prst="rect">
+            <a:avLst/>
+          </a:prstGeom>
+          <a:solidFill>
+            <a:srgbClr val="000000"/>
+          </a:solidFill>
+          <a:ln/>
+        </p:spPr>
+      </p:sp>
+      <p:sp>
+        <p:nvSpPr>
+          <p:cNvPr id="274" name="Shape 271"/>
+          <p:cNvSpPr/>
+          <p:nvPr/>
+        </p:nvSpPr>
+        <p:spPr>
+          <a:xfrm>
+            <a:off x="3158710" y="4778693"/>
+            <a:ext cx="69241" cy="69241"/>
+          </a:xfrm>
+          <a:prstGeom prst="rect">
+            <a:avLst/>
+          </a:prstGeom>
+          <a:solidFill>
+            <a:srgbClr val="000000"/>
+          </a:solidFill>
+          <a:ln/>
+        </p:spPr>
+      </p:sp>
+      <p:sp>
+        <p:nvSpPr>
+          <p:cNvPr id="275" name="Shape 272"/>
+          <p:cNvSpPr/>
+          <p:nvPr/>
+        </p:nvSpPr>
+        <p:spPr>
+          <a:xfrm>
+            <a:off x="3366434" y="4778693"/>
+            <a:ext cx="69241" cy="69241"/>
+          </a:xfrm>
+          <a:prstGeom prst="rect">
+            <a:avLst/>
+          </a:prstGeom>
+          <a:solidFill>
+            <a:srgbClr val="000000"/>
+          </a:solidFill>
+          <a:ln/>
+        </p:spPr>
+      </p:sp>
+      <p:sp>
+        <p:nvSpPr>
+          <p:cNvPr id="276" name="Shape 273"/>
+          <p:cNvSpPr/>
+          <p:nvPr/>
+        </p:nvSpPr>
+        <p:spPr>
+          <a:xfrm>
+            <a:off x="3574159" y="4778693"/>
+            <a:ext cx="138483" cy="69241"/>
+          </a:xfrm>
+          <a:prstGeom prst="rect">
+            <a:avLst/>
+          </a:prstGeom>
+          <a:solidFill>
+            <a:srgbClr val="000000"/>
+          </a:solidFill>
+          <a:ln/>
+        </p:spPr>
+      </p:sp>
+      <p:sp>
+        <p:nvSpPr>
+          <p:cNvPr id="277" name="Shape 274"/>
+          <p:cNvSpPr/>
+          <p:nvPr/>
+        </p:nvSpPr>
+        <p:spPr>
+          <a:xfrm>
+            <a:off x="3851125" y="4778693"/>
+            <a:ext cx="69241" cy="69241"/>
+          </a:xfrm>
+          <a:prstGeom prst="rect">
+            <a:avLst/>
+          </a:prstGeom>
+          <a:solidFill>
+            <a:srgbClr val="000000"/>
+          </a:solidFill>
+          <a:ln/>
+        </p:spPr>
+      </p:sp>
+      <p:sp>
+        <p:nvSpPr>
+          <p:cNvPr id="278" name="Shape 275"/>
+          <p:cNvSpPr/>
+          <p:nvPr/>
+        </p:nvSpPr>
+        <p:spPr>
+          <a:xfrm>
+            <a:off x="4058849" y="4778693"/>
+            <a:ext cx="207724" cy="69241"/>
+          </a:xfrm>
+          <a:prstGeom prst="rect">
+            <a:avLst/>
+          </a:prstGeom>
+          <a:solidFill>
+            <a:srgbClr val="000000"/>
+          </a:solidFill>
+          <a:ln/>
+        </p:spPr>
+      </p:sp>
+      <p:sp>
+        <p:nvSpPr>
+          <p:cNvPr id="279" name="Shape 276"/>
+          <p:cNvSpPr/>
+          <p:nvPr/>
+        </p:nvSpPr>
+        <p:spPr>
+          <a:xfrm>
+            <a:off x="2120088" y="4847935"/>
+            <a:ext cx="484690" cy="69241"/>
+          </a:xfrm>
+          <a:prstGeom prst="rect">
+            <a:avLst/>
+          </a:prstGeom>
+          <a:solidFill>
+            <a:srgbClr val="000000"/>
+          </a:solidFill>
+          <a:ln/>
+        </p:spPr>
+      </p:sp>
+      <p:sp>
+        <p:nvSpPr>
+          <p:cNvPr id="280" name="Shape 277"/>
+          <p:cNvSpPr/>
+          <p:nvPr/>
+        </p:nvSpPr>
+        <p:spPr>
+          <a:xfrm>
+            <a:off x="2674019" y="4847935"/>
+            <a:ext cx="69241" cy="69241"/>
+          </a:xfrm>
+          <a:prstGeom prst="rect">
+            <a:avLst/>
+          </a:prstGeom>
+          <a:solidFill>
+            <a:srgbClr val="000000"/>
+          </a:solidFill>
+          <a:ln/>
+        </p:spPr>
+      </p:sp>
+      <p:sp>
+        <p:nvSpPr>
+          <p:cNvPr id="281" name="Shape 278"/>
+          <p:cNvSpPr/>
+          <p:nvPr/>
+        </p:nvSpPr>
+        <p:spPr>
+          <a:xfrm>
+            <a:off x="2881744" y="4847935"/>
+            <a:ext cx="69241" cy="69241"/>
+          </a:xfrm>
+          <a:prstGeom prst="rect">
+            <a:avLst/>
+          </a:prstGeom>
+          <a:solidFill>
+            <a:srgbClr val="000000"/>
+          </a:solidFill>
+          <a:ln/>
+        </p:spPr>
+      </p:sp>
+      <p:sp>
+        <p:nvSpPr>
+          <p:cNvPr id="282" name="Shape 279"/>
+          <p:cNvSpPr/>
+          <p:nvPr/>
+        </p:nvSpPr>
+        <p:spPr>
+          <a:xfrm>
+            <a:off x="3089468" y="4847935"/>
+            <a:ext cx="138483" cy="69241"/>
+          </a:xfrm>
+          <a:prstGeom prst="rect">
+            <a:avLst/>
+          </a:prstGeom>
+          <a:solidFill>
+            <a:srgbClr val="000000"/>
+          </a:solidFill>
+          <a:ln/>
+        </p:spPr>
+      </p:sp>
+      <p:sp>
+        <p:nvSpPr>
+          <p:cNvPr id="283" name="Shape 280"/>
+          <p:cNvSpPr/>
+          <p:nvPr/>
+        </p:nvSpPr>
+        <p:spPr>
+          <a:xfrm>
+            <a:off x="3297193" y="4847935"/>
+            <a:ext cx="69241" cy="69241"/>
+          </a:xfrm>
+          <a:prstGeom prst="rect">
+            <a:avLst/>
+          </a:prstGeom>
+          <a:solidFill>
+            <a:srgbClr val="000000"/>
+          </a:solidFill>
+          <a:ln/>
+        </p:spPr>
+      </p:sp>
+      <p:sp>
+        <p:nvSpPr>
+          <p:cNvPr id="284" name="Shape 281"/>
+          <p:cNvSpPr/>
+          <p:nvPr/>
+        </p:nvSpPr>
+        <p:spPr>
+          <a:xfrm>
+            <a:off x="3643400" y="4847935"/>
+            <a:ext cx="276966" cy="69241"/>
+          </a:xfrm>
+          <a:prstGeom prst="rect">
+            <a:avLst/>
+          </a:prstGeom>
+          <a:solidFill>
+            <a:srgbClr val="000000"/>
+          </a:solidFill>
+          <a:ln/>
+        </p:spPr>
+      </p:sp>
+      <p:sp>
+        <p:nvSpPr>
+          <p:cNvPr id="285" name="Shape 282"/>
+          <p:cNvSpPr/>
+          <p:nvPr/>
+        </p:nvSpPr>
+        <p:spPr>
+          <a:xfrm>
+            <a:off x="3989608" y="4847935"/>
+            <a:ext cx="69241" cy="69241"/>
+          </a:xfrm>
+          <a:prstGeom prst="rect">
+            <a:avLst/>
+          </a:prstGeom>
+          <a:solidFill>
+            <a:srgbClr val="000000"/>
+          </a:solidFill>
+          <a:ln/>
+        </p:spPr>
+      </p:sp>
+      <p:sp>
+        <p:nvSpPr>
+          <p:cNvPr id="286" name="Shape 283"/>
+          <p:cNvSpPr/>
+          <p:nvPr/>
+        </p:nvSpPr>
+        <p:spPr>
+          <a:xfrm>
+            <a:off x="4128090" y="4847935"/>
+            <a:ext cx="69241" cy="69241"/>
+          </a:xfrm>
+          <a:prstGeom prst="rect">
+            <a:avLst/>
+          </a:prstGeom>
+          <a:solidFill>
+            <a:srgbClr val="000000"/>
+          </a:solidFill>
+          <a:ln/>
+        </p:spPr>
+      </p:sp>
+      <p:sp>
+        <p:nvSpPr>
+          <p:cNvPr id="287" name="Shape 284"/>
+          <p:cNvSpPr/>
+          <p:nvPr/>
+        </p:nvSpPr>
+        <p:spPr>
+          <a:xfrm>
+            <a:off x="4266573" y="4847935"/>
+            <a:ext cx="69241" cy="69241"/>
+          </a:xfrm>
+          <a:prstGeom prst="rect">
+            <a:avLst/>
+          </a:prstGeom>
+          <a:solidFill>
+            <a:srgbClr val="000000"/>
+          </a:solidFill>
+          <a:ln/>
+        </p:spPr>
+      </p:sp>
+      <p:sp>
+        <p:nvSpPr>
+          <p:cNvPr id="288" name="Caption"/>
+          <p:cNvSpPr txBox="1"/>
+          <p:nvPr/>
+        </p:nvSpPr>
+        <p:spPr>
+          <a:xfrm>
+            <a:off x="685800" y="5489568"/>
+            <a:ext cx="5143652" cy="217170"/>
+          </a:xfrm>
+          <a:prstGeom prst="rect">
+            <a:avLst/>
+          </a:prstGeom>
+          <a:noFill/>
+          <a:ln/>
+        </p:spPr>
+        <p:txBody>
+          <a:bodyPr wrap="square" lIns="0" tIns="0" rIns="0" bIns="0" rtlCol="0" anchor="t"/>
+          <a:lstStyle/>
+          <a:p>
+            <a:pPr indent="0" marL="0">
+              <a:buNone/>
+            </a:pPr>
+            <a:r>
+              <a:rPr lang="en-US" sz="1425" dirty="0">
+                <a:solidFill>
+                  <a:schemeClr val="tx2"/>
+                </a:solidFill>
+                <a:latin typeface="Arial" pitchFamily="34" charset="0"/>
+                <a:ea typeface="Arial" pitchFamily="34" charset="-122"/>
+                <a:cs typeface="Arial" pitchFamily="34" charset="-120"/>
+              </a:rPr>
+              <a:t>Scan for the slides and demo code</a:t>
+            </a:r>
+            <a:endParaRPr lang="en-US" sz="1425" dirty="0"/>
+          </a:p>
+        </p:txBody>
+      </p:sp>
+      <p:sp>
+        <p:nvSpPr>
+          <p:cNvPr id="289" name="Shape 286"/>
+          <p:cNvSpPr/>
+          <p:nvPr/>
+        </p:nvSpPr>
+        <p:spPr>
+          <a:xfrm>
+            <a:off x="6362548" y="2286000"/>
+            <a:ext cx="5143652" cy="0"/>
+          </a:xfrm>
+          <a:prstGeom prst="line">
+            <a:avLst/>
+          </a:prstGeom>
+          <a:noFill/>
+          <a:ln w="9525">
+            <a:solidFill>
+              <a:srgbClr val="D3D9D2"/>
+            </a:solidFill>
+            <a:prstDash val="solid"/>
+          </a:ln>
+        </p:spPr>
+      </p:sp>
+      <p:sp>
+        <p:nvSpPr>
+          <p:cNvPr id="290" name="Fact label"/>
+          <p:cNvSpPr txBox="1"/>
+          <p:nvPr/>
+        </p:nvSpPr>
+        <p:spPr>
+          <a:xfrm>
+            <a:off x="6362548" y="2441448"/>
+            <a:ext cx="1426464" cy="228600"/>
+          </a:xfrm>
+          <a:prstGeom prst="rect">
+            <a:avLst/>
+          </a:prstGeom>
+          <a:noFill/>
+          <a:ln/>
+        </p:spPr>
+        <p:txBody>
+          <a:bodyPr wrap="square" lIns="0" tIns="0" rIns="0" bIns="0" rtlCol="0" anchor="t"/>
+          <a:lstStyle/>
+          <a:p>
+            <a:pPr indent="0" marL="0">
+              <a:buNone/>
+            </a:pPr>
+            <a:r>
+              <a:rPr lang="en-US" sz="1050" spc="100" kern="0" dirty="0">
+                <a:solidFill>
+                  <a:schemeClr val="tx2"/>
+                </a:solidFill>
+                <a:latin typeface="Courier New" pitchFamily="34" charset="0"/>
+                <a:ea typeface="Courier New" pitchFamily="34" charset="-122"/>
+                <a:cs typeface="Courier New" pitchFamily="34" charset="-120"/>
+              </a:rPr>
+              <a:t>INSTALL</a:t>
+            </a:r>
+            <a:endParaRPr lang="en-US" sz="1050" dirty="0"/>
+          </a:p>
+        </p:txBody>
+      </p:sp>
+      <p:sp>
+        <p:nvSpPr>
+          <p:cNvPr id="291" name="Fact"/>
+          <p:cNvSpPr txBox="1"/>
+          <p:nvPr/>
+        </p:nvSpPr>
+        <p:spPr>
+          <a:xfrm>
+            <a:off x="7962748" y="2414016"/>
+            <a:ext cx="3543452" cy="502920"/>
+          </a:xfrm>
+          <a:prstGeom prst="rect">
+            <a:avLst/>
+          </a:prstGeom>
+          <a:noFill/>
+          <a:ln/>
+        </p:spPr>
+        <p:txBody>
+          <a:bodyPr wrap="square" lIns="0" tIns="0" rIns="0" bIns="0" rtlCol="0" anchor="t"/>
+          <a:lstStyle/>
+          <a:p>
+            <a:pPr indent="0" marL="0">
+              <a:buNone/>
+            </a:pPr>
+            <a:r>
+              <a:rPr lang="en-US" sz="1650" dirty="0">
+                <a:solidFill>
+                  <a:schemeClr val="tx1"/>
+                </a:solidFill>
+                <a:latin typeface="Arial" pitchFamily="34" charset="0"/>
+                <a:ea typeface="Arial" pitchFamily="34" charset="-122"/>
+                <a:cs typeface="Arial" pitchFamily="34" charset="-120"/>
+              </a:rPr>
+              <a:t>Docker (running, Compose v2) · Terraform ≥ 1.5 · AWS CLI</a:t>
+            </a:r>
+            <a:endParaRPr lang="en-US" sz="1650" dirty="0"/>
+          </a:p>
+        </p:txBody>
+      </p:sp>
+      <p:sp>
+        <p:nvSpPr>
+          <p:cNvPr id="292" name="Shape 289"/>
+          <p:cNvSpPr/>
+          <p:nvPr/>
+        </p:nvSpPr>
+        <p:spPr>
+          <a:xfrm>
+            <a:off x="6362548" y="3072384"/>
+            <a:ext cx="5143652" cy="0"/>
+          </a:xfrm>
+          <a:prstGeom prst="line">
+            <a:avLst/>
+          </a:prstGeom>
+          <a:noFill/>
+          <a:ln w="9525">
+            <a:solidFill>
+              <a:srgbClr val="D3D9D2"/>
+            </a:solidFill>
+            <a:prstDash val="solid"/>
+          </a:ln>
+        </p:spPr>
+      </p:sp>
+      <p:sp>
+        <p:nvSpPr>
+          <p:cNvPr id="293" name="Fact label"/>
+          <p:cNvSpPr txBox="1"/>
+          <p:nvPr/>
+        </p:nvSpPr>
+        <p:spPr>
+          <a:xfrm>
+            <a:off x="6362548" y="3227832"/>
+            <a:ext cx="1426464" cy="228600"/>
+          </a:xfrm>
+          <a:prstGeom prst="rect">
+            <a:avLst/>
+          </a:prstGeom>
+          <a:noFill/>
+          <a:ln/>
+        </p:spPr>
+        <p:txBody>
+          <a:bodyPr wrap="square" lIns="0" tIns="0" rIns="0" bIns="0" rtlCol="0" anchor="t"/>
+          <a:lstStyle/>
+          <a:p>
+            <a:pPr indent="0" marL="0">
+              <a:buNone/>
+            </a:pPr>
+            <a:r>
+              <a:rPr lang="en-US" sz="1050" spc="100" kern="0" dirty="0">
+                <a:solidFill>
+                  <a:schemeClr val="tx2"/>
+                </a:solidFill>
+                <a:latin typeface="Courier New" pitchFamily="34" charset="0"/>
+                <a:ea typeface="Courier New" pitchFamily="34" charset="-122"/>
+                <a:cs typeface="Courier New" pitchFamily="34" charset="-120"/>
+              </a:rPr>
+              <a:t>LATER STACKS</a:t>
+            </a:r>
+            <a:endParaRPr lang="en-US" sz="1050" dirty="0"/>
+          </a:p>
+        </p:txBody>
+      </p:sp>
+      <p:sp>
+        <p:nvSpPr>
+          <p:cNvPr id="294" name="Fact"/>
+          <p:cNvSpPr txBox="1"/>
+          <p:nvPr/>
+        </p:nvSpPr>
+        <p:spPr>
+          <a:xfrm>
+            <a:off x="7962748" y="3200400"/>
+            <a:ext cx="3543452" cy="502920"/>
+          </a:xfrm>
+          <a:prstGeom prst="rect">
+            <a:avLst/>
+          </a:prstGeom>
+          <a:noFill/>
+          <a:ln/>
+        </p:spPr>
+        <p:txBody>
+          <a:bodyPr wrap="square" lIns="0" tIns="0" rIns="0" bIns="0" rtlCol="0" anchor="t"/>
+          <a:lstStyle/>
+          <a:p>
+            <a:pPr indent="0" marL="0">
+              <a:buNone/>
+            </a:pPr>
+            <a:r>
+              <a:rPr lang="en-US" sz="1650" dirty="0">
+                <a:solidFill>
+                  <a:schemeClr val="tx1"/>
+                </a:solidFill>
+                <a:latin typeface="Arial" pitchFamily="34" charset="0"/>
+                <a:ea typeface="Arial" pitchFamily="34" charset="-122"/>
+                <a:cs typeface="Arial" pitchFamily="34" charset="-120"/>
+              </a:rPr>
+              <a:t>Stack 3: Ruby 4.0.5 + Bundler, or just watch.</a:t>
+            </a:r>
+            <a:endParaRPr lang="en-US" sz="1650" dirty="0"/>
+          </a:p>
+        </p:txBody>
+      </p:sp>
+      <p:sp>
+        <p:nvSpPr>
+          <p:cNvPr id="295" name="Terminal"/>
+          <p:cNvSpPr txBox="1"/>
+          <p:nvPr/>
+        </p:nvSpPr>
+        <p:spPr>
+          <a:xfrm>
+            <a:off x="6362548" y="3920490"/>
+            <a:ext cx="5143652" cy="1226484"/>
+          </a:xfrm>
+          <a:prstGeom prst="roundRect">
+            <a:avLst>
+              <a:gd name="adj" fmla="val 4473"/>
+            </a:avLst>
+          </a:prstGeom>
+          <a:solidFill>
+            <a:schemeClr val="tx1"/>
+          </a:solidFill>
+          <a:ln/>
+        </p:spPr>
+        <p:txBody>
+          <a:bodyPr wrap="square" lIns="246888" tIns="246888" rIns="246888" bIns="246888" rtlCol="0" anchor="t"/>
+          <a:lstStyle/>
+          <a:p>
+            <a:pPr indent="0" marL="0">
+              <a:lnSpc>
+                <a:spcPct val="105000"/>
+              </a:lnSpc>
+              <a:buNone/>
+            </a:pPr>
+            <a:r>
+              <a:rPr lang="en-US" sz="1109" dirty="0">
+                <a:solidFill>
+                  <a:srgbClr val="9AA39E"/>
+                </a:solidFill>
+                <a:latin typeface="Courier New" pitchFamily="34" charset="0"/>
+                <a:ea typeface="Courier New" pitchFamily="34" charset="-122"/>
+                <a:cs typeface="Courier New" pitchFamily="34" charset="-120"/>
+              </a:rPr>
+              <a:t>$</a:t>
+            </a:r>
+            <a:pPr indent="0" marL="0">
+              <a:lnSpc>
+                <a:spcPct val="105000"/>
+              </a:lnSpc>
+              <a:buNone/>
+            </a:pPr>
+            <a:r>
+              <a:rPr lang="en-US" sz="1109" dirty="0">
+                <a:solidFill>
+                  <a:schemeClr val="bg2"/>
+                </a:solidFill>
+                <a:latin typeface="Courier New" pitchFamily="34" charset="0"/>
+                <a:ea typeface="Courier New" pitchFamily="34" charset="-122"/>
+                <a:cs typeface="Courier New" pitchFamily="34" charset="-120"/>
+              </a:rPr>
+              <a:t> git clone https://github.com/raysapida/terraform_demo</a:t>
+            </a:r>
+            <a:endParaRPr lang="en-US" sz="1109" dirty="0"/>
+          </a:p>
+          <a:p>
+            <a:pPr indent="0" marL="0">
+              <a:lnSpc>
+                <a:spcPct val="105000"/>
+              </a:lnSpc>
+              <a:buNone/>
+            </a:pPr>
+            <a:r>
+              <a:rPr lang="en-US" sz="1109" dirty="0">
+                <a:solidFill>
+                  <a:srgbClr val="9AA39E"/>
+                </a:solidFill>
+                <a:latin typeface="Courier New" pitchFamily="34" charset="0"/>
+                <a:ea typeface="Courier New" pitchFamily="34" charset="-122"/>
+                <a:cs typeface="Courier New" pitchFamily="34" charset="-120"/>
+              </a:rPr>
+              <a:t>$</a:t>
+            </a:r>
+            <a:pPr indent="0" marL="0">
+              <a:lnSpc>
+                <a:spcPct val="105000"/>
+              </a:lnSpc>
+              <a:buNone/>
+            </a:pPr>
+            <a:r>
+              <a:rPr lang="en-US" sz="1109" dirty="0">
+                <a:solidFill>
+                  <a:schemeClr val="bg2"/>
+                </a:solidFill>
+                <a:latin typeface="Courier New" pitchFamily="34" charset="0"/>
+                <a:ea typeface="Courier New" pitchFamily="34" charset="-122"/>
+                <a:cs typeface="Courier New" pitchFamily="34" charset="-120"/>
+              </a:rPr>
+              <a:t> cd terraform_demo</a:t>
+            </a:r>
+            <a:endParaRPr lang="en-US" sz="1109" dirty="0"/>
+          </a:p>
+          <a:p>
+            <a:pPr indent="0" marL="0">
+              <a:lnSpc>
+                <a:spcPct val="105000"/>
+              </a:lnSpc>
+              <a:buNone/>
+            </a:pPr>
+            <a:r>
+              <a:rPr lang="en-US" sz="1109" dirty="0">
+                <a:solidFill>
+                  <a:srgbClr val="9AA39E"/>
+                </a:solidFill>
+                <a:latin typeface="Courier New" pitchFamily="34" charset="0"/>
+                <a:ea typeface="Courier New" pitchFamily="34" charset="-122"/>
+                <a:cs typeface="Courier New" pitchFamily="34" charset="-120"/>
+              </a:rPr>
+              <a:t>$</a:t>
+            </a:r>
+            <a:pPr indent="0" marL="0">
+              <a:lnSpc>
+                <a:spcPct val="105000"/>
+              </a:lnSpc>
+              <a:buNone/>
+            </a:pPr>
+            <a:r>
+              <a:rPr lang="en-US" sz="1109" dirty="0">
+                <a:solidFill>
+                  <a:schemeClr val="bg2"/>
+                </a:solidFill>
+                <a:latin typeface="Courier New" pitchFamily="34" charset="0"/>
+                <a:ea typeface="Courier New" pitchFamily="34" charset="-122"/>
+                <a:cs typeface="Courier New" pitchFamily="34" charset="-120"/>
+              </a:rPr>
+              <a:t> make doctor</a:t>
+            </a:r>
+            <a:endParaRPr lang="en-US" sz="1109" dirty="0"/>
+          </a:p>
+          <a:p>
+            <a:pPr indent="0" marL="0">
+              <a:lnSpc>
+                <a:spcPct val="105000"/>
+              </a:lnSpc>
+              <a:buNone/>
+            </a:pPr>
+            <a:r>
+              <a:rPr lang="en-US" sz="1109" dirty="0">
+                <a:solidFill>
+                  <a:srgbClr val="9AA39E"/>
+                </a:solidFill>
+                <a:latin typeface="Courier New" pitchFamily="34" charset="0"/>
+                <a:ea typeface="Courier New" pitchFamily="34" charset="-122"/>
+                <a:cs typeface="Courier New" pitchFamily="34" charset="-120"/>
+              </a:rPr>
+              <a:t>$</a:t>
+            </a:r>
+            <a:pPr indent="0" marL="0">
+              <a:lnSpc>
+                <a:spcPct val="105000"/>
+              </a:lnSpc>
+              <a:buNone/>
+            </a:pPr>
+            <a:r>
+              <a:rPr lang="en-US" sz="1109" dirty="0">
+                <a:solidFill>
+                  <a:schemeClr val="bg2"/>
+                </a:solidFill>
+                <a:latin typeface="Courier New" pitchFamily="34" charset="0"/>
+                <a:ea typeface="Courier New" pitchFamily="34" charset="-122"/>
+                <a:cs typeface="Courier New" pitchFamily="34" charset="-120"/>
+              </a:rPr>
+              <a:t> make prepare</a:t>
+            </a:r>
+            <a:endParaRPr lang="en-US" sz="1109" dirty="0"/>
+          </a:p>
+        </p:txBody>
+      </p:sp>
+      <p:sp>
+        <p:nvSpPr>
+          <p:cNvPr id="296" name="Text 293"/>
+          <p:cNvSpPr txBox="1"/>
+          <p:nvPr/>
+        </p:nvSpPr>
+        <p:spPr>
+          <a:xfrm>
+            <a:off x="6362548" y="5318424"/>
+            <a:ext cx="5143652" cy="411480"/>
+          </a:xfrm>
+          <a:prstGeom prst="rect">
+            <a:avLst/>
+          </a:prstGeom>
+          <a:noFill/>
+          <a:ln/>
+        </p:spPr>
+        <p:txBody>
+          <a:bodyPr wrap="square" lIns="0" tIns="0" rIns="0" bIns="0" rtlCol="0" anchor="t"/>
+          <a:lstStyle/>
+          <a:p>
+            <a:pPr indent="0" marL="0">
               <a:lnSpc>
                 <a:spcPct val="100000"/>
               </a:lnSpc>
-              <a:spcAft>
-                <a:spcPts val="1300"/>
-              </a:spcAft>
-              <a:buSzPct val="100000"/>
-              <a:buChar char="–"/>
-            </a:pPr>
-            <a:r>
-              <a:rPr lang="en-US" sz="1950" dirty="0">
-                <a:solidFill>
-                  <a:schemeClr val="tx1"/>
+              <a:buNone/>
+            </a:pPr>
+            <a:r>
+              <a:rPr lang="en-US" sz="1350" dirty="0">
+                <a:solidFill>
+                  <a:schemeClr val="tx2"/>
                 </a:solidFill>
                 <a:latin typeface="Arial" pitchFamily="34" charset="0"/>
                 <a:ea typeface="Arial" pitchFamily="34" charset="-122"/>
                 <a:cs typeface="Arial" pitchFamily="34" charset="-120"/>
               </a:rPr>
-              <a:t>Mostly self-taught but with mentors</a:t>
-            </a:r>
-            <a:endParaRPr lang="en-US" sz="1950" dirty="0"/>
-          </a:p>
-          <a:p>
-            <a:pPr marL="279400" indent="-279400">
+              <a:t>Leave </a:t>
+            </a:r>
+            <a:pPr indent="0" marL="0">
               <a:lnSpc>
                 <a:spcPct val="100000"/>
               </a:lnSpc>
-              <a:spcAft>
-                <a:spcPts val="1300"/>
-              </a:spcAft>
-              <a:buSzPct val="100000"/>
-              <a:buChar char="–"/>
-            </a:pPr>
-            <a:r>
-              <a:rPr lang="en-US" sz="1950" dirty="0">
-                <a:solidFill>
-                  <a:schemeClr val="tx1"/>
+              <a:buNone/>
+            </a:pPr>
+            <a:r>
+              <a:rPr lang="en-US" sz="1190" dirty="0">
+                <a:solidFill>
+                  <a:schemeClr val="tx2"/>
+                </a:solidFill>
+                <a:latin typeface="Courier New" pitchFamily="34" charset="0"/>
+                <a:ea typeface="Courier New" pitchFamily="34" charset="-122"/>
+                <a:cs typeface="Courier New" pitchFamily="34" charset="-120"/>
+              </a:rPr>
+              <a:t>make prepare</a:t>
+            </a:r>
+            <a:pPr indent="0" marL="0">
+              <a:lnSpc>
+                <a:spcPct val="100000"/>
+              </a:lnSpc>
+              <a:buNone/>
+            </a:pPr>
+            <a:r>
+              <a:rPr lang="en-US" sz="1350" dirty="0">
+                <a:solidFill>
+                  <a:schemeClr val="tx2"/>
                 </a:solidFill>
                 <a:latin typeface="Arial" pitchFamily="34" charset="0"/>
                 <a:ea typeface="Arial" pitchFamily="34" charset="-122"/>
                 <a:cs typeface="Arial" pitchFamily="34" charset="-120"/>
               </a:rPr>
-              <a:t>Primary background working with an ecommerce SaaS in Rails</a:t>
-            </a:r>
-            <a:endParaRPr lang="en-US" sz="1950" dirty="0"/>
-          </a:p>
-          <a:p>
-            <a:pPr marL="279400" indent="-279400">
-              <a:lnSpc>
-                <a:spcPct val="100000"/>
-              </a:lnSpc>
-              <a:spcAft>
-                <a:spcPts val="1300"/>
-              </a:spcAft>
-              <a:buSzPct val="100000"/>
-              <a:buChar char="–"/>
-            </a:pPr>
-            <a:r>
-              <a:rPr lang="en-US" sz="1950" dirty="0">
-                <a:solidFill>
-                  <a:schemeClr val="tx1"/>
-                </a:solidFill>
-                <a:latin typeface="Arial" pitchFamily="34" charset="0"/>
-                <a:ea typeface="Arial" pitchFamily="34" charset="-122"/>
-                <a:cs typeface="Arial" pitchFamily="34" charset="-120"/>
-              </a:rPr>
-              <a:t>Agency work with small environments of different ages and levels of maintenance.</a:t>
-            </a:r>
-            <a:endParaRPr lang="en-US" sz="1950" dirty="0"/>
+              <a:t> running while we go through deployment. It starts Floci and downloads the demo images.</a:t>
+            </a:r>
+            <a:endParaRPr lang="en-US" sz="1350" dirty="0"/>
           </a:p>
         </p:txBody>
       </p:sp>
@@ -30849,7 +36909,7 @@
                 <a:ea typeface="Courier New" pitchFamily="34" charset="-122"/>
                 <a:cs typeface="Courier New" pitchFamily="34" charset="-120"/>
               </a:rPr>
-              <a:t>OPTIONAL · YOU CAN JUST WATCH · NO AWS ACCOUNT NEEDED</a:t>
+              <a:t>THE ROAD HERE</a:t>
             </a:r>
             <a:endParaRPr lang="en-US" sz="1100" dirty="0"/>
           </a:p>
@@ -30890,7 +36950,7 @@
                 <a:ea typeface="Arial" pitchFamily="34" charset="-122"/>
                 <a:cs typeface="Arial" pitchFamily="34" charset="-120"/>
               </a:rPr>
-              <a:t>Following along? Start these now</a:t>
+              <a:t>Where I'm coming from</a:t>
             </a:r>
             <a:endParaRPr lang="en-US" sz="3600" dirty="0"/>
           </a:p>
@@ -30898,37 +36958,14 @@
       </p:sp>
       <p:sp>
         <p:nvSpPr>
-          <p:cNvPr id="5" name="Shape 2"/>
-          <p:cNvSpPr/>
+          <p:cNvPr id="5" name="Bullets"/>
+          <p:cNvSpPr txBox="1"/>
           <p:nvPr/>
         </p:nvSpPr>
         <p:spPr>
           <a:xfrm>
             <a:off x="685800" y="1645920"/>
-            <a:ext cx="10820400" cy="0"/>
-          </a:xfrm>
-          <a:prstGeom prst="line">
-            <a:avLst/>
-          </a:prstGeom>
-          <a:noFill/>
-          <a:ln w="9525">
-            <a:solidFill>
-              <a:srgbClr val="D3D9D2"/>
-            </a:solidFill>
-            <a:prstDash val="solid"/>
-          </a:ln>
-        </p:spPr>
-      </p:sp>
-      <p:sp>
-        <p:nvSpPr>
-          <p:cNvPr id="6" name="Fact label"/>
-          <p:cNvSpPr txBox="1"/>
-          <p:nvPr/>
-        </p:nvSpPr>
-        <p:spPr>
-          <a:xfrm>
-            <a:off x="685800" y="1801368"/>
-            <a:ext cx="1426464" cy="228600"/>
+            <a:ext cx="10820400" cy="1801368"/>
           </a:xfrm>
           <a:prstGeom prst="rect">
             <a:avLst/>
@@ -30940,50 +36977,18 @@
           <a:bodyPr wrap="square" lIns="0" tIns="0" rIns="0" bIns="0" rtlCol="0" anchor="t"/>
           <a:lstStyle/>
           <a:p>
-            <a:pPr indent="0" marL="0">
-              <a:buNone/>
-            </a:pPr>
-            <a:r>
-              <a:rPr lang="en-US" sz="1050" spc="100" kern="0" dirty="0">
-                <a:solidFill>
-                  <a:schemeClr val="tx2"/>
-                </a:solidFill>
-                <a:latin typeface="Courier New" pitchFamily="34" charset="0"/>
-                <a:ea typeface="Courier New" pitchFamily="34" charset="-122"/>
-                <a:cs typeface="Courier New" pitchFamily="34" charset="-120"/>
-              </a:rPr>
-              <a:t>INSTALL</a:t>
-            </a:r>
-            <a:endParaRPr lang="en-US" sz="1050" dirty="0"/>
-          </a:p>
-        </p:txBody>
-      </p:sp>
-      <p:sp>
-        <p:nvSpPr>
-          <p:cNvPr id="7" name="Fact"/>
-          <p:cNvSpPr txBox="1"/>
-          <p:nvPr/>
-        </p:nvSpPr>
-        <p:spPr>
-          <a:xfrm>
-            <a:off x="2286000" y="1773936"/>
-            <a:ext cx="9220200" cy="274320"/>
-          </a:xfrm>
-          <a:prstGeom prst="rect">
-            <a:avLst/>
-          </a:prstGeom>
-          <a:noFill/>
-          <a:ln/>
-        </p:spPr>
-        <p:txBody>
-          <a:bodyPr wrap="square" lIns="0" tIns="0" rIns="0" bIns="0" rtlCol="0" anchor="t"/>
-          <a:lstStyle/>
-          <a:p>
-            <a:pPr indent="0" marL="0">
-              <a:buNone/>
-            </a:pPr>
-            <a:r>
-              <a:rPr lang="en-US" sz="1650" dirty="0">
+            <a:pPr marL="279400" indent="-279400">
+              <a:lnSpc>
+                <a:spcPct val="100000"/>
+              </a:lnSpc>
+              <a:spcAft>
+                <a:spcPts val="1300"/>
+              </a:spcAft>
+              <a:buSzPct val="100000"/>
+              <a:buChar char="–"/>
+            </a:pPr>
+            <a:r>
+              <a:rPr lang="en-US" sz="1950" dirty="0">
                 <a:solidFill>
                   <a:schemeClr val="tx1"/>
                 </a:solidFill>
@@ -30991,100 +36996,23 @@
                 <a:ea typeface="Arial" pitchFamily="34" charset="-122"/>
                 <a:cs typeface="Arial" pitchFamily="34" charset="-120"/>
               </a:rPr>
-              <a:t>Docker (running, with Compose v2) · Terraform 1.5 or later · the AWS CLI</a:t>
-            </a:r>
-            <a:endParaRPr lang="en-US" sz="1650" dirty="0"/>
-          </a:p>
-        </p:txBody>
-      </p:sp>
-      <p:sp>
-        <p:nvSpPr>
-          <p:cNvPr id="8" name="Shape 5"/>
-          <p:cNvSpPr/>
-          <p:nvPr/>
-        </p:nvSpPr>
-        <p:spPr>
-          <a:xfrm>
-            <a:off x="685800" y="2258568"/>
-            <a:ext cx="10820400" cy="0"/>
-          </a:xfrm>
-          <a:prstGeom prst="line">
-            <a:avLst/>
-          </a:prstGeom>
-          <a:noFill/>
-          <a:ln w="9525">
-            <a:solidFill>
-              <a:srgbClr val="D3D9D2"/>
-            </a:solidFill>
-            <a:prstDash val="solid"/>
-          </a:ln>
-        </p:spPr>
-      </p:sp>
-      <p:sp>
-        <p:nvSpPr>
-          <p:cNvPr id="9" name="Fact label"/>
-          <p:cNvSpPr txBox="1"/>
-          <p:nvPr/>
-        </p:nvSpPr>
-        <p:spPr>
-          <a:xfrm>
-            <a:off x="685800" y="2414016"/>
-            <a:ext cx="1426464" cy="228600"/>
-          </a:xfrm>
-          <a:prstGeom prst="rect">
-            <a:avLst/>
-          </a:prstGeom>
-          <a:noFill/>
-          <a:ln/>
-        </p:spPr>
-        <p:txBody>
-          <a:bodyPr wrap="square" lIns="0" tIns="0" rIns="0" bIns="0" rtlCol="0" anchor="t"/>
-          <a:lstStyle/>
-          <a:p>
-            <a:pPr indent="0" marL="0">
-              <a:buNone/>
-            </a:pPr>
-            <a:r>
-              <a:rPr lang="en-US" sz="1050" spc="100" kern="0" dirty="0">
-                <a:solidFill>
-                  <a:schemeClr val="tx2"/>
-                </a:solidFill>
-                <a:latin typeface="Courier New" pitchFamily="34" charset="0"/>
-                <a:ea typeface="Courier New" pitchFamily="34" charset="-122"/>
-                <a:cs typeface="Courier New" pitchFamily="34" charset="-120"/>
-              </a:rPr>
-              <a:t>LATER STACKS</a:t>
-            </a:r>
-            <a:endParaRPr lang="en-US" sz="1050" dirty="0"/>
-          </a:p>
-        </p:txBody>
-      </p:sp>
-      <p:sp>
-        <p:nvSpPr>
-          <p:cNvPr id="10" name="Fact"/>
-          <p:cNvSpPr txBox="1"/>
-          <p:nvPr/>
-        </p:nvSpPr>
-        <p:spPr>
-          <a:xfrm>
-            <a:off x="2286000" y="2386584"/>
-            <a:ext cx="9220200" cy="274320"/>
-          </a:xfrm>
-          <a:prstGeom prst="rect">
-            <a:avLst/>
-          </a:prstGeom>
-          <a:noFill/>
-          <a:ln/>
-        </p:spPr>
-        <p:txBody>
-          <a:bodyPr wrap="square" lIns="0" tIns="0" rIns="0" bIns="0" rtlCol="0" anchor="t"/>
-          <a:lstStyle/>
-          <a:p>
-            <a:pPr indent="0" marL="0">
-              <a:buNone/>
-            </a:pPr>
-            <a:r>
-              <a:rPr lang="en-US" sz="1650" dirty="0">
+              <a:t>Full-stack developer who had to learn the infrastructure underneath my apps.</a:t>
+            </a:r>
+            <a:endParaRPr lang="en-US" sz="1950" dirty="0"/>
+          </a:p>
+          <a:p>
+            <a:pPr marL="279400" indent="-279400">
+              <a:lnSpc>
+                <a:spcPct val="100000"/>
+              </a:lnSpc>
+              <a:spcAft>
+                <a:spcPts val="1300"/>
+              </a:spcAft>
+              <a:buSzPct val="100000"/>
+              <a:buChar char="–"/>
+            </a:pPr>
+            <a:r>
+              <a:rPr lang="en-US" sz="1950" dirty="0">
                 <a:solidFill>
                   <a:schemeClr val="tx1"/>
                 </a:solidFill>
@@ -31092,345 +37020,57 @@
                 <a:ea typeface="Arial" pitchFamily="34" charset="-122"/>
                 <a:cs typeface="Arial" pitchFamily="34" charset="-120"/>
               </a:rPr>
-              <a:t>Stack 3 only: Ruby 4.0.5 and Bundler, or just watch that one</a:t>
-            </a:r>
-            <a:endParaRPr lang="en-US" sz="1650" dirty="0"/>
-          </a:p>
-        </p:txBody>
-      </p:sp>
-      <p:sp>
-        <p:nvSpPr>
-          <p:cNvPr id="11" name="Terminal"/>
-          <p:cNvSpPr txBox="1"/>
-          <p:nvPr/>
-        </p:nvSpPr>
-        <p:spPr>
-          <a:xfrm>
-            <a:off x="685800" y="2935224"/>
-            <a:ext cx="10820400" cy="2140649"/>
-          </a:xfrm>
-          <a:prstGeom prst="roundRect">
-            <a:avLst>
-              <a:gd name="adj" fmla="val 2563"/>
-            </a:avLst>
-          </a:prstGeom>
-          <a:solidFill>
-            <a:schemeClr val="tx1"/>
-          </a:solidFill>
-          <a:ln/>
-        </p:spPr>
-        <p:txBody>
-          <a:bodyPr wrap="square" lIns="246888" tIns="246888" rIns="246888" bIns="246888" rtlCol="0" anchor="t"/>
-          <a:lstStyle/>
-          <a:p>
-            <a:pPr indent="0" marL="0">
+              <a:t>Mostly self-taught but with mentors</a:t>
+            </a:r>
+            <a:endParaRPr lang="en-US" sz="1950" dirty="0"/>
+          </a:p>
+          <a:p>
+            <a:pPr marL="279400" indent="-279400">
               <a:lnSpc>
-                <a:spcPct val="105000"/>
+                <a:spcPct val="100000"/>
               </a:lnSpc>
-              <a:buNone/>
-            </a:pPr>
-            <a:r>
-              <a:rPr lang="en-US" sz="1425" dirty="0">
-                <a:solidFill>
-                  <a:srgbClr val="9AA39E"/>
-                </a:solidFill>
-                <a:latin typeface="Courier New" pitchFamily="34" charset="0"/>
-                <a:ea typeface="Courier New" pitchFamily="34" charset="-122"/>
-                <a:cs typeface="Courier New" pitchFamily="34" charset="-120"/>
-              </a:rPr>
-              <a:t>$</a:t>
-            </a:r>
-            <a:pPr indent="0" marL="0">
+              <a:spcAft>
+                <a:spcPts val="1300"/>
+              </a:spcAft>
+              <a:buSzPct val="100000"/>
+              <a:buChar char="–"/>
+            </a:pPr>
+            <a:r>
+              <a:rPr lang="en-US" sz="1950" dirty="0">
+                <a:solidFill>
+                  <a:schemeClr val="tx1"/>
+                </a:solidFill>
+                <a:latin typeface="Arial" pitchFamily="34" charset="0"/>
+                <a:ea typeface="Arial" pitchFamily="34" charset="-122"/>
+                <a:cs typeface="Arial" pitchFamily="34" charset="-120"/>
+              </a:rPr>
+              <a:t>Primary background working with an ecommerce SaaS in Rails</a:t>
+            </a:r>
+            <a:endParaRPr lang="en-US" sz="1950" dirty="0"/>
+          </a:p>
+          <a:p>
+            <a:pPr marL="279400" indent="-279400">
               <a:lnSpc>
-                <a:spcPct val="105000"/>
+                <a:spcPct val="100000"/>
               </a:lnSpc>
-              <a:buNone/>
-            </a:pPr>
-            <a:r>
-              <a:rPr lang="en-US" sz="1425" dirty="0">
-                <a:solidFill>
-                  <a:schemeClr val="bg2"/>
-                </a:solidFill>
-                <a:latin typeface="Courier New" pitchFamily="34" charset="0"/>
-                <a:ea typeface="Courier New" pitchFamily="34" charset="-122"/>
-                <a:cs typeface="Courier New" pitchFamily="34" charset="-120"/>
-              </a:rPr>
-              <a:t> docker pull floci/floci:latest                </a:t>
-            </a:r>
-            <a:pPr indent="0" marL="0">
-              <a:lnSpc>
-                <a:spcPct val="105000"/>
-              </a:lnSpc>
-              <a:buNone/>
-            </a:pPr>
-            <a:r>
-              <a:rPr lang="en-US" sz="1425" dirty="0">
-                <a:solidFill>
-                  <a:srgbClr val="9AA39E"/>
-                </a:solidFill>
-                <a:latin typeface="Courier New" pitchFamily="34" charset="0"/>
-                <a:ea typeface="Courier New" pitchFamily="34" charset="-122"/>
-                <a:cs typeface="Courier New" pitchFamily="34" charset="-120"/>
-              </a:rPr>
-              <a:t># 324 MB</a:t>
-            </a:r>
-            <a:endParaRPr lang="en-US" sz="1425" dirty="0"/>
-          </a:p>
-          <a:p>
-            <a:pPr indent="0" marL="0">
-              <a:lnSpc>
-                <a:spcPct val="105000"/>
-              </a:lnSpc>
-              <a:buNone/>
-            </a:pPr>
-            <a:r>
-              <a:rPr lang="en-US" sz="1425" dirty="0">
-                <a:solidFill>
-                  <a:srgbClr val="9AA39E"/>
-                </a:solidFill>
-                <a:latin typeface="Courier New" pitchFamily="34" charset="0"/>
-                <a:ea typeface="Courier New" pitchFamily="34" charset="-122"/>
-                <a:cs typeface="Courier New" pitchFamily="34" charset="-120"/>
-              </a:rPr>
-              <a:t>$</a:t>
-            </a:r>
-            <a:pPr indent="0" marL="0">
-              <a:lnSpc>
-                <a:spcPct val="105000"/>
-              </a:lnSpc>
-              <a:buNone/>
-            </a:pPr>
-            <a:r>
-              <a:rPr lang="en-US" sz="1425" dirty="0">
-                <a:solidFill>
-                  <a:schemeClr val="bg2"/>
-                </a:solidFill>
-                <a:latin typeface="Courier New" pitchFamily="34" charset="0"/>
-                <a:ea typeface="Courier New" pitchFamily="34" charset="-122"/>
-                <a:cs typeface="Courier New" pitchFamily="34" charset="-120"/>
-              </a:rPr>
-              <a:t> docker pull public.ecr.aws/lambda/nodejs:22   </a:t>
-            </a:r>
-            <a:pPr indent="0" marL="0">
-              <a:lnSpc>
-                <a:spcPct val="105000"/>
-              </a:lnSpc>
-              <a:buNone/>
-            </a:pPr>
-            <a:r>
-              <a:rPr lang="en-US" sz="1425" dirty="0">
-                <a:solidFill>
-                  <a:srgbClr val="9AA39E"/>
-                </a:solidFill>
-                <a:latin typeface="Courier New" pitchFamily="34" charset="0"/>
-                <a:ea typeface="Courier New" pitchFamily="34" charset="-122"/>
-                <a:cs typeface="Courier New" pitchFamily="34" charset="-120"/>
-              </a:rPr>
-              <a:t># 617 MB · stack 2</a:t>
-            </a:r>
-            <a:endParaRPr lang="en-US" sz="1425" dirty="0"/>
-          </a:p>
-          <a:p>
-            <a:pPr indent="0" marL="0">
-              <a:lnSpc>
-                <a:spcPct val="105000"/>
-              </a:lnSpc>
-              <a:buNone/>
-            </a:pPr>
-            <a:r>
-              <a:rPr lang="en-US" sz="1425" dirty="0">
-                <a:solidFill>
-                  <a:srgbClr val="9AA39E"/>
-                </a:solidFill>
-                <a:latin typeface="Courier New" pitchFamily="34" charset="0"/>
-                <a:ea typeface="Courier New" pitchFamily="34" charset="-122"/>
-                <a:cs typeface="Courier New" pitchFamily="34" charset="-120"/>
-              </a:rPr>
-              <a:t>$</a:t>
-            </a:r>
-            <a:pPr indent="0" marL="0">
-              <a:lnSpc>
-                <a:spcPct val="105000"/>
-              </a:lnSpc>
-              <a:buNone/>
-            </a:pPr>
-            <a:r>
-              <a:rPr lang="en-US" sz="1425" dirty="0">
-                <a:solidFill>
-                  <a:schemeClr val="bg2"/>
-                </a:solidFill>
-                <a:latin typeface="Courier New" pitchFamily="34" charset="0"/>
-                <a:ea typeface="Courier New" pitchFamily="34" charset="-122"/>
-                <a:cs typeface="Courier New" pitchFamily="34" charset="-120"/>
-              </a:rPr>
-              <a:t> docker pull postgres:15.17-alpine             </a:t>
-            </a:r>
-            <a:pPr indent="0" marL="0">
-              <a:lnSpc>
-                <a:spcPct val="105000"/>
-              </a:lnSpc>
-              <a:buNone/>
-            </a:pPr>
-            <a:r>
-              <a:rPr lang="en-US" sz="1425" dirty="0">
-                <a:solidFill>
-                  <a:srgbClr val="9AA39E"/>
-                </a:solidFill>
-                <a:latin typeface="Courier New" pitchFamily="34" charset="0"/>
-                <a:ea typeface="Courier New" pitchFamily="34" charset="-122"/>
-                <a:cs typeface="Courier New" pitchFamily="34" charset="-120"/>
-              </a:rPr>
-              <a:t># 386 MB · the databases</a:t>
-            </a:r>
-            <a:endParaRPr lang="en-US" sz="1425" dirty="0"/>
-          </a:p>
-          <a:p>
-            <a:pPr indent="0" marL="0">
-              <a:lnSpc>
-                <a:spcPct val="105000"/>
-              </a:lnSpc>
-              <a:buNone/>
-            </a:pPr>
-            <a:r>
-              <a:rPr lang="en-US" sz="1425" dirty="0">
-                <a:solidFill>
-                  <a:srgbClr val="9AA39E"/>
-                </a:solidFill>
-                <a:latin typeface="Courier New" pitchFamily="34" charset="0"/>
-                <a:ea typeface="Courier New" pitchFamily="34" charset="-122"/>
-                <a:cs typeface="Courier New" pitchFamily="34" charset="-120"/>
-              </a:rPr>
-              <a:t>$</a:t>
-            </a:r>
-            <a:pPr indent="0" marL="0">
-              <a:lnSpc>
-                <a:spcPct val="105000"/>
-              </a:lnSpc>
-              <a:buNone/>
-            </a:pPr>
-            <a:r>
-              <a:rPr lang="en-US" sz="1425" dirty="0">
-                <a:solidFill>
-                  <a:schemeClr val="bg2"/>
-                </a:solidFill>
-                <a:latin typeface="Courier New" pitchFamily="34" charset="0"/>
-                <a:ea typeface="Courier New" pitchFamily="34" charset="-122"/>
-                <a:cs typeface="Courier New" pitchFamily="34" charset="-120"/>
-              </a:rPr>
-              <a:t> docker pull node:24-slim                      </a:t>
-            </a:r>
-            <a:pPr indent="0" marL="0">
-              <a:lnSpc>
-                <a:spcPct val="105000"/>
-              </a:lnSpc>
-              <a:buNone/>
-            </a:pPr>
-            <a:r>
-              <a:rPr lang="en-US" sz="1425" dirty="0">
-                <a:solidFill>
-                  <a:srgbClr val="9AA39E"/>
-                </a:solidFill>
-                <a:latin typeface="Courier New" pitchFamily="34" charset="0"/>
-                <a:ea typeface="Courier New" pitchFamily="34" charset="-122"/>
-                <a:cs typeface="Courier New" pitchFamily="34" charset="-120"/>
-              </a:rPr>
-              <a:t># 351 MB · stack 4 build</a:t>
-            </a:r>
-            <a:endParaRPr lang="en-US" sz="1425" dirty="0"/>
-          </a:p>
-          <a:p>
-            <a:pPr indent="0" marL="0">
-              <a:lnSpc>
-                <a:spcPct val="105000"/>
-              </a:lnSpc>
-              <a:buNone/>
-            </a:pPr>
-            <a:r>
-              <a:rPr lang="en-US" sz="1425" dirty="0">
-                <a:solidFill>
-                  <a:srgbClr val="9AA39E"/>
-                </a:solidFill>
-                <a:latin typeface="Courier New" pitchFamily="34" charset="0"/>
-                <a:ea typeface="Courier New" pitchFamily="34" charset="-122"/>
-                <a:cs typeface="Courier New" pitchFamily="34" charset="-120"/>
-              </a:rPr>
-              <a:t>$</a:t>
-            </a:r>
-            <a:pPr indent="0" marL="0">
-              <a:lnSpc>
-                <a:spcPct val="105000"/>
-              </a:lnSpc>
-              <a:buNone/>
-            </a:pPr>
-            <a:r>
-              <a:rPr lang="en-US" sz="1425" dirty="0">
-                <a:solidFill>
-                  <a:schemeClr val="bg2"/>
-                </a:solidFill>
-                <a:latin typeface="Courier New" pitchFamily="34" charset="0"/>
-                <a:ea typeface="Courier New" pitchFamily="34" charset="-122"/>
-                <a:cs typeface="Courier New" pitchFamily="34" charset="-120"/>
-              </a:rPr>
-              <a:t> for i in ruby:4.0.5-slim docker:29-cli registry:3 \</a:t>
-            </a:r>
-            <a:endParaRPr lang="en-US" sz="1425" dirty="0"/>
-          </a:p>
-          <a:p>
-            <a:pPr indent="0" marL="0">
-              <a:lnSpc>
-                <a:spcPct val="105000"/>
-              </a:lnSpc>
-              <a:buNone/>
-            </a:pPr>
-            <a:r>
-              <a:rPr lang="en-US" sz="1425" dirty="0">
-                <a:solidFill>
-                  <a:schemeClr val="bg2"/>
-                </a:solidFill>
-                <a:latin typeface="Courier New" pitchFamily="34" charset="0"/>
-                <a:ea typeface="Courier New" pitchFamily="34" charset="-122"/>
-                <a:cs typeface="Courier New" pitchFamily="34" charset="-120"/>
-              </a:rPr>
-              <a:t>    basecamp/kamal-proxy:v0.9.2 moby/buildkit:buildx-stable-1; do</a:t>
-            </a:r>
-            <a:endParaRPr lang="en-US" sz="1425" dirty="0"/>
-          </a:p>
-          <a:p>
-            <a:pPr indent="0" marL="0">
-              <a:lnSpc>
-                <a:spcPct val="105000"/>
-              </a:lnSpc>
-              <a:buNone/>
-            </a:pPr>
-            <a:r>
-              <a:rPr lang="en-US" sz="1425" dirty="0">
-                <a:solidFill>
-                  <a:schemeClr val="bg2"/>
-                </a:solidFill>
-                <a:latin typeface="Courier New" pitchFamily="34" charset="0"/>
-                <a:ea typeface="Courier New" pitchFamily="34" charset="-122"/>
-                <a:cs typeface="Courier New" pitchFamily="34" charset="-120"/>
-              </a:rPr>
-              <a:t>  docker pull $i; done                    </a:t>
-            </a:r>
-            <a:pPr indent="0" marL="0">
-              <a:lnSpc>
-                <a:spcPct val="105000"/>
-              </a:lnSpc>
-              <a:buNone/>
-            </a:pPr>
-            <a:r>
-              <a:rPr lang="en-US" sz="1425" dirty="0">
-                <a:solidFill>
-                  <a:srgbClr val="9AA39E"/>
-                </a:solidFill>
-                <a:latin typeface="Courier New" pitchFamily="34" charset="0"/>
-                <a:ea typeface="Courier New" pitchFamily="34" charset="-122"/>
-                <a:cs typeface="Courier New" pitchFamily="34" charset="-120"/>
-              </a:rPr>
-              <a:t># stack 3: 1.1 GB</a:t>
-            </a:r>
-            <a:endParaRPr lang="en-US" sz="1425" dirty="0"/>
+              <a:spcAft>
+                <a:spcPts val="1300"/>
+              </a:spcAft>
+              <a:buSzPct val="100000"/>
+              <a:buChar char="–"/>
+            </a:pPr>
+            <a:r>
+              <a:rPr lang="en-US" sz="1950" dirty="0">
+                <a:solidFill>
+                  <a:schemeClr val="tx1"/>
+                </a:solidFill>
+                <a:latin typeface="Arial" pitchFamily="34" charset="0"/>
+                <a:ea typeface="Arial" pitchFamily="34" charset="-122"/>
+                <a:cs typeface="Arial" pitchFamily="34" charset="-120"/>
+              </a:rPr>
+              <a:t>Agency work with small environments of different ages and levels of maintenance.</a:t>
+            </a:r>
+            <a:endParaRPr lang="en-US" sz="1950" dirty="0"/>
           </a:p>
         </p:txBody>
       </p:sp>
@@ -52435,13 +58075,62 @@
       </p:sp>
       <p:sp>
         <p:nvSpPr>
-          <p:cNvPr id="5" name="Terminal"/>
+          <p:cNvPr id="5" name="Statement"/>
           <p:cNvSpPr txBox="1"/>
           <p:nvPr/>
         </p:nvSpPr>
         <p:spPr>
           <a:xfrm>
             <a:off x="685800" y="1645920"/>
+            <a:ext cx="8595360" cy="457200"/>
+          </a:xfrm>
+          <a:prstGeom prst="rect">
+            <a:avLst/>
+          </a:prstGeom>
+          <a:noFill/>
+          <a:ln/>
+        </p:spPr>
+        <p:txBody>
+          <a:bodyPr wrap="square" lIns="0" tIns="0" rIns="0" bIns="0" rtlCol="0" anchor="t"/>
+          <a:lstStyle/>
+          <a:p>
+            <a:pPr indent="0" marL="0">
+              <a:lnSpc>
+                <a:spcPct val="100000"/>
+              </a:lnSpc>
+              <a:buNone/>
+            </a:pPr>
+            <a:r>
+              <a:rPr lang="en-US" sz="3000" u="sng" dirty="0">
+                <a:solidFill>
+                  <a:schemeClr val="tx1"/>
+                </a:solidFill>
+                <a:latin typeface="Arial" pitchFamily="34" charset="0"/>
+                <a:ea typeface="Arial" pitchFamily="34" charset="-122"/>
+                <a:cs typeface="Arial" pitchFamily="34" charset="-120"/>
+                <a:hlinkClick r:id="rId1" invalidUrl="" action="" tgtFrame="" tooltip="" history="1" highlightClick="0" endSnd="0">
+                  <a:extLst>
+                    <a:ext uri="{A12FA001-AC4F-418D-AE19-62706E023703}">
+                      <ahyp:hlinkClr xmlns:ahyp="http://schemas.microsoft.com/office/drawing/2018/hyperlinkcolor" val="tx"/>
+                    </a:ext>
+                  </a:extLst>
+                </a:hlinkClick>
+              </a:rPr>
+              <a:t>https://github.com/raysapida/terraform_demo</a:t>
+            </a:r>
+            <a:endParaRPr lang="en-US" sz="3000" dirty="0"/>
+          </a:p>
+        </p:txBody>
+      </p:sp>
+      <p:sp>
+        <p:nvSpPr>
+          <p:cNvPr id="6" name="Terminal"/>
+          <p:cNvSpPr txBox="1"/>
+          <p:nvPr/>
+        </p:nvSpPr>
+        <p:spPr>
+          <a:xfrm>
+            <a:off x="685800" y="2286000"/>
             <a:ext cx="5143652" cy="2140649"/>
           </a:xfrm>
           <a:prstGeom prst="roundRect">
@@ -52720,13 +58409,13 @@
       </p:sp>
       <p:sp>
         <p:nvSpPr>
-          <p:cNvPr id="6" name="Text 3"/>
+          <p:cNvPr id="7" name="Text 4"/>
           <p:cNvSpPr txBox="1"/>
           <p:nvPr/>
         </p:nvSpPr>
         <p:spPr>
           <a:xfrm>
-            <a:off x="6362548" y="1645920"/>
+            <a:off x="6362548" y="2286000"/>
             <a:ext cx="5143652" cy="201168"/>
           </a:xfrm>
           <a:prstGeom prst="rect">
@@ -52759,13 +58448,13 @@
       </p:sp>
       <p:sp>
         <p:nvSpPr>
-          <p:cNvPr id="7" name="Callout"/>
+          <p:cNvPr id="8" name="Callout"/>
           <p:cNvSpPr txBox="1"/>
           <p:nvPr/>
         </p:nvSpPr>
         <p:spPr>
           <a:xfrm>
-            <a:off x="6362548" y="2039112"/>
+            <a:off x="6362548" y="2679192"/>
             <a:ext cx="5143652" cy="1005840"/>
           </a:xfrm>
           <a:prstGeom prst="rect">
@@ -52794,129 +58483,6 @@
                 <a:cs typeface="Arial" pitchFamily="34" charset="-120"/>
               </a:rPr>
               <a:t>Docker with Compose v2, Terraform ≥ 1.5, make and curl. AWS CLI for the static-site demo; Ruby 4.0.5 and Bundler for Rails. Node is optional. No AWS account and no credentials.</a:t>
-            </a:r>
-            <a:endParaRPr lang="en-US" sz="1650" dirty="0"/>
-          </a:p>
-        </p:txBody>
-      </p:sp>
-      <p:sp>
-        <p:nvSpPr>
-          <p:cNvPr id="8" name="Text 5"/>
-          <p:cNvSpPr txBox="1"/>
-          <p:nvPr/>
-        </p:nvSpPr>
-        <p:spPr>
-          <a:xfrm>
-            <a:off x="6362548" y="3236976"/>
-            <a:ext cx="5143652" cy="201168"/>
-          </a:xfrm>
-          <a:prstGeom prst="rect">
-            <a:avLst/>
-          </a:prstGeom>
-          <a:noFill/>
-          <a:ln/>
-        </p:spPr>
-        <p:txBody>
-          <a:bodyPr wrap="square" lIns="0" tIns="0" rIns="0" bIns="0" rtlCol="0" anchor="t"/>
-          <a:lstStyle/>
-          <a:p>
-            <a:pPr indent="0" marL="0">
-              <a:buNone/>
-            </a:pPr>
-            <a:r>
-              <a:rPr lang="en-US" sz="1050" spc="100" kern="0" dirty="0">
-                <a:solidFill>
-                  <a:schemeClr val="tx2"/>
-                </a:solidFill>
-                <a:latin typeface="Courier New" pitchFamily="34" charset="0"/>
-                <a:ea typeface="Courier New" pitchFamily="34" charset="-122"/>
-                <a:cs typeface="Courier New" pitchFamily="34" charset="-120"/>
-              </a:rPr>
-              <a:t>FURTHER WATCHING</a:t>
-            </a:r>
-            <a:endParaRPr lang="en-US" sz="1050" dirty="0"/>
-          </a:p>
-        </p:txBody>
-      </p:sp>
-      <p:sp>
-        <p:nvSpPr>
-          <p:cNvPr id="9" name="Callout"/>
-          <p:cNvSpPr txBox="1"/>
-          <p:nvPr/>
-        </p:nvSpPr>
-        <p:spPr>
-          <a:xfrm>
-            <a:off x="6362548" y="3630168"/>
-            <a:ext cx="5143652" cy="754380"/>
-          </a:xfrm>
-          <a:prstGeom prst="rect">
-            <a:avLst/>
-          </a:prstGeom>
-          <a:noFill/>
-          <a:ln/>
-        </p:spPr>
-        <p:txBody>
-          <a:bodyPr wrap="square" lIns="0" tIns="0" rIns="0" bIns="0" rtlCol="0" anchor="t"/>
-          <a:lstStyle/>
-          <a:p>
-            <a:pPr indent="0" marL="0">
-              <a:lnSpc>
-                <a:spcPct val="100000"/>
-              </a:lnSpc>
-              <a:buNone/>
-            </a:pPr>
-            <a:r>
-              <a:rPr lang="en-US" sz="1650" dirty="0">
-                <a:solidFill>
-                  <a:schemeClr val="tx1"/>
-                </a:solidFill>
-                <a:latin typeface="Arial" pitchFamily="34" charset="0"/>
-                <a:ea typeface="Arial" pitchFamily="34" charset="-122"/>
-                <a:cs typeface="Arial" pitchFamily="34" charset="-120"/>
-              </a:rPr>
-              <a:t>Better Stack, "This Tool Runs Real AWS Services on Your Laptop For Free (Floci)" · youtu.be/7s462S-qRY4</a:t>
-            </a:r>
-            <a:endParaRPr lang="en-US" sz="1650" dirty="0"/>
-          </a:p>
-        </p:txBody>
-      </p:sp>
-      <p:sp>
-        <p:nvSpPr>
-          <p:cNvPr id="10" name="Callout"/>
-          <p:cNvSpPr txBox="1"/>
-          <p:nvPr/>
-        </p:nvSpPr>
-        <p:spPr>
-          <a:xfrm>
-            <a:off x="6362548" y="4576572"/>
-            <a:ext cx="5143652" cy="754380"/>
-          </a:xfrm>
-          <a:prstGeom prst="rect">
-            <a:avLst/>
-          </a:prstGeom>
-          <a:noFill/>
-          <a:ln/>
-        </p:spPr>
-        <p:txBody>
-          <a:bodyPr wrap="square" lIns="0" tIns="0" rIns="0" bIns="0" rtlCol="0" anchor="t"/>
-          <a:lstStyle/>
-          <a:p>
-            <a:pPr indent="0" marL="0">
-              <a:lnSpc>
-                <a:spcPct val="100000"/>
-              </a:lnSpc>
-              <a:buNone/>
-            </a:pPr>
-            <a:r>
-              <a:rPr lang="en-US" sz="1650" dirty="0">
-                <a:solidFill>
-                  <a:schemeClr val="tx1"/>
-                </a:solidFill>
-                <a:latin typeface="Arial" pitchFamily="34" charset="0"/>
-                <a:ea typeface="Arial" pitchFamily="34" charset="-122"/>
-                <a:cs typeface="Arial" pitchFamily="34" charset="-120"/>
-              </a:rPr>
-              <a:t>AwesomeFOSS, "Floci: The Drop-In LocalStack Replacement That Stays Free Forever" · youtu.be/brHYpf4yKKI</a:t>
             </a:r>
             <a:endParaRPr lang="en-US" sz="1650" dirty="0"/>
           </a:p>
